--- a/assets/slides/Technical_Interview_101_Hash Tables.pptx
+++ b/assets/slides/Technical_Interview_101_Hash Tables.pptx
@@ -26,9 +26,12 @@
     <p:sldId id="274" r:id="rId20"/>
     <p:sldId id="275" r:id="rId21"/>
     <p:sldId id="276" r:id="rId22"/>
+    <p:sldId id="277" r:id="rId23"/>
+    <p:sldId id="278" r:id="rId24"/>
+    <p:sldId id="279" r:id="rId25"/>
   </p:sldIdLst>
   <p:notesMasterIdLst>
-    <p:notesMasterId r:id="rId23"/>
+    <p:notesMasterId r:id="rId26"/>
   </p:notesMasterIdLst>
   <p:sldSz cx="12192000" cy="6858000"/>
   <p:notesSz cx="6858000" cy="12192000"/>
@@ -3499,7 +3502,7 @@
                 <a:ea typeface="Arial" pitchFamily="34" charset="-122"/>
                 <a:cs typeface="Arial" pitchFamily="34" charset="-120"/>
               </a:rPr>
-              <a:t>Look something up by name</a:t>
+              <a:t>Map one thing to another</a:t>
             </a:r>
             <a:endParaRPr lang="en-US" sz="1500" dirty="0"/>
           </a:p>
@@ -3538,7 +3541,7 @@
                 <a:ea typeface="Calibri" pitchFamily="34" charset="-122"/>
                 <a:cs typeface="Calibri" pitchFamily="34" charset="-120"/>
               </a:rPr>
-              <a:t>Reach a value through a label, not a position.</a:t>
+              <a:t>Remember what each item stands for.</a:t>
             </a:r>
             <a:endParaRPr lang="en-US" sz="1250" dirty="0"/>
           </a:p>
@@ -3577,7 +3580,7 @@
                 <a:ea typeface="Courier New" pitchFamily="34" charset="-122"/>
                 <a:cs typeface="Courier New" pitchFamily="34" charset="-120"/>
               </a:rPr>
-              <a:t>df["Numbers"]</a:t>
+              <a:t>s_to_t[ch] = other</a:t>
             </a:r>
             <a:endParaRPr lang="en-US" sz="1250" dirty="0"/>
           </a:p>
@@ -3746,7 +3749,7 @@
                 <a:ea typeface="Calibri" pitchFamily="34" charset="-122"/>
                 <a:cs typeface="Calibri" pitchFamily="34" charset="-120"/>
               </a:rPr>
-              <a:t>Duplicates, repeated characters, visited states.</a:t>
+              <a:t>Duplicates, repeated sums, visited states.</a:t>
             </a:r>
             <a:endParaRPr lang="en-US" sz="1250" dirty="0"/>
           </a:p>
@@ -3785,7 +3788,7 @@
                 <a:ea typeface="Courier New" pitchFamily="34" charset="-122"/>
                 <a:cs typeface="Courier New" pitchFamily="34" charset="-120"/>
               </a:rPr>
-              <a:t>if x in seen:</a:t>
+              <a:t>if total in sums:</a:t>
             </a:r>
             <a:endParaRPr lang="en-US" sz="1250" dirty="0"/>
           </a:p>
@@ -3824,7 +3827,7 @@
                 <a:ea typeface="Calibri" pitchFamily="34" charset="-122"/>
                 <a:cs typeface="Calibri" pitchFamily="34" charset="-120"/>
               </a:rPr>
-              <a:t>The first three are today's worked examples: Two Sum, Most Frequent Element, and Find Largest Value in DataFrame.</a:t>
+              <a:t>Today's four worked examples use all four: Most Frequent Element counts, Isomorphic Strings maps, 3 Sum finds partners, and Equal Pair Sums remembers sums.</a:t>
             </a:r>
             <a:endParaRPr lang="en-US" sz="1200" dirty="0"/>
           </a:p>
@@ -4954,7 +4957,7 @@
                 <a:ea typeface="Arial" pitchFamily="34" charset="-122"/>
                 <a:cs typeface="Arial" pitchFamily="34" charset="-120"/>
               </a:rPr>
-              <a:t>Worked example: Two Sum – Edugator 4.3</a:t>
+              <a:t>Worked example: Most Frequent Element – Edugator 4.6</a:t>
             </a:r>
             <a:endParaRPr lang="en-US" sz="3000" dirty="0"/>
           </a:p>
@@ -5059,7 +5062,7 @@
                 <a:ea typeface="Calibri" pitchFamily="34" charset="-122"/>
                 <a:cs typeface="Calibri" pitchFamily="34" charset="-120"/>
               </a:rPr>
-              <a:t>Given an array of integers nums and an integer target, return the indices of the two numbers that add up to target.</a:t>
+              <a:t>Given an array arr, return the element that appears most often. If several tie for the most, return any one of them.</a:t>
             </a:r>
             <a:endParaRPr lang="en-US" sz="1350" dirty="0"/>
           </a:p>
@@ -5098,7 +5101,7 @@
                 <a:ea typeface="Courier New" pitchFamily="34" charset="-122"/>
                 <a:cs typeface="Courier New" pitchFamily="34" charset="-120"/>
               </a:rPr>
-              <a:t>[2, 7, 11, 15], target 9  returns  [0, 1]</a:t>
+              <a:t>['a', 'b', 'a', 'c', 'b', 'a']  returns  'a'</a:t>
             </a:r>
             <a:endParaRPr lang="en-US" sz="1250" dirty="0"/>
           </a:p>
@@ -5137,7 +5140,7 @@
                 <a:ea typeface="Courier New" pitchFamily="34" charset="-122"/>
                 <a:cs typeface="Courier New" pitchFamily="34" charset="-120"/>
               </a:rPr>
-              <a:t>[3, 3], target 6  returns  [0, 1]</a:t>
+              <a:t>[1, 3, 2, 1, 4, 1, 3, 3]  returns  1 or 3</a:t>
             </a:r>
             <a:endParaRPr lang="en-US" sz="1250" dirty="0"/>
           </a:p>
@@ -5217,7 +5220,7 @@
                 <a:ea typeface="Calibri" pitchFamily="34" charset="-122"/>
                 <a:cs typeface="Calibri" pitchFamily="34" charset="-120"/>
               </a:rPr>
-              <a:t>nums[0] + nums[1] = 2 + 7 = 9. There is always exactly one answer, and one index cannot be used twice.</a:t>
+              <a:t>'a' appears 3 times. In the second list 1 and 3 both appear 3 times, so either one is accepted.</a:t>
             </a:r>
             <a:endParaRPr lang="en-US" sz="1250" dirty="0"/>
           </a:p>
@@ -5256,7 +5259,7 @@
                 <a:ea typeface="Calibri" pitchFamily="34" charset="-122"/>
                 <a:cs typeface="Calibri" pitchFamily="34" charset="-120"/>
               </a:rPr>
-              <a:t>Values and target fall between -10⁹ and 10⁹, so the numbers can be negative.</a:t>
+              <a:t>The list holds between 1 and 1,000 elements, so it is never empty.</a:t>
             </a:r>
             <a:endParaRPr lang="en-US" sz="1200" dirty="0"/>
           </a:p>
@@ -5364,7 +5367,7 @@
                 <a:ea typeface="Arial" pitchFamily="34" charset="-122"/>
                 <a:cs typeface="Arial" pitchFamily="34" charset="-120"/>
               </a:rPr>
-              <a:t>Worked example: Two Sum – Edugator 4.3</a:t>
+              <a:t>Worked example: Most Frequent Element – Edugator 4.6</a:t>
             </a:r>
             <a:endParaRPr lang="en-US" sz="3000" dirty="0"/>
           </a:p>
@@ -5469,7 +5472,7 @@
                 <a:ea typeface="Calibri" pitchFamily="34" charset="-122"/>
                 <a:cs typeface="Calibri" pitchFamily="34" charset="-120"/>
               </a:rPr>
-              <a:t>Given an array of integers nums and an integer target, return the indices of the two numbers that add up to target.</a:t>
+              <a:t>Given an array arr, return the element that appears most often. If several tie for the most, return any one of them.</a:t>
             </a:r>
             <a:endParaRPr lang="en-US" sz="1350" dirty="0"/>
           </a:p>
@@ -5508,7 +5511,7 @@
                 <a:ea typeface="Courier New" pitchFamily="34" charset="-122"/>
                 <a:cs typeface="Courier New" pitchFamily="34" charset="-120"/>
               </a:rPr>
-              <a:t>[2, 7, 11, 15], target 9  returns  [0, 1]</a:t>
+              <a:t>['a', 'b', 'a', 'c', 'b', 'a']  returns  'a'</a:t>
             </a:r>
             <a:endParaRPr lang="en-US" sz="1250" dirty="0"/>
           </a:p>
@@ -5547,7 +5550,7 @@
                 <a:ea typeface="Courier New" pitchFamily="34" charset="-122"/>
                 <a:cs typeface="Courier New" pitchFamily="34" charset="-120"/>
               </a:rPr>
-              <a:t>[3, 3], target 6  returns  [0, 1]</a:t>
+              <a:t>[1, 3, 2, 1, 4, 1, 3, 3]  returns  1 or 3</a:t>
             </a:r>
             <a:endParaRPr lang="en-US" sz="1250" dirty="0"/>
           </a:p>
@@ -5627,7 +5630,7 @@
                 <a:ea typeface="Calibri" pitchFamily="34" charset="-122"/>
                 <a:cs typeface="Calibri" pitchFamily="34" charset="-120"/>
               </a:rPr>
-              <a:t>nums[0] + nums[1] = 2 + 7 = 9. There is always exactly one answer, and one index cannot be used twice.</a:t>
+              <a:t>'a' appears 3 times. In the second list 1 and 3 both appear 3 times, so either one is accepted.</a:t>
             </a:r>
             <a:endParaRPr lang="en-US" sz="1250" dirty="0"/>
           </a:p>
@@ -5666,7 +5669,7 @@
                 <a:ea typeface="Calibri" pitchFamily="34" charset="-122"/>
                 <a:cs typeface="Calibri" pitchFamily="34" charset="-120"/>
               </a:rPr>
-              <a:t>Values and target fall between -10⁹ and 10⁹, so the numbers can be negative.</a:t>
+              <a:t>The list holds between 1 and 1,000 elements, so it is never empty.</a:t>
             </a:r>
             <a:endParaRPr lang="en-US" sz="1200" dirty="0"/>
           </a:p>
@@ -5996,7 +5999,7 @@
                 <a:ea typeface="Arial" pitchFamily="34" charset="-122"/>
                 <a:cs typeface="Arial" pitchFamily="34" charset="-120"/>
               </a:rPr>
-              <a:t>Worked example: Two Sum – Edugator 4.3</a:t>
+              <a:t>Worked example: Most Frequent Element – Edugator 4.6</a:t>
             </a:r>
             <a:endParaRPr lang="en-US" sz="3000" dirty="0"/>
           </a:p>
@@ -6101,7 +6104,7 @@
                 <a:ea typeface="Calibri" pitchFamily="34" charset="-122"/>
                 <a:cs typeface="Calibri" pitchFamily="34" charset="-120"/>
               </a:rPr>
-              <a:t>Given an array of integers nums and an integer target, return the indices of the two numbers that add up to target.</a:t>
+              <a:t>Given an array arr, return the element that appears most often. If several tie for the most, return any one of them.</a:t>
             </a:r>
             <a:endParaRPr lang="en-US" sz="1350" dirty="0"/>
           </a:p>
@@ -6140,7 +6143,7 @@
                 <a:ea typeface="Courier New" pitchFamily="34" charset="-122"/>
                 <a:cs typeface="Courier New" pitchFamily="34" charset="-120"/>
               </a:rPr>
-              <a:t>[2, 7, 11, 15], target 9  returns  [0, 1]</a:t>
+              <a:t>['a', 'b', 'a', 'c', 'b', 'a']  returns  'a'</a:t>
             </a:r>
             <a:endParaRPr lang="en-US" sz="1250" dirty="0"/>
           </a:p>
@@ -6179,7 +6182,7 @@
                 <a:ea typeface="Courier New" pitchFamily="34" charset="-122"/>
                 <a:cs typeface="Courier New" pitchFamily="34" charset="-120"/>
               </a:rPr>
-              <a:t>[3, 3], target 6  returns  [0, 1]</a:t>
+              <a:t>[1, 3, 2, 1, 4, 1, 3, 3]  returns  1 or 3</a:t>
             </a:r>
             <a:endParaRPr lang="en-US" sz="1250" dirty="0"/>
           </a:p>
@@ -6259,7 +6262,7 @@
                 <a:ea typeface="Calibri" pitchFamily="34" charset="-122"/>
                 <a:cs typeface="Calibri" pitchFamily="34" charset="-120"/>
               </a:rPr>
-              <a:t>nums[0] + nums[1] = 2 + 7 = 9. There is always exactly one answer, and one index cannot be used twice.</a:t>
+              <a:t>'a' appears 3 times. In the second list 1 and 3 both appear 3 times, so either one is accepted.</a:t>
             </a:r>
             <a:endParaRPr lang="en-US" sz="1250" dirty="0"/>
           </a:p>
@@ -6298,7 +6301,7 @@
                 <a:ea typeface="Calibri" pitchFamily="34" charset="-122"/>
                 <a:cs typeface="Calibri" pitchFamily="34" charset="-120"/>
               </a:rPr>
-              <a:t>Values and target fall between -10⁹ and 10⁹, so the numbers can be negative.</a:t>
+              <a:t>The list holds between 1 and 1,000 elements, so it is never empty.</a:t>
             </a:r>
             <a:endParaRPr lang="en-US" sz="1200" dirty="0"/>
           </a:p>
@@ -6313,11 +6316,11 @@
         <p:spPr>
           <a:xfrm>
             <a:off x="6217920" y="1572768"/>
-            <a:ext cx="5239512" cy="2351532"/>
+            <a:ext cx="5239512" cy="2529840"/>
           </a:xfrm>
           <a:prstGeom prst="roundRect">
             <a:avLst>
-              <a:gd name="adj" fmla="val 2333"/>
+              <a:gd name="adj" fmla="val 2169"/>
             </a:avLst>
           </a:prstGeom>
           <a:solidFill>
@@ -6379,7 +6382,7 @@
         <p:spPr>
           <a:xfrm>
             <a:off x="6419088" y="1920240"/>
-            <a:ext cx="4837176" cy="1876044"/>
+            <a:ext cx="4837176" cy="2054352"/>
           </a:xfrm>
           <a:prstGeom prst="rect">
             <a:avLst/>
@@ -6398,7 +6401,7 @@
               <a:buNone/>
             </a:pPr>
             <a:r>
-              <a:rPr lang="en-US" sz="1300" dirty="0">
+              <a:rPr lang="en-US" sz="1250" dirty="0">
                 <a:solidFill>
                   <a:srgbClr val="E8EAF6"/>
                 </a:solidFill>
@@ -6406,9 +6409,9 @@
                 <a:ea typeface="Courier New" pitchFamily="34" charset="-122"/>
                 <a:cs typeface="Courier New" pitchFamily="34" charset="-120"/>
               </a:rPr>
-              <a:t>def two_sum(nums, target):</a:t>
-            </a:r>
-            <a:endParaRPr lang="en-US" sz="1300" dirty="0"/>
+              <a:t>def most_frequent_element(arr):</a:t>
+            </a:r>
+            <a:endParaRPr lang="en-US" sz="1250" dirty="0"/>
           </a:p>
           <a:p>
             <a:pPr indent="0" marL="0">
@@ -6418,7 +6421,7 @@
               <a:buNone/>
             </a:pPr>
             <a:r>
-              <a:rPr lang="en-US" sz="1300" dirty="0">
+              <a:rPr lang="en-US" sz="1250" dirty="0">
                 <a:solidFill>
                   <a:srgbClr val="E8EAF6"/>
                 </a:solidFill>
@@ -6426,9 +6429,9 @@
                 <a:ea typeface="Courier New" pitchFamily="34" charset="-122"/>
                 <a:cs typeface="Courier New" pitchFamily="34" charset="-120"/>
               </a:rPr>
-              <a:t>    seen = {}    # num -&gt; index</a:t>
-            </a:r>
-            <a:endParaRPr lang="en-US" sz="1300" dirty="0"/>
+              <a:t>    frequencies = {}</a:t>
+            </a:r>
+            <a:endParaRPr lang="en-US" sz="1250" dirty="0"/>
           </a:p>
           <a:p>
             <a:pPr indent="0" marL="0">
@@ -6438,7 +6441,7 @@
               <a:buNone/>
             </a:pPr>
             <a:r>
-              <a:rPr lang="en-US" sz="1300" dirty="0">
+              <a:rPr lang="en-US" sz="1250" dirty="0">
                 <a:solidFill>
                   <a:srgbClr val="E8EAF6"/>
                 </a:solidFill>
@@ -6446,9 +6449,9 @@
                 <a:ea typeface="Courier New" pitchFamily="34" charset="-122"/>
                 <a:cs typeface="Courier New" pitchFamily="34" charset="-120"/>
               </a:rPr>
-              <a:t>    for index, num in enumerate(nums):</a:t>
-            </a:r>
-            <a:endParaRPr lang="en-US" sz="1300" dirty="0"/>
+              <a:t>    for element in arr:</a:t>
+            </a:r>
+            <a:endParaRPr lang="en-US" sz="1250" dirty="0"/>
           </a:p>
           <a:p>
             <a:pPr indent="0" marL="0">
@@ -6458,7 +6461,7 @@
               <a:buNone/>
             </a:pPr>
             <a:r>
-              <a:rPr lang="en-US" sz="1300" dirty="0">
+              <a:rPr lang="en-US" sz="1250" dirty="0">
                 <a:solidFill>
                   <a:srgbClr val="E8EAF6"/>
                 </a:solidFill>
@@ -6466,9 +6469,9 @@
                 <a:ea typeface="Courier New" pitchFamily="34" charset="-122"/>
                 <a:cs typeface="Courier New" pitchFamily="34" charset="-120"/>
               </a:rPr>
-              <a:t>        complement = target - num</a:t>
-            </a:r>
-            <a:endParaRPr lang="en-US" sz="1300" dirty="0"/>
+              <a:t>        if element in frequencies:</a:t>
+            </a:r>
+            <a:endParaRPr lang="en-US" sz="1250" dirty="0"/>
           </a:p>
           <a:p>
             <a:pPr indent="0" marL="0">
@@ -6478,7 +6481,7 @@
               <a:buNone/>
             </a:pPr>
             <a:r>
-              <a:rPr lang="en-US" sz="1300" dirty="0">
+              <a:rPr lang="en-US" sz="1250" dirty="0">
                 <a:solidFill>
                   <a:srgbClr val="E8EAF6"/>
                 </a:solidFill>
@@ -6486,9 +6489,9 @@
                 <a:ea typeface="Courier New" pitchFamily="34" charset="-122"/>
                 <a:cs typeface="Courier New" pitchFamily="34" charset="-120"/>
               </a:rPr>
-              <a:t>        if complement in seen:</a:t>
-            </a:r>
-            <a:endParaRPr lang="en-US" sz="1300" dirty="0"/>
+              <a:t>            frequencies[element] += 1</a:t>
+            </a:r>
+            <a:endParaRPr lang="en-US" sz="1250" dirty="0"/>
           </a:p>
           <a:p>
             <a:pPr indent="0" marL="0">
@@ -6498,7 +6501,7 @@
               <a:buNone/>
             </a:pPr>
             <a:r>
-              <a:rPr lang="en-US" sz="1300" dirty="0">
+              <a:rPr lang="en-US" sz="1250" dirty="0">
                 <a:solidFill>
                   <a:srgbClr val="E8EAF6"/>
                 </a:solidFill>
@@ -6506,9 +6509,9 @@
                 <a:ea typeface="Courier New" pitchFamily="34" charset="-122"/>
                 <a:cs typeface="Courier New" pitchFamily="34" charset="-120"/>
               </a:rPr>
-              <a:t>            return [seen[complement], index]</a:t>
-            </a:r>
-            <a:endParaRPr lang="en-US" sz="1300" dirty="0"/>
+              <a:t>        else:</a:t>
+            </a:r>
+            <a:endParaRPr lang="en-US" sz="1250" dirty="0"/>
           </a:p>
           <a:p>
             <a:pPr indent="0" marL="0">
@@ -6518,7 +6521,7 @@
               <a:buNone/>
             </a:pPr>
             <a:r>
-              <a:rPr lang="en-US" sz="1300" dirty="0">
+              <a:rPr lang="en-US" sz="1250" dirty="0">
                 <a:solidFill>
                   <a:srgbClr val="E8EAF6"/>
                 </a:solidFill>
@@ -6526,9 +6529,29 @@
                 <a:ea typeface="Courier New" pitchFamily="34" charset="-122"/>
                 <a:cs typeface="Courier New" pitchFamily="34" charset="-120"/>
               </a:rPr>
-              <a:t>        seen[num] = index</a:t>
-            </a:r>
-            <a:endParaRPr lang="en-US" sz="1300" dirty="0"/>
+              <a:t>            frequencies[element] = 1</a:t>
+            </a:r>
+            <a:endParaRPr lang="en-US" sz="1250" dirty="0"/>
+          </a:p>
+          <a:p>
+            <a:pPr indent="0" marL="0">
+              <a:lnSpc>
+                <a:spcPct val="130000"/>
+              </a:lnSpc>
+              <a:buNone/>
+            </a:pPr>
+            <a:r>
+              <a:rPr lang="en-US" sz="1250" dirty="0">
+                <a:solidFill>
+                  <a:srgbClr val="E8EAF6"/>
+                </a:solidFill>
+                <a:latin typeface="Courier New" pitchFamily="34" charset="0"/>
+                <a:ea typeface="Courier New" pitchFamily="34" charset="-122"/>
+                <a:cs typeface="Courier New" pitchFamily="34" charset="-120"/>
+              </a:rPr>
+              <a:t>    return max(frequencies, key=frequencies.get)</a:t>
+            </a:r>
+            <a:endParaRPr lang="en-US" sz="1250" dirty="0"/>
           </a:p>
         </p:txBody>
       </p:sp>
@@ -6540,7 +6563,7 @@
         </p:nvSpPr>
         <p:spPr>
           <a:xfrm>
-            <a:off x="6217920" y="4043172"/>
+            <a:off x="6217920" y="4221480"/>
             <a:ext cx="5239512" cy="685800"/>
           </a:xfrm>
           <a:prstGeom prst="roundRect">
@@ -6567,7 +6590,7 @@
         </p:nvSpPr>
         <p:spPr>
           <a:xfrm>
-            <a:off x="6492240" y="4043172"/>
+            <a:off x="6492240" y="4221480"/>
             <a:ext cx="4690872" cy="685800"/>
           </a:xfrm>
           <a:prstGeom prst="rect">
@@ -6612,7 +6635,7 @@
                 <a:ea typeface="Calibri" pitchFamily="34" charset="-122"/>
                 <a:cs typeface="Calibri" pitchFamily="34" charset="-120"/>
               </a:rPr>
-              <a:t>   one pass, each dict check is O(1)</a:t>
+              <a:t>   one pass to count, one pass over the counts</a:t>
             </a:r>
             <a:endParaRPr lang="en-US" sz="1150" dirty="0"/>
           </a:p>
@@ -6632,7 +6655,7 @@
                 <a:ea typeface="Courier New" pitchFamily="34" charset="-122"/>
                 <a:cs typeface="Courier New" pitchFamily="34" charset="-120"/>
               </a:rPr>
-              <a:t>Space O(n)</a:t>
+              <a:t>Space O(k)</a:t>
             </a:r>
             <a:pPr indent="0" marL="0">
               <a:lnSpc>
@@ -6649,7 +6672,7 @@
                 <a:ea typeface="Calibri" pitchFamily="34" charset="-122"/>
                 <a:cs typeface="Calibri" pitchFamily="34" charset="-120"/>
               </a:rPr>
-              <a:t>   the dict can hold every number</a:t>
+              <a:t>   one entry per distinct element</a:t>
             </a:r>
             <a:endParaRPr lang="en-US" sz="1150" dirty="0"/>
           </a:p>
@@ -6663,7 +6686,7 @@
         </p:nvSpPr>
         <p:spPr>
           <a:xfrm>
-            <a:off x="6217920" y="4847844"/>
+            <a:off x="6217920" y="5026152"/>
             <a:ext cx="5239512" cy="457200"/>
           </a:xfrm>
           <a:prstGeom prst="roundRect">
@@ -6690,7 +6713,7 @@
         </p:nvSpPr>
         <p:spPr>
           <a:xfrm>
-            <a:off x="6492240" y="4847844"/>
+            <a:off x="6492240" y="5026152"/>
             <a:ext cx="4690872" cy="457200"/>
           </a:xfrm>
           <a:prstGeom prst="rect">
@@ -6707,29 +6730,29 @@
               <a:buNone/>
             </a:pPr>
             <a:r>
-              <a:rPr lang="en-US" sz="1250" b="1" dirty="0">
+              <a:rPr lang="en-US" sz="1200" b="1" dirty="0">
                 <a:solidFill>
                   <a:srgbClr val="1F2333"/>
+                </a:solidFill>
+                <a:latin typeface="Courier New" pitchFamily="34" charset="0"/>
+                <a:ea typeface="Courier New" pitchFamily="34" charset="-122"/>
+                <a:cs typeface="Courier New" pitchFamily="34" charset="-120"/>
+              </a:rPr>
+              <a:t>Counter(arr).most_common(1)</a:t>
+            </a:r>
+            <a:pPr indent="0" marL="0">
+              <a:buNone/>
+            </a:pPr>
+            <a:r>
+              <a:rPr lang="en-US" sz="1150" dirty="0">
+                <a:solidFill>
+                  <a:srgbClr val="5A6072"/>
                 </a:solidFill>
                 <a:latin typeface="Calibri" pitchFamily="34" charset="0"/>
                 <a:ea typeface="Calibri" pitchFamily="34" charset="-122"/>
                 <a:cs typeface="Calibri" pitchFamily="34" charset="-120"/>
               </a:rPr>
-              <a:t>Brute force</a:t>
-            </a:r>
-            <a:pPr indent="0" marL="0">
-              <a:buNone/>
-            </a:pPr>
-            <a:r>
-              <a:rPr lang="en-US" sz="1150" dirty="0">
-                <a:solidFill>
-                  <a:srgbClr val="5A6072"/>
-                </a:solidFill>
-                <a:latin typeface="Calibri" pitchFamily="34" charset="0"/>
-                <a:ea typeface="Calibri" pitchFamily="34" charset="-122"/>
-                <a:cs typeface="Calibri" pitchFamily="34" charset="-120"/>
-              </a:rPr>
-              <a:t> checks every pair. It passes, but it is O(n²).</a:t>
+              <a:t> also works. Counter is a dict underneath.</a:t>
             </a:r>
             <a:endParaRPr lang="en-US" sz="1150" dirty="0"/>
           </a:p>
@@ -6743,7 +6766,7 @@
         </p:nvSpPr>
         <p:spPr>
           <a:xfrm>
-            <a:off x="731520" y="5504688"/>
+            <a:off x="731520" y="5602224"/>
             <a:ext cx="10725912" cy="502920"/>
           </a:xfrm>
           <a:prstGeom prst="roundRect">
@@ -6770,7 +6793,7 @@
         </p:nvSpPr>
         <p:spPr>
           <a:xfrm>
-            <a:off x="1005840" y="5504688"/>
+            <a:off x="1005840" y="5602224"/>
             <a:ext cx="10177272" cy="502920"/>
           </a:xfrm>
           <a:prstGeom prst="rect">
@@ -6809,7 +6832,7 @@
                 <a:ea typeface="Calibri" pitchFamily="34" charset="-122"/>
                 <a:cs typeface="Calibri" pitchFamily="34" charset="-120"/>
               </a:rPr>
-              <a:t>storing num before the check. Then [3, 3] with target 6 pairs index 0 with itself. Check first, then store.</a:t>
+              <a:t>calling arr.count(x) inside a loop. It looks like one line, but it rescans the whole list every time, which is O(n²).</a:t>
             </a:r>
             <a:endParaRPr lang="en-US" sz="1200" dirty="0"/>
           </a:p>
@@ -7345,7 +7368,7 @@
                 <a:ea typeface="Arial" pitchFamily="34" charset="-122"/>
                 <a:cs typeface="Arial" pitchFamily="34" charset="-120"/>
               </a:rPr>
-              <a:t>Worked example: Most Frequent Element – Edugator 4.6</a:t>
+              <a:t>Worked example: Isomorphic Strings – Edugator 4.2</a:t>
             </a:r>
             <a:endParaRPr lang="en-US" sz="3000" dirty="0"/>
           </a:p>
@@ -7450,7 +7473,7 @@
                 <a:ea typeface="Calibri" pitchFamily="34" charset="-122"/>
                 <a:cs typeface="Calibri" pitchFamily="34" charset="-120"/>
               </a:rPr>
-              <a:t>Given an array arr, return the element that appears most often. If several tie for the most, return any one of them.</a:t>
+              <a:t>Return True if s and t are isomorphic: each character in s swaps for one character in t, the same way every time, and no two characters share a swap.</a:t>
             </a:r>
             <a:endParaRPr lang="en-US" sz="1350" dirty="0"/>
           </a:p>
@@ -7489,7 +7512,7 @@
                 <a:ea typeface="Courier New" pitchFamily="34" charset="-122"/>
                 <a:cs typeface="Courier New" pitchFamily="34" charset="-120"/>
               </a:rPr>
-              <a:t>['a', 'b', 'a', 'c', 'b', 'a']  returns  'a'</a:t>
+              <a:t>s = "egg", t = "add"  returns  True</a:t>
             </a:r>
             <a:endParaRPr lang="en-US" sz="1250" dirty="0"/>
           </a:p>
@@ -7528,7 +7551,7 @@
                 <a:ea typeface="Courier New" pitchFamily="34" charset="-122"/>
                 <a:cs typeface="Courier New" pitchFamily="34" charset="-120"/>
               </a:rPr>
-              <a:t>[1, 3, 2, 1, 4, 1, 3, 3]  returns  1 or 3</a:t>
+              <a:t>s = "foo", t = "bar"  returns  False</a:t>
             </a:r>
             <a:endParaRPr lang="en-US" sz="1250" dirty="0"/>
           </a:p>
@@ -7608,7 +7631,7 @@
                 <a:ea typeface="Calibri" pitchFamily="34" charset="-122"/>
                 <a:cs typeface="Calibri" pitchFamily="34" charset="-120"/>
               </a:rPr>
-              <a:t>'a' appears 3 times. In the second list 1 and 3 both appear 3 times, so either one is accepted.</a:t>
+              <a:t>e maps to a and g maps to d, every time. In foo, o would have to map to both a and r.</a:t>
             </a:r>
             <a:endParaRPr lang="en-US" sz="1250" dirty="0"/>
           </a:p>
@@ -7647,7 +7670,7 @@
                 <a:ea typeface="Calibri" pitchFamily="34" charset="-122"/>
                 <a:cs typeface="Calibri" pitchFamily="34" charset="-120"/>
               </a:rPr>
-              <a:t>The list holds between 1 and 1,000 elements, so it is never empty.</a:t>
+              <a:t>Both strings have the same length, up to 5,000 characters, and can hold any ASCII character.</a:t>
             </a:r>
             <a:endParaRPr lang="en-US" sz="1200" dirty="0"/>
           </a:p>
@@ -7755,7 +7778,7 @@
                 <a:ea typeface="Arial" pitchFamily="34" charset="-122"/>
                 <a:cs typeface="Arial" pitchFamily="34" charset="-120"/>
               </a:rPr>
-              <a:t>Worked example: Most Frequent Element – Edugator 4.6</a:t>
+              <a:t>Worked example: Isomorphic Strings – Edugator 4.2</a:t>
             </a:r>
             <a:endParaRPr lang="en-US" sz="3000" dirty="0"/>
           </a:p>
@@ -7860,7 +7883,7 @@
                 <a:ea typeface="Calibri" pitchFamily="34" charset="-122"/>
                 <a:cs typeface="Calibri" pitchFamily="34" charset="-120"/>
               </a:rPr>
-              <a:t>Given an array arr, return the element that appears most often. If several tie for the most, return any one of them.</a:t>
+              <a:t>Return True if s and t are isomorphic: each character in s swaps for one character in t, the same way every time, and no two characters share a swap.</a:t>
             </a:r>
             <a:endParaRPr lang="en-US" sz="1350" dirty="0"/>
           </a:p>
@@ -7899,7 +7922,7 @@
                 <a:ea typeface="Courier New" pitchFamily="34" charset="-122"/>
                 <a:cs typeface="Courier New" pitchFamily="34" charset="-120"/>
               </a:rPr>
-              <a:t>['a', 'b', 'a', 'c', 'b', 'a']  returns  'a'</a:t>
+              <a:t>s = "egg", t = "add"  returns  True</a:t>
             </a:r>
             <a:endParaRPr lang="en-US" sz="1250" dirty="0"/>
           </a:p>
@@ -7938,7 +7961,7 @@
                 <a:ea typeface="Courier New" pitchFamily="34" charset="-122"/>
                 <a:cs typeface="Courier New" pitchFamily="34" charset="-120"/>
               </a:rPr>
-              <a:t>[1, 3, 2, 1, 4, 1, 3, 3]  returns  1 or 3</a:t>
+              <a:t>s = "foo", t = "bar"  returns  False</a:t>
             </a:r>
             <a:endParaRPr lang="en-US" sz="1250" dirty="0"/>
           </a:p>
@@ -8018,7 +8041,7 @@
                 <a:ea typeface="Calibri" pitchFamily="34" charset="-122"/>
                 <a:cs typeface="Calibri" pitchFamily="34" charset="-120"/>
               </a:rPr>
-              <a:t>'a' appears 3 times. In the second list 1 and 3 both appear 3 times, so either one is accepted.</a:t>
+              <a:t>e maps to a and g maps to d, every time. In foo, o would have to map to both a and r.</a:t>
             </a:r>
             <a:endParaRPr lang="en-US" sz="1250" dirty="0"/>
           </a:p>
@@ -8057,7 +8080,7 @@
                 <a:ea typeface="Calibri" pitchFamily="34" charset="-122"/>
                 <a:cs typeface="Calibri" pitchFamily="34" charset="-120"/>
               </a:rPr>
-              <a:t>The list holds between 1 and 1,000 elements, so it is never empty.</a:t>
+              <a:t>Both strings have the same length, up to 5,000 characters, and can hold any ASCII character.</a:t>
             </a:r>
             <a:endParaRPr lang="en-US" sz="1200" dirty="0"/>
           </a:p>
@@ -8387,7 +8410,7 @@
                 <a:ea typeface="Arial" pitchFamily="34" charset="-122"/>
                 <a:cs typeface="Arial" pitchFamily="34" charset="-120"/>
               </a:rPr>
-              <a:t>Worked example: Most Frequent Element – Edugator 4.6</a:t>
+              <a:t>Worked example: Isomorphic Strings – Edugator 4.2</a:t>
             </a:r>
             <a:endParaRPr lang="en-US" sz="3000" dirty="0"/>
           </a:p>
@@ -8492,7 +8515,7 @@
                 <a:ea typeface="Calibri" pitchFamily="34" charset="-122"/>
                 <a:cs typeface="Calibri" pitchFamily="34" charset="-120"/>
               </a:rPr>
-              <a:t>Given an array arr, return the element that appears most often. If several tie for the most, return any one of them.</a:t>
+              <a:t>Return True if s and t are isomorphic: each character in s swaps for one character in t, the same way every time, and no two characters share a swap.</a:t>
             </a:r>
             <a:endParaRPr lang="en-US" sz="1350" dirty="0"/>
           </a:p>
@@ -8531,7 +8554,7 @@
                 <a:ea typeface="Courier New" pitchFamily="34" charset="-122"/>
                 <a:cs typeface="Courier New" pitchFamily="34" charset="-120"/>
               </a:rPr>
-              <a:t>['a', 'b', 'a', 'c', 'b', 'a']  returns  'a'</a:t>
+              <a:t>s = "egg", t = "add"  returns  True</a:t>
             </a:r>
             <a:endParaRPr lang="en-US" sz="1250" dirty="0"/>
           </a:p>
@@ -8570,7 +8593,7 @@
                 <a:ea typeface="Courier New" pitchFamily="34" charset="-122"/>
                 <a:cs typeface="Courier New" pitchFamily="34" charset="-120"/>
               </a:rPr>
-              <a:t>[1, 3, 2, 1, 4, 1, 3, 3]  returns  1 or 3</a:t>
+              <a:t>s = "foo", t = "bar"  returns  False</a:t>
             </a:r>
             <a:endParaRPr lang="en-US" sz="1250" dirty="0"/>
           </a:p>
@@ -8650,7 +8673,7 @@
                 <a:ea typeface="Calibri" pitchFamily="34" charset="-122"/>
                 <a:cs typeface="Calibri" pitchFamily="34" charset="-120"/>
               </a:rPr>
-              <a:t>'a' appears 3 times. In the second list 1 and 3 both appear 3 times, so either one is accepted.</a:t>
+              <a:t>e maps to a and g maps to d, every time. In foo, o would have to map to both a and r.</a:t>
             </a:r>
             <a:endParaRPr lang="en-US" sz="1250" dirty="0"/>
           </a:p>
@@ -8689,7 +8712,7 @@
                 <a:ea typeface="Calibri" pitchFamily="34" charset="-122"/>
                 <a:cs typeface="Calibri" pitchFamily="34" charset="-120"/>
               </a:rPr>
-              <a:t>The list holds between 1 and 1,000 elements, so it is never empty.</a:t>
+              <a:t>Both strings have the same length, up to 5,000 characters, and can hold any ASCII character.</a:t>
             </a:r>
             <a:endParaRPr lang="en-US" sz="1200" dirty="0"/>
           </a:p>
@@ -8704,11 +8727,11 @@
         <p:spPr>
           <a:xfrm>
             <a:off x="6217920" y="1572768"/>
-            <a:ext cx="5239512" cy="2529840"/>
+            <a:ext cx="5239512" cy="3124200"/>
           </a:xfrm>
           <a:prstGeom prst="roundRect">
             <a:avLst>
-              <a:gd name="adj" fmla="val 2169"/>
+              <a:gd name="adj" fmla="val 1756"/>
             </a:avLst>
           </a:prstGeom>
           <a:solidFill>
@@ -8770,7 +8793,7 @@
         <p:spPr>
           <a:xfrm>
             <a:off x="6419088" y="1920240"/>
-            <a:ext cx="4837176" cy="2054352"/>
+            <a:ext cx="4837176" cy="2648712"/>
           </a:xfrm>
           <a:prstGeom prst="rect">
             <a:avLst/>
@@ -8789,7 +8812,7 @@
               <a:buNone/>
             </a:pPr>
             <a:r>
-              <a:rPr lang="en-US" sz="1250" dirty="0">
+              <a:rPr lang="en-US" sz="1300" dirty="0">
                 <a:solidFill>
                   <a:srgbClr val="E8EAF6"/>
                 </a:solidFill>
@@ -8797,9 +8820,9 @@
                 <a:ea typeface="Courier New" pitchFamily="34" charset="-122"/>
                 <a:cs typeface="Courier New" pitchFamily="34" charset="-120"/>
               </a:rPr>
-              <a:t>def most_frequent_element(arr):</a:t>
-            </a:r>
-            <a:endParaRPr lang="en-US" sz="1250" dirty="0"/>
+              <a:t>def is_isomorphic(s, t):</a:t>
+            </a:r>
+            <a:endParaRPr lang="en-US" sz="1300" dirty="0"/>
           </a:p>
           <a:p>
             <a:pPr indent="0" marL="0">
@@ -8809,7 +8832,7 @@
               <a:buNone/>
             </a:pPr>
             <a:r>
-              <a:rPr lang="en-US" sz="1250" dirty="0">
+              <a:rPr lang="en-US" sz="1300" dirty="0">
                 <a:solidFill>
                   <a:srgbClr val="E8EAF6"/>
                 </a:solidFill>
@@ -8817,9 +8840,9 @@
                 <a:ea typeface="Courier New" pitchFamily="34" charset="-122"/>
                 <a:cs typeface="Courier New" pitchFamily="34" charset="-120"/>
               </a:rPr>
-              <a:t>    frequencies = {}</a:t>
-            </a:r>
-            <a:endParaRPr lang="en-US" sz="1250" dirty="0"/>
+              <a:t>    s_to_t, t_to_s = {}, {}</a:t>
+            </a:r>
+            <a:endParaRPr lang="en-US" sz="1300" dirty="0"/>
           </a:p>
           <a:p>
             <a:pPr indent="0" marL="0">
@@ -8829,7 +8852,7 @@
               <a:buNone/>
             </a:pPr>
             <a:r>
-              <a:rPr lang="en-US" sz="1250" dirty="0">
+              <a:rPr lang="en-US" sz="1300" dirty="0">
                 <a:solidFill>
                   <a:srgbClr val="E8EAF6"/>
                 </a:solidFill>
@@ -8837,9 +8860,9 @@
                 <a:ea typeface="Courier New" pitchFamily="34" charset="-122"/>
                 <a:cs typeface="Courier New" pitchFamily="34" charset="-120"/>
               </a:rPr>
-              <a:t>    for element in arr:</a:t>
-            </a:r>
-            <a:endParaRPr lang="en-US" sz="1250" dirty="0"/>
+              <a:t>    for a, b in zip(s, t):</a:t>
+            </a:r>
+            <a:endParaRPr lang="en-US" sz="1300" dirty="0"/>
           </a:p>
           <a:p>
             <a:pPr indent="0" marL="0">
@@ -8849,7 +8872,7 @@
               <a:buNone/>
             </a:pPr>
             <a:r>
-              <a:rPr lang="en-US" sz="1250" dirty="0">
+              <a:rPr lang="en-US" sz="1300" dirty="0">
                 <a:solidFill>
                   <a:srgbClr val="E8EAF6"/>
                 </a:solidFill>
@@ -8857,9 +8880,9 @@
                 <a:ea typeface="Courier New" pitchFamily="34" charset="-122"/>
                 <a:cs typeface="Courier New" pitchFamily="34" charset="-120"/>
               </a:rPr>
-              <a:t>        if element in frequencies:</a:t>
-            </a:r>
-            <a:endParaRPr lang="en-US" sz="1250" dirty="0"/>
+              <a:t>        if s_to_t.get(a, b) != b:</a:t>
+            </a:r>
+            <a:endParaRPr lang="en-US" sz="1300" dirty="0"/>
           </a:p>
           <a:p>
             <a:pPr indent="0" marL="0">
@@ -8869,7 +8892,7 @@
               <a:buNone/>
             </a:pPr>
             <a:r>
-              <a:rPr lang="en-US" sz="1250" dirty="0">
+              <a:rPr lang="en-US" sz="1300" dirty="0">
                 <a:solidFill>
                   <a:srgbClr val="E8EAF6"/>
                 </a:solidFill>
@@ -8877,9 +8900,9 @@
                 <a:ea typeface="Courier New" pitchFamily="34" charset="-122"/>
                 <a:cs typeface="Courier New" pitchFamily="34" charset="-120"/>
               </a:rPr>
-              <a:t>            frequencies[element] += 1</a:t>
-            </a:r>
-            <a:endParaRPr lang="en-US" sz="1250" dirty="0"/>
+              <a:t>            return False</a:t>
+            </a:r>
+            <a:endParaRPr lang="en-US" sz="1300" dirty="0"/>
           </a:p>
           <a:p>
             <a:pPr indent="0" marL="0">
@@ -8889,7 +8912,7 @@
               <a:buNone/>
             </a:pPr>
             <a:r>
-              <a:rPr lang="en-US" sz="1250" dirty="0">
+              <a:rPr lang="en-US" sz="1300" dirty="0">
                 <a:solidFill>
                   <a:srgbClr val="E8EAF6"/>
                 </a:solidFill>
@@ -8897,9 +8920,9 @@
                 <a:ea typeface="Courier New" pitchFamily="34" charset="-122"/>
                 <a:cs typeface="Courier New" pitchFamily="34" charset="-120"/>
               </a:rPr>
-              <a:t>        else:</a:t>
-            </a:r>
-            <a:endParaRPr lang="en-US" sz="1250" dirty="0"/>
+              <a:t>        if t_to_s.get(b, a) != a:</a:t>
+            </a:r>
+            <a:endParaRPr lang="en-US" sz="1300" dirty="0"/>
           </a:p>
           <a:p>
             <a:pPr indent="0" marL="0">
@@ -8909,7 +8932,7 @@
               <a:buNone/>
             </a:pPr>
             <a:r>
-              <a:rPr lang="en-US" sz="1250" dirty="0">
+              <a:rPr lang="en-US" sz="1300" dirty="0">
                 <a:solidFill>
                   <a:srgbClr val="E8EAF6"/>
                 </a:solidFill>
@@ -8917,9 +8940,9 @@
                 <a:ea typeface="Courier New" pitchFamily="34" charset="-122"/>
                 <a:cs typeface="Courier New" pitchFamily="34" charset="-120"/>
               </a:rPr>
-              <a:t>            frequencies[element] = 1</a:t>
-            </a:r>
-            <a:endParaRPr lang="en-US" sz="1250" dirty="0"/>
+              <a:t>            return False</a:t>
+            </a:r>
+            <a:endParaRPr lang="en-US" sz="1300" dirty="0"/>
           </a:p>
           <a:p>
             <a:pPr indent="0" marL="0">
@@ -8929,7 +8952,7 @@
               <a:buNone/>
             </a:pPr>
             <a:r>
-              <a:rPr lang="en-US" sz="1250" dirty="0">
+              <a:rPr lang="en-US" sz="1300" dirty="0">
                 <a:solidFill>
                   <a:srgbClr val="E8EAF6"/>
                 </a:solidFill>
@@ -8937,9 +8960,49 @@
                 <a:ea typeface="Courier New" pitchFamily="34" charset="-122"/>
                 <a:cs typeface="Courier New" pitchFamily="34" charset="-120"/>
               </a:rPr>
-              <a:t>    return max(frequencies, key=frequencies.get)</a:t>
-            </a:r>
-            <a:endParaRPr lang="en-US" sz="1250" dirty="0"/>
+              <a:t>        s_to_t[a] = b</a:t>
+            </a:r>
+            <a:endParaRPr lang="en-US" sz="1300" dirty="0"/>
+          </a:p>
+          <a:p>
+            <a:pPr indent="0" marL="0">
+              <a:lnSpc>
+                <a:spcPct val="130000"/>
+              </a:lnSpc>
+              <a:buNone/>
+            </a:pPr>
+            <a:r>
+              <a:rPr lang="en-US" sz="1300" dirty="0">
+                <a:solidFill>
+                  <a:srgbClr val="E8EAF6"/>
+                </a:solidFill>
+                <a:latin typeface="Courier New" pitchFamily="34" charset="0"/>
+                <a:ea typeface="Courier New" pitchFamily="34" charset="-122"/>
+                <a:cs typeface="Courier New" pitchFamily="34" charset="-120"/>
+              </a:rPr>
+              <a:t>        t_to_s[b] = a</a:t>
+            </a:r>
+            <a:endParaRPr lang="en-US" sz="1300" dirty="0"/>
+          </a:p>
+          <a:p>
+            <a:pPr indent="0" marL="0">
+              <a:lnSpc>
+                <a:spcPct val="130000"/>
+              </a:lnSpc>
+              <a:buNone/>
+            </a:pPr>
+            <a:r>
+              <a:rPr lang="en-US" sz="1300" dirty="0">
+                <a:solidFill>
+                  <a:srgbClr val="E8EAF6"/>
+                </a:solidFill>
+                <a:latin typeface="Courier New" pitchFamily="34" charset="0"/>
+                <a:ea typeface="Courier New" pitchFamily="34" charset="-122"/>
+                <a:cs typeface="Courier New" pitchFamily="34" charset="-120"/>
+              </a:rPr>
+              <a:t>    return True</a:t>
+            </a:r>
+            <a:endParaRPr lang="en-US" sz="1300" dirty="0"/>
           </a:p>
         </p:txBody>
       </p:sp>
@@ -8951,7 +9014,7 @@
         </p:nvSpPr>
         <p:spPr>
           <a:xfrm>
-            <a:off x="6217920" y="4221480"/>
+            <a:off x="6217920" y="4815840"/>
             <a:ext cx="5239512" cy="685800"/>
           </a:xfrm>
           <a:prstGeom prst="roundRect">
@@ -8978,7 +9041,7 @@
         </p:nvSpPr>
         <p:spPr>
           <a:xfrm>
-            <a:off x="6492240" y="4221480"/>
+            <a:off x="6492240" y="4815840"/>
             <a:ext cx="4690872" cy="685800"/>
           </a:xfrm>
           <a:prstGeom prst="rect">
@@ -9023,7 +9086,7 @@
                 <a:ea typeface="Calibri" pitchFamily="34" charset="-122"/>
                 <a:cs typeface="Calibri" pitchFamily="34" charset="-120"/>
               </a:rPr>
-              <a:t>   one pass to count, one pass over the counts</a:t>
+              <a:t>   one pass over both strings</a:t>
             </a:r>
             <a:endParaRPr lang="en-US" sz="1150" dirty="0"/>
           </a:p>
@@ -9060,7 +9123,7 @@
                 <a:ea typeface="Calibri" pitchFamily="34" charset="-122"/>
                 <a:cs typeface="Calibri" pitchFamily="34" charset="-120"/>
               </a:rPr>
-              <a:t>   one entry per distinct element</a:t>
+              <a:t>   k distinct characters, at most 128 in ASCII</a:t>
             </a:r>
             <a:endParaRPr lang="en-US" sz="1150" dirty="0"/>
           </a:p>
@@ -9068,18 +9131,18 @@
       </p:sp>
       <p:sp>
         <p:nvSpPr>
-          <p:cNvPr id="17" name="anim03_click_extra"/>
+          <p:cNvPr id="17" name="anim03_click_bottom"/>
           <p:cNvSpPr/>
           <p:nvPr/>
         </p:nvSpPr>
         <p:spPr>
           <a:xfrm>
-            <a:off x="6217920" y="5026152"/>
-            <a:ext cx="5239512" cy="457200"/>
+            <a:off x="731520" y="5486400"/>
+            <a:ext cx="5367528" cy="621792"/>
           </a:xfrm>
           <a:prstGeom prst="roundRect">
             <a:avLst>
-              <a:gd name="adj" fmla="val 12000"/>
+              <a:gd name="adj" fmla="val 8824"/>
             </a:avLst>
           </a:prstGeom>
           <a:solidFill>
@@ -9095,14 +9158,14 @@
       </p:sp>
       <p:sp>
         <p:nvSpPr>
-          <p:cNvPr id="18" name="anim03_click_extra"/>
+          <p:cNvPr id="18" name="anim03_click_bottom"/>
           <p:cNvSpPr txBox="1"/>
           <p:nvPr/>
         </p:nvSpPr>
         <p:spPr>
           <a:xfrm>
-            <a:off x="6492240" y="5026152"/>
-            <a:ext cx="4690872" cy="457200"/>
+            <a:off x="1005840" y="5486400"/>
+            <a:ext cx="4818888" cy="621792"/>
           </a:xfrm>
           <a:prstGeom prst="rect">
             <a:avLst/>
@@ -9122,105 +9185,25 @@
                 <a:solidFill>
                   <a:srgbClr val="1F2333"/>
                 </a:solidFill>
-                <a:latin typeface="Courier New" pitchFamily="34" charset="0"/>
-                <a:ea typeface="Courier New" pitchFamily="34" charset="-122"/>
-                <a:cs typeface="Courier New" pitchFamily="34" charset="-120"/>
-              </a:rPr>
-              <a:t>Counter(arr).most_common(1)</a:t>
-            </a:r>
-            <a:pPr indent="0" marL="0">
-              <a:buNone/>
-            </a:pPr>
-            <a:r>
-              <a:rPr lang="en-US" sz="1150" dirty="0">
-                <a:solidFill>
-                  <a:srgbClr val="5A6072"/>
-                </a:solidFill>
                 <a:latin typeface="Calibri" pitchFamily="34" charset="0"/>
                 <a:ea typeface="Calibri" pitchFamily="34" charset="-122"/>
                 <a:cs typeface="Calibri" pitchFamily="34" charset="-120"/>
               </a:rPr>
-              <a:t> also works. Counter is a dict underneath.</a:t>
-            </a:r>
-            <a:endParaRPr lang="en-US" sz="1150" dirty="0"/>
-          </a:p>
-        </p:txBody>
-      </p:sp>
-      <p:sp>
-        <p:nvSpPr>
-          <p:cNvPr id="19" name="anim04_click_bottom"/>
-          <p:cNvSpPr/>
-          <p:nvPr/>
-        </p:nvSpPr>
-        <p:spPr>
-          <a:xfrm>
-            <a:off x="731520" y="5602224"/>
-            <a:ext cx="10725912" cy="502920"/>
-          </a:xfrm>
-          <a:prstGeom prst="roundRect">
-            <a:avLst>
-              <a:gd name="adj" fmla="val 10909"/>
-            </a:avLst>
-          </a:prstGeom>
-          <a:solidFill>
-            <a:srgbClr val="FFFFFF"/>
-          </a:solidFill>
-          <a:ln w="9525">
-            <a:solidFill>
-              <a:srgbClr val="DDE1EC"/>
-            </a:solidFill>
-            <a:prstDash val="solid"/>
-          </a:ln>
-        </p:spPr>
-      </p:sp>
-      <p:sp>
-        <p:nvSpPr>
-          <p:cNvPr id="20" name="anim04_click_bottom"/>
-          <p:cNvSpPr txBox="1"/>
-          <p:nvPr/>
-        </p:nvSpPr>
-        <p:spPr>
-          <a:xfrm>
-            <a:off x="1005840" y="5602224"/>
-            <a:ext cx="10177272" cy="502920"/>
-          </a:xfrm>
-          <a:prstGeom prst="rect">
-            <a:avLst/>
-          </a:prstGeom>
-          <a:noFill/>
-          <a:ln/>
-        </p:spPr>
-        <p:txBody>
-          <a:bodyPr wrap="square" lIns="0" tIns="0" rIns="0" bIns="0" rtlCol="0" anchor="ctr"/>
-          <a:lstStyle/>
-          <a:p>
-            <a:pPr indent="0" marL="0">
-              <a:buNone/>
-            </a:pPr>
-            <a:r>
-              <a:rPr lang="en-US" sz="1200" b="1" dirty="0">
-                <a:solidFill>
-                  <a:srgbClr val="1F2333"/>
+              <a:t>Common bug:  </a:t>
+            </a:r>
+            <a:pPr indent="0" marL="0">
+              <a:buNone/>
+            </a:pPr>
+            <a:r>
+              <a:rPr lang="en-US" sz="1200" dirty="0">
+                <a:solidFill>
+                  <a:srgbClr val="5A6072"/>
                 </a:solidFill>
                 <a:latin typeface="Calibri" pitchFamily="34" charset="0"/>
                 <a:ea typeface="Calibri" pitchFamily="34" charset="-122"/>
                 <a:cs typeface="Calibri" pitchFamily="34" charset="-120"/>
               </a:rPr>
-              <a:t>Common bug:  </a:t>
-            </a:r>
-            <a:pPr indent="0" marL="0">
-              <a:buNone/>
-            </a:pPr>
-            <a:r>
-              <a:rPr lang="en-US" sz="1200" dirty="0">
-                <a:solidFill>
-                  <a:srgbClr val="5A6072"/>
-                </a:solidFill>
-                <a:latin typeface="Calibri" pitchFamily="34" charset="0"/>
-                <a:ea typeface="Calibri" pitchFamily="34" charset="-122"/>
-                <a:cs typeface="Calibri" pitchFamily="34" charset="-120"/>
-              </a:rPr>
-              <a:t>calling arr.count(x) inside a loop. It looks like one line, but it rescans the whole list every time, which is O(n²).</a:t>
+              <a:t>checking only one direction. With one dict, "ab" and "aa" passes, because nothing stops a and b from both mapping to a.</a:t>
             </a:r>
             <a:endParaRPr lang="en-US" sz="1200" dirty="0"/>
           </a:p>
@@ -9529,94 +9512,6 @@
                                         <p:cTn id="29" dur="500"/>
                                         <p:tgtEl>
                                           <p:spTgt spid="18"/>
-                                        </p:tgtEl>
-                                      </p:cBhvr>
-                                    </p:animEffect>
-                                  </p:childTnLst>
-                                </p:cTn>
-                              </p:par>
-                            </p:childTnLst>
-                          </p:cTn>
-                        </p:par>
-                      </p:childTnLst>
-                    </p:cTn>
-                  </p:par>
-                  <p:par>
-                    <p:cTn id="30" fill="hold">
-                      <p:stCondLst>
-                        <p:cond delay="indefinite"/>
-                      </p:stCondLst>
-                      <p:childTnLst>
-                        <p:par>
-                          <p:cTn id="31" fill="hold">
-                            <p:stCondLst>
-                              <p:cond delay="0"/>
-                            </p:stCondLst>
-                            <p:childTnLst>
-                              <p:par>
-                                <p:cTn id="32" presetID="10" presetClass="entr" presetSubtype="0" fill="hold" grpId="0" nodeType="clickEffect">
-                                  <p:stCondLst>
-                                    <p:cond delay="0"/>
-                                  </p:stCondLst>
-                                  <p:childTnLst>
-                                    <p:set>
-                                      <p:cBhvr>
-                                        <p:cTn id="33" dur="1" fill="hold">
-                                          <p:stCondLst>
-                                            <p:cond delay="0"/>
-                                          </p:stCondLst>
-                                        </p:cTn>
-                                        <p:tgtEl>
-                                          <p:spTgt spid="19"/>
-                                        </p:tgtEl>
-                                        <p:attrNameLst>
-                                          <p:attrName>style.visibility</p:attrName>
-                                        </p:attrNameLst>
-                                      </p:cBhvr>
-                                      <p:to>
-                                        <p:strVal val="visible"/>
-                                      </p:to>
-                                    </p:set>
-                                    <p:animEffect transition="in" filter="fade">
-                                      <p:cBhvr>
-                                        <p:cTn id="34" dur="500"/>
-                                        <p:tgtEl>
-                                          <p:spTgt spid="19"/>
-                                        </p:tgtEl>
-                                      </p:cBhvr>
-                                    </p:animEffect>
-                                  </p:childTnLst>
-                                </p:cTn>
-                              </p:par>
-                              <p:par>
-                                <p:cTn id="35" presetID="10" presetClass="entr" presetSubtype="0" fill="hold" grpId="0" nodeType="withEffect">
-                                  <p:stCondLst>
-                                    <p:cond delay="0"/>
-                                  </p:stCondLst>
-                                  <p:childTnLst>
-                                    <p:set>
-                                      <p:cBhvr>
-                                        <p:cTn id="36" dur="1" fill="hold">
-                                          <p:stCondLst>
-                                            <p:cond delay="0"/>
-                                          </p:stCondLst>
-                                        </p:cTn>
-                                        <p:tgtEl>
-                                          <p:spTgt spid="20"/>
-                                        </p:tgtEl>
-                                        <p:attrNameLst>
-                                          <p:attrName>style.visibility</p:attrName>
-                                        </p:attrNameLst>
-                                      </p:cBhvr>
-                                      <p:to>
-                                        <p:strVal val="visible"/>
-                                      </p:to>
-                                    </p:set>
-                                    <p:animEffect transition="in" filter="fade">
-                                      <p:cBhvr>
-                                        <p:cTn id="37" dur="500"/>
-                                        <p:tgtEl>
-                                          <p:spTgt spid="20"/>
                                         </p:tgtEl>
                                       </p:cBhvr>
                                     </p:animEffect>
@@ -9658,8 +9553,6 @@
       <p:bldP spid="16" grpId="0" animBg="1"/>
       <p:bldP spid="17" grpId="0" animBg="1"/>
       <p:bldP spid="18" grpId="0" animBg="1"/>
-      <p:bldP spid="19" grpId="0" animBg="1"/>
-      <p:bldP spid="20" grpId="0" animBg="1"/>
     </p:bldLst>
   </p:timing>
 </p:sld>
@@ -9756,7 +9649,7 @@
                 <a:ea typeface="Arial" pitchFamily="34" charset="-122"/>
                 <a:cs typeface="Arial" pitchFamily="34" charset="-120"/>
               </a:rPr>
-              <a:t>Worked example: Find Largest Value – Edugator 4.5</a:t>
+              <a:t>Worked example: 3 Sum – Edugator 4.4</a:t>
             </a:r>
             <a:endParaRPr lang="en-US" sz="3000" dirty="0"/>
           </a:p>
@@ -9861,7 +9754,7 @@
                 <a:ea typeface="Calibri" pitchFamily="34" charset="-122"/>
                 <a:cs typeface="Calibri" pitchFamily="34" charset="-120"/>
               </a:rPr>
-              <a:t>Read numbers from input, one per line, until a non-numeric line such as end. Store them in a pandas DataFrame and print the largest.</a:t>
+              <a:t>Given an array of integers nums, return every unique triplet [nums[i], nums[j], nums[k]], using three different indices, that sums to 0.</a:t>
             </a:r>
             <a:endParaRPr lang="en-US" sz="1350" dirty="0"/>
           </a:p>
@@ -9900,7 +9793,7 @@
                 <a:ea typeface="Courier New" pitchFamily="34" charset="-122"/>
                 <a:cs typeface="Courier New" pitchFamily="34" charset="-120"/>
               </a:rPr>
-              <a:t>5, 3.2, 7, -1, end  prints  7</a:t>
+              <a:t>[-1, 0, 1, 2, -1, -4]  returns</a:t>
             </a:r>
             <a:endParaRPr lang="en-US" sz="1250" dirty="0"/>
           </a:p>
@@ -9939,7 +9832,7 @@
                 <a:ea typeface="Courier New" pitchFamily="34" charset="-122"/>
                 <a:cs typeface="Courier New" pitchFamily="34" charset="-120"/>
               </a:rPr>
-              <a:t>-5, -10, -3, end  prints  -3</a:t>
+              <a:t>[[-1, -1, 2], [-1, 0, 1]]</a:t>
             </a:r>
             <a:endParaRPr lang="en-US" sz="1250" dirty="0"/>
           </a:p>
@@ -10019,7 +9912,7 @@
                 <a:ea typeface="Calibri" pitchFamily="34" charset="-122"/>
                 <a:cs typeface="Calibri" pitchFamily="34" charset="-120"/>
               </a:rPr>
-              <a:t>every number goes into one DataFrame column, and the largest value in that column is printed.</a:t>
+              <a:t>both triplets add up to 0, and each appears once even though -1 shows up twice. [0, 1, 1] returns [].</a:t>
             </a:r>
             <a:endParaRPr lang="en-US" sz="1250" dirty="0"/>
           </a:p>
@@ -10058,7 +9951,7 @@
                 <a:ea typeface="Calibri" pitchFamily="34" charset="-122"/>
                 <a:cs typeface="Calibri" pitchFamily="34" charset="-120"/>
               </a:rPr>
-              <a:t>Input stops at the first non-numeric line, so end, a blank line, or any word ends reading.</a:t>
+              <a:t>The order of the triplets does not matter, but no triplet may appear twice.</a:t>
             </a:r>
             <a:endParaRPr lang="en-US" sz="1200" dirty="0"/>
           </a:p>
@@ -10166,7 +10059,7 @@
                 <a:ea typeface="Arial" pitchFamily="34" charset="-122"/>
                 <a:cs typeface="Arial" pitchFamily="34" charset="-120"/>
               </a:rPr>
-              <a:t>Worked example: Find Largest Value – Edugator 4.5</a:t>
+              <a:t>Worked example: 3 Sum – Edugator 4.4</a:t>
             </a:r>
             <a:endParaRPr lang="en-US" sz="3000" dirty="0"/>
           </a:p>
@@ -10271,7 +10164,7 @@
                 <a:ea typeface="Calibri" pitchFamily="34" charset="-122"/>
                 <a:cs typeface="Calibri" pitchFamily="34" charset="-120"/>
               </a:rPr>
-              <a:t>Read numbers from input, one per line, until a non-numeric line such as end. Store them in a pandas DataFrame and print the largest.</a:t>
+              <a:t>Given an array of integers nums, return every unique triplet [nums[i], nums[j], nums[k]], using three different indices, that sums to 0.</a:t>
             </a:r>
             <a:endParaRPr lang="en-US" sz="1350" dirty="0"/>
           </a:p>
@@ -10310,7 +10203,7 @@
                 <a:ea typeface="Courier New" pitchFamily="34" charset="-122"/>
                 <a:cs typeface="Courier New" pitchFamily="34" charset="-120"/>
               </a:rPr>
-              <a:t>5, 3.2, 7, -1, end  prints  7</a:t>
+              <a:t>[-1, 0, 1, 2, -1, -4]  returns</a:t>
             </a:r>
             <a:endParaRPr lang="en-US" sz="1250" dirty="0"/>
           </a:p>
@@ -10349,7 +10242,7 @@
                 <a:ea typeface="Courier New" pitchFamily="34" charset="-122"/>
                 <a:cs typeface="Courier New" pitchFamily="34" charset="-120"/>
               </a:rPr>
-              <a:t>-5, -10, -3, end  prints  -3</a:t>
+              <a:t>[[-1, -1, 2], [-1, 0, 1]]</a:t>
             </a:r>
             <a:endParaRPr lang="en-US" sz="1250" dirty="0"/>
           </a:p>
@@ -10429,7 +10322,7 @@
                 <a:ea typeface="Calibri" pitchFamily="34" charset="-122"/>
                 <a:cs typeface="Calibri" pitchFamily="34" charset="-120"/>
               </a:rPr>
-              <a:t>every number goes into one DataFrame column, and the largest value in that column is printed.</a:t>
+              <a:t>both triplets add up to 0, and each appears once even though -1 shows up twice. [0, 1, 1] returns [].</a:t>
             </a:r>
             <a:endParaRPr lang="en-US" sz="1250" dirty="0"/>
           </a:p>
@@ -10468,7 +10361,7 @@
                 <a:ea typeface="Calibri" pitchFamily="34" charset="-122"/>
                 <a:cs typeface="Calibri" pitchFamily="34" charset="-120"/>
               </a:rPr>
-              <a:t>Input stops at the first non-numeric line, so end, a blank line, or any word ends reading.</a:t>
+              <a:t>The order of the triplets does not matter, but no triplet may appear twice.</a:t>
             </a:r>
             <a:endParaRPr lang="en-US" sz="1200" dirty="0"/>
           </a:p>
@@ -10648,7 +10541,7 @@
                 <a:ea typeface="Calibri" pitchFamily="34" charset="-122"/>
                 <a:cs typeface="Calibri" pitchFamily="34" charset="-120"/>
               </a:rPr>
-              <a:t>Edugator gives you the input loop and the DataFrame. You only write the last two lines, and the column is looked up by its name, like a dict key.</a:t>
+              <a:t>sort first. Then fix one number and run Two Sum on everything after it, looking for a pair that adds to -nums[i].</a:t>
             </a:r>
             <a:endParaRPr lang="en-US" sz="1250" dirty="0"/>
           </a:p>
@@ -10968,7 +10861,7 @@
                 <a:ea typeface="Arial" pitchFamily="34" charset="-122"/>
                 <a:cs typeface="Arial" pitchFamily="34" charset="-120"/>
               </a:rPr>
-              <a:t>Worked example: Find Largest Value – Edugator 4.5</a:t>
+              <a:t>Worked example: 3 Sum – Edugator 4.4</a:t>
             </a:r>
             <a:endParaRPr lang="en-US" sz="3000" dirty="0"/>
           </a:p>
@@ -11073,7 +10966,7 @@
                 <a:ea typeface="Calibri" pitchFamily="34" charset="-122"/>
                 <a:cs typeface="Calibri" pitchFamily="34" charset="-120"/>
               </a:rPr>
-              <a:t>Read numbers from input, one per line, until a non-numeric line such as end. Store them in a pandas DataFrame and print the largest.</a:t>
+              <a:t>Given an array of integers nums, return every unique triplet [nums[i], nums[j], nums[k]], using three different indices, that sums to 0.</a:t>
             </a:r>
             <a:endParaRPr lang="en-US" sz="1350" dirty="0"/>
           </a:p>
@@ -11112,7 +11005,7 @@
                 <a:ea typeface="Courier New" pitchFamily="34" charset="-122"/>
                 <a:cs typeface="Courier New" pitchFamily="34" charset="-120"/>
               </a:rPr>
-              <a:t>5, 3.2, 7, -1, end  prints  7</a:t>
+              <a:t>[-1, 0, 1, 2, -1, -4]  returns</a:t>
             </a:r>
             <a:endParaRPr lang="en-US" sz="1250" dirty="0"/>
           </a:p>
@@ -11151,7 +11044,7 @@
                 <a:ea typeface="Courier New" pitchFamily="34" charset="-122"/>
                 <a:cs typeface="Courier New" pitchFamily="34" charset="-120"/>
               </a:rPr>
-              <a:t>-5, -10, -3, end  prints  -3</a:t>
+              <a:t>[[-1, -1, 2], [-1, 0, 1]]</a:t>
             </a:r>
             <a:endParaRPr lang="en-US" sz="1250" dirty="0"/>
           </a:p>
@@ -11231,7 +11124,7 @@
                 <a:ea typeface="Calibri" pitchFamily="34" charset="-122"/>
                 <a:cs typeface="Calibri" pitchFamily="34" charset="-120"/>
               </a:rPr>
-              <a:t>every number goes into one DataFrame column, and the largest value in that column is printed.</a:t>
+              <a:t>both triplets add up to 0, and each appears once even though -1 shows up twice. [0, 1, 1] returns [].</a:t>
             </a:r>
             <a:endParaRPr lang="en-US" sz="1250" dirty="0"/>
           </a:p>
@@ -11270,7 +11163,7 @@
                 <a:ea typeface="Calibri" pitchFamily="34" charset="-122"/>
                 <a:cs typeface="Calibri" pitchFamily="34" charset="-120"/>
               </a:rPr>
-              <a:t>Input stops at the first non-numeric line, so end, a blank line, or any word ends reading.</a:t>
+              <a:t>The order of the triplets does not matter, but no triplet may appear twice.</a:t>
             </a:r>
             <a:endParaRPr lang="en-US" sz="1200" dirty="0"/>
           </a:p>
@@ -11378,7 +11271,7 @@
                 <a:ea typeface="Courier New" pitchFamily="34" charset="-122"/>
                 <a:cs typeface="Courier New" pitchFamily="34" charset="-120"/>
               </a:rPr>
-              <a:t>def find_largest_value():</a:t>
+              <a:t>def three_sum(nums):</a:t>
             </a:r>
             <a:endParaRPr lang="en-US" sz="1200" dirty="0"/>
           </a:p>
@@ -11398,7 +11291,7 @@
                 <a:ea typeface="Courier New" pitchFamily="34" charset="-122"/>
                 <a:cs typeface="Courier New" pitchFamily="34" charset="-120"/>
               </a:rPr>
-              <a:t>    numbers = []</a:t>
+              <a:t>    nums.sort()</a:t>
             </a:r>
             <a:endParaRPr lang="en-US" sz="1200" dirty="0"/>
           </a:p>
@@ -11418,7 +11311,7 @@
                 <a:ea typeface="Courier New" pitchFamily="34" charset="-122"/>
                 <a:cs typeface="Courier New" pitchFamily="34" charset="-120"/>
               </a:rPr>
-              <a:t>    while True:</a:t>
+              <a:t>    result = set()</a:t>
             </a:r>
             <a:endParaRPr lang="en-US" sz="1200" dirty="0"/>
           </a:p>
@@ -11438,7 +11331,7 @@
                 <a:ea typeface="Courier New" pitchFamily="34" charset="-122"/>
                 <a:cs typeface="Courier New" pitchFamily="34" charset="-120"/>
               </a:rPr>
-              <a:t>        user_input = input().strip()</a:t>
+              <a:t>    for i in range(len(nums) - 2):</a:t>
             </a:r>
             <a:endParaRPr lang="en-US" sz="1200" dirty="0"/>
           </a:p>
@@ -11458,7 +11351,7 @@
                 <a:ea typeface="Courier New" pitchFamily="34" charset="-122"/>
                 <a:cs typeface="Courier New" pitchFamily="34" charset="-120"/>
               </a:rPr>
-              <a:t>        if user_input.lower() == 'end':</a:t>
+              <a:t>        if i &gt; 0 and nums[i] == nums[i - 1]:</a:t>
             </a:r>
             <a:endParaRPr lang="en-US" sz="1200" dirty="0"/>
           </a:p>
@@ -11478,7 +11371,7 @@
                 <a:ea typeface="Courier New" pitchFamily="34" charset="-122"/>
                 <a:cs typeface="Courier New" pitchFamily="34" charset="-120"/>
               </a:rPr>
-              <a:t>            break</a:t>
+              <a:t>            continue    # same anchor as before</a:t>
             </a:r>
             <a:endParaRPr lang="en-US" sz="1200" dirty="0"/>
           </a:p>
@@ -11498,7 +11391,7 @@
                 <a:ea typeface="Courier New" pitchFamily="34" charset="-122"/>
                 <a:cs typeface="Courier New" pitchFamily="34" charset="-120"/>
               </a:rPr>
-              <a:t>        try:</a:t>
+              <a:t>        seen = set()</a:t>
             </a:r>
             <a:endParaRPr lang="en-US" sz="1200" dirty="0"/>
           </a:p>
@@ -11518,7 +11411,7 @@
                 <a:ea typeface="Courier New" pitchFamily="34" charset="-122"/>
                 <a:cs typeface="Courier New" pitchFamily="34" charset="-120"/>
               </a:rPr>
-              <a:t>            numbers.append(float(user_input))</a:t>
+              <a:t>        for x in nums[i + 1:]:</a:t>
             </a:r>
             <a:endParaRPr lang="en-US" sz="1200" dirty="0"/>
           </a:p>
@@ -11538,7 +11431,7 @@
                 <a:ea typeface="Courier New" pitchFamily="34" charset="-122"/>
                 <a:cs typeface="Courier New" pitchFamily="34" charset="-120"/>
               </a:rPr>
-              <a:t>        except ValueError:</a:t>
+              <a:t>            need = -nums[i] - x</a:t>
             </a:r>
             <a:endParaRPr lang="en-US" sz="1200" dirty="0"/>
           </a:p>
@@ -11558,7 +11451,7 @@
                 <a:ea typeface="Courier New" pitchFamily="34" charset="-122"/>
                 <a:cs typeface="Courier New" pitchFamily="34" charset="-120"/>
               </a:rPr>
-              <a:t>            break</a:t>
+              <a:t>            if need in seen:</a:t>
             </a:r>
             <a:endParaRPr lang="en-US" sz="1200" dirty="0"/>
           </a:p>
@@ -11578,7 +11471,7 @@
                 <a:ea typeface="Courier New" pitchFamily="34" charset="-122"/>
                 <a:cs typeface="Courier New" pitchFamily="34" charset="-120"/>
               </a:rPr>
-              <a:t>    df = pd.DataFrame(numbers, columns=['Numbers'])</a:t>
+              <a:t>                result.add((nums[i], need, x))</a:t>
             </a:r>
             <a:endParaRPr lang="en-US" sz="1200" dirty="0"/>
           </a:p>
@@ -11598,7 +11491,7 @@
                 <a:ea typeface="Courier New" pitchFamily="34" charset="-122"/>
                 <a:cs typeface="Courier New" pitchFamily="34" charset="-120"/>
               </a:rPr>
-              <a:t>    largest_number = df['Numbers'].max()</a:t>
+              <a:t>            seen.add(x)</a:t>
             </a:r>
             <a:endParaRPr lang="en-US" sz="1200" dirty="0"/>
           </a:p>
@@ -11618,7 +11511,7 @@
                 <a:ea typeface="Courier New" pitchFamily="34" charset="-122"/>
                 <a:cs typeface="Courier New" pitchFamily="34" charset="-120"/>
               </a:rPr>
-              <a:t>    print(largest_number)</a:t>
+              <a:t>    return sorted(list(t) for t in result)</a:t>
             </a:r>
             <a:endParaRPr lang="en-US" sz="1200" dirty="0"/>
           </a:p>
@@ -11687,7 +11580,7 @@
                 <a:ea typeface="Courier New" pitchFamily="34" charset="-122"/>
                 <a:cs typeface="Courier New" pitchFamily="34" charset="-120"/>
               </a:rPr>
-              <a:t>Time O(n)</a:t>
+              <a:t>Time O(n²)</a:t>
             </a:r>
             <a:pPr indent="0" marL="0">
               <a:lnSpc>
@@ -11704,7 +11597,7 @@
                 <a:ea typeface="Calibri" pitchFamily="34" charset="-122"/>
                 <a:cs typeface="Calibri" pitchFamily="34" charset="-120"/>
               </a:rPr>
-              <a:t>   read n numbers once, then one pass for max</a:t>
+              <a:t>   each anchor runs a one-pass Two Sum</a:t>
             </a:r>
             <a:endParaRPr lang="en-US" sz="1150" dirty="0"/>
           </a:p>
@@ -11741,7 +11634,7 @@
                 <a:ea typeface="Calibri" pitchFamily="34" charset="-122"/>
                 <a:cs typeface="Calibri" pitchFamily="34" charset="-120"/>
               </a:rPr>
-              <a:t>   the list and the DataFrame each hold n values</a:t>
+              <a:t>   the seen set and the results</a:t>
             </a:r>
             <a:endParaRPr lang="en-US" sz="1150" dirty="0"/>
           </a:p>
@@ -11807,7 +11700,7 @@
                 <a:ea typeface="Calibri" pitchFamily="34" charset="-122"/>
                 <a:cs typeface="Calibri" pitchFamily="34" charset="-120"/>
               </a:rPr>
-              <a:t>Where is the hash map?  </a:t>
+              <a:t>Common bug:  </a:t>
             </a:r>
             <a:pPr indent="0" marL="0">
               <a:buNone/>
@@ -11821,7 +11714,7 @@
                 <a:ea typeface="Calibri" pitchFamily="34" charset="-122"/>
                 <a:cs typeface="Calibri" pitchFamily="34" charset="-120"/>
               </a:rPr>
-              <a:t>df['Numbers'] finds a column by its name, the same way d[key] finds a value.</a:t>
+              <a:t>skipping the dedupe. Without the set of tuples, [-1, 0, 1] comes out twice, once for each -1.</a:t>
             </a:r>
             <a:endParaRPr lang="en-US" sz="1200" dirty="0"/>
           </a:p>
@@ -12904,7 +12797,7 @@
                 <a:ea typeface="Calibri" pitchFamily="34" charset="-122"/>
                 <a:cs typeface="Calibri" pitchFamily="34" charset="-120"/>
               </a:rPr>
-              <a:t>Three Edugator problems, solved together</a:t>
+              <a:t>Four Edugator problems, solved together</a:t>
             </a:r>
             <a:endParaRPr lang="en-US" sz="1250" dirty="0"/>
           </a:p>
@@ -14089,6 +13982,2477 @@
                 <a:ea typeface="Calibri" pitchFamily="34" charset="-122"/>
                 <a:cs typeface="Calibri" pitchFamily="34" charset="-120"/>
               </a:rPr>
+              <a:t>PRACTICE QUESTION 4</a:t>
+            </a:r>
+            <a:endParaRPr lang="en-US" sz="1200" dirty="0"/>
+          </a:p>
+        </p:txBody>
+      </p:sp>
+      <p:sp>
+        <p:nvSpPr>
+          <p:cNvPr id="3" name="Text 0"/>
+          <p:cNvSpPr/>
+          <p:nvPr>
+            <p:ph idx="100" type="title" hasCustomPrompt="1"/>
+          </p:nvPr>
+        </p:nvSpPr>
+        <p:spPr>
+          <a:xfrm>
+            <a:off x="731520" y="713232"/>
+            <a:ext cx="10789920" cy="685800"/>
+          </a:xfrm>
+          <a:prstGeom prst="rect">
+            <a:avLst/>
+          </a:prstGeom>
+          <a:noFill/>
+          <a:ln/>
+        </p:spPr>
+        <p:txBody>
+          <a:bodyPr wrap="square" lIns="0" tIns="0" rIns="0" bIns="0" rtlCol="0" anchor="ctr"/>
+          <a:lstStyle/>
+          <a:p>
+            <a:pPr algn="l" indent="0" marL="0">
+              <a:buNone/>
+            </a:pPr>
+            <a:r>
+              <a:rPr lang="en-US" sz="3000" b="1" dirty="0">
+                <a:solidFill>
+                  <a:srgbClr val="1F2333"/>
+                </a:solidFill>
+                <a:latin typeface="Arial" pitchFamily="34" charset="0"/>
+                <a:ea typeface="Arial" pitchFamily="34" charset="-122"/>
+                <a:cs typeface="Arial" pitchFamily="34" charset="-120"/>
+              </a:rPr>
+              <a:t>Worked example: Equal Pair Sums – Edugator 4.7</a:t>
+            </a:r>
+            <a:endParaRPr lang="en-US" sz="3000" dirty="0"/>
+          </a:p>
+        </p:txBody>
+      </p:sp>
+      <p:sp>
+        <p:nvSpPr>
+          <p:cNvPr id="4" name="card"/>
+          <p:cNvSpPr/>
+          <p:nvPr/>
+        </p:nvSpPr>
+        <p:spPr>
+          <a:xfrm>
+            <a:off x="731520" y="1572768"/>
+            <a:ext cx="5367528" cy="4206240"/>
+          </a:xfrm>
+          <a:prstGeom prst="roundRect">
+            <a:avLst>
+              <a:gd name="adj" fmla="val 1304"/>
+            </a:avLst>
+          </a:prstGeom>
+          <a:solidFill>
+            <a:srgbClr val="FFFFFF"/>
+          </a:solidFill>
+          <a:ln w="9525">
+            <a:solidFill>
+              <a:srgbClr val="DDE1EC"/>
+            </a:solidFill>
+            <a:prstDash val="solid"/>
+          </a:ln>
+        </p:spPr>
+      </p:sp>
+      <p:sp>
+        <p:nvSpPr>
+          <p:cNvPr id="5" name="Text 3"/>
+          <p:cNvSpPr txBox="1"/>
+          <p:nvPr/>
+        </p:nvSpPr>
+        <p:spPr>
+          <a:xfrm>
+            <a:off x="1005840" y="1783080"/>
+            <a:ext cx="4818888" cy="301752"/>
+          </a:xfrm>
+          <a:prstGeom prst="rect">
+            <a:avLst/>
+          </a:prstGeom>
+          <a:noFill/>
+          <a:ln/>
+        </p:spPr>
+        <p:txBody>
+          <a:bodyPr wrap="square" lIns="0" tIns="0" rIns="0" bIns="0" rtlCol="0" anchor="ctr"/>
+          <a:lstStyle/>
+          <a:p>
+            <a:pPr indent="0" marL="0">
+              <a:buNone/>
+            </a:pPr>
+            <a:r>
+              <a:rPr lang="en-US" sz="1700" b="1" dirty="0">
+                <a:solidFill>
+                  <a:srgbClr val="1F2333"/>
+                </a:solidFill>
+                <a:latin typeface="Arial" pitchFamily="34" charset="0"/>
+                <a:ea typeface="Arial" pitchFamily="34" charset="-122"/>
+                <a:cs typeface="Arial" pitchFamily="34" charset="-120"/>
+              </a:rPr>
+              <a:t>The problem</a:t>
+            </a:r>
+            <a:endParaRPr lang="en-US" sz="1700" dirty="0"/>
+          </a:p>
+        </p:txBody>
+      </p:sp>
+      <p:sp>
+        <p:nvSpPr>
+          <p:cNvPr id="6" name="Text 4"/>
+          <p:cNvSpPr txBox="1"/>
+          <p:nvPr/>
+        </p:nvSpPr>
+        <p:spPr>
+          <a:xfrm>
+            <a:off x="1005840" y="2121408"/>
+            <a:ext cx="4818888" cy="749808"/>
+          </a:xfrm>
+          <a:prstGeom prst="rect">
+            <a:avLst/>
+          </a:prstGeom>
+          <a:noFill/>
+          <a:ln/>
+        </p:spPr>
+        <p:txBody>
+          <a:bodyPr wrap="square" lIns="0" tIns="0" rIns="0" bIns="0" rtlCol="0" anchor="t"/>
+          <a:lstStyle/>
+          <a:p>
+            <a:pPr indent="0" marL="0">
+              <a:buNone/>
+            </a:pPr>
+            <a:r>
+              <a:rPr lang="en-US" sz="1350" dirty="0">
+                <a:solidFill>
+                  <a:srgbClr val="5A6072"/>
+                </a:solidFill>
+                <a:latin typeface="Calibri" pitchFamily="34" charset="0"/>
+                <a:ea typeface="Calibri" pitchFamily="34" charset="-122"/>
+                <a:cs typeface="Calibri" pitchFamily="34" charset="-120"/>
+              </a:rPr>
+              <a:t>Given nums, return True if two different index pairs (i, j) and (k, l) have the same sum, where i, j, k, and l are all different.</a:t>
+            </a:r>
+            <a:endParaRPr lang="en-US" sz="1350" dirty="0"/>
+          </a:p>
+        </p:txBody>
+      </p:sp>
+      <p:sp>
+        <p:nvSpPr>
+          <p:cNvPr id="7" name="Text 5"/>
+          <p:cNvSpPr txBox="1"/>
+          <p:nvPr/>
+        </p:nvSpPr>
+        <p:spPr>
+          <a:xfrm>
+            <a:off x="1005840" y="2907792"/>
+            <a:ext cx="4818888" cy="274320"/>
+          </a:xfrm>
+          <a:prstGeom prst="rect">
+            <a:avLst/>
+          </a:prstGeom>
+          <a:noFill/>
+          <a:ln/>
+        </p:spPr>
+        <p:txBody>
+          <a:bodyPr wrap="square" lIns="0" tIns="0" rIns="0" bIns="0" rtlCol="0" anchor="ctr"/>
+          <a:lstStyle/>
+          <a:p>
+            <a:pPr indent="0" marL="0">
+              <a:buNone/>
+            </a:pPr>
+            <a:r>
+              <a:rPr lang="en-US" sz="1250" dirty="0">
+                <a:solidFill>
+                  <a:srgbClr val="1F2333"/>
+                </a:solidFill>
+                <a:latin typeface="Courier New" pitchFamily="34" charset="0"/>
+                <a:ea typeface="Courier New" pitchFamily="34" charset="-122"/>
+                <a:cs typeface="Courier New" pitchFamily="34" charset="-120"/>
+              </a:rPr>
+              <a:t>[1, 2, 3, 4, 5]  returns  True</a:t>
+            </a:r>
+            <a:endParaRPr lang="en-US" sz="1250" dirty="0"/>
+          </a:p>
+        </p:txBody>
+      </p:sp>
+      <p:sp>
+        <p:nvSpPr>
+          <p:cNvPr id="8" name="Text 6"/>
+          <p:cNvSpPr txBox="1"/>
+          <p:nvPr/>
+        </p:nvSpPr>
+        <p:spPr>
+          <a:xfrm>
+            <a:off x="1005840" y="3200400"/>
+            <a:ext cx="4818888" cy="274320"/>
+          </a:xfrm>
+          <a:prstGeom prst="rect">
+            <a:avLst/>
+          </a:prstGeom>
+          <a:noFill/>
+          <a:ln/>
+        </p:spPr>
+        <p:txBody>
+          <a:bodyPr wrap="square" lIns="0" tIns="0" rIns="0" bIns="0" rtlCol="0" anchor="ctr"/>
+          <a:lstStyle/>
+          <a:p>
+            <a:pPr indent="0" marL="0">
+              <a:buNone/>
+            </a:pPr>
+            <a:r>
+              <a:rPr lang="en-US" sz="1250" dirty="0">
+                <a:solidFill>
+                  <a:srgbClr val="1F2333"/>
+                </a:solidFill>
+                <a:latin typeface="Courier New" pitchFamily="34" charset="0"/>
+                <a:ea typeface="Courier New" pitchFamily="34" charset="-122"/>
+                <a:cs typeface="Courier New" pitchFamily="34" charset="-120"/>
+              </a:rPr>
+              <a:t>[1, 2, 3, 6]  returns  False</a:t>
+            </a:r>
+            <a:endParaRPr lang="en-US" sz="1250" dirty="0"/>
+          </a:p>
+        </p:txBody>
+      </p:sp>
+      <p:sp>
+        <p:nvSpPr>
+          <p:cNvPr id="9" name="Shape 7"/>
+          <p:cNvSpPr/>
+          <p:nvPr/>
+        </p:nvSpPr>
+        <p:spPr>
+          <a:xfrm>
+            <a:off x="1005840" y="3611880"/>
+            <a:ext cx="4818888" cy="914400"/>
+          </a:xfrm>
+          <a:prstGeom prst="roundRect">
+            <a:avLst>
+              <a:gd name="adj" fmla="val 5000"/>
+            </a:avLst>
+          </a:prstGeom>
+          <a:solidFill>
+            <a:srgbClr val="FFF1EB"/>
+          </a:solidFill>
+          <a:ln w="9525">
+            <a:solidFill>
+              <a:srgbClr val="FFD5C4"/>
+            </a:solidFill>
+            <a:prstDash val="solid"/>
+          </a:ln>
+        </p:spPr>
+      </p:sp>
+      <p:sp>
+        <p:nvSpPr>
+          <p:cNvPr id="10" name="Text 8"/>
+          <p:cNvSpPr txBox="1"/>
+          <p:nvPr/>
+        </p:nvSpPr>
+        <p:spPr>
+          <a:xfrm>
+            <a:off x="1188720" y="3611880"/>
+            <a:ext cx="4453128" cy="914400"/>
+          </a:xfrm>
+          <a:prstGeom prst="rect">
+            <a:avLst/>
+          </a:prstGeom>
+          <a:noFill/>
+          <a:ln/>
+        </p:spPr>
+        <p:txBody>
+          <a:bodyPr wrap="square" lIns="0" tIns="0" rIns="0" bIns="0" rtlCol="0" anchor="ctr"/>
+          <a:lstStyle/>
+          <a:p>
+            <a:pPr indent="0" marL="0">
+              <a:buNone/>
+            </a:pPr>
+            <a:r>
+              <a:rPr lang="en-US" sz="1250" b="1" dirty="0">
+                <a:solidFill>
+                  <a:srgbClr val="B3441F"/>
+                </a:solidFill>
+                <a:latin typeface="Calibri" pitchFamily="34" charset="0"/>
+                <a:ea typeface="Calibri" pitchFamily="34" charset="-122"/>
+                <a:cs typeface="Calibri" pitchFamily="34" charset="-120"/>
+              </a:rPr>
+              <a:t>Explanation: </a:t>
+            </a:r>
+            <a:pPr indent="0" marL="0">
+              <a:buNone/>
+            </a:pPr>
+            <a:r>
+              <a:rPr lang="en-US" sz="1250" dirty="0">
+                <a:solidFill>
+                  <a:srgbClr val="B3441F"/>
+                </a:solidFill>
+                <a:latin typeface="Calibri" pitchFamily="34" charset="0"/>
+                <a:ea typeface="Calibri" pitchFamily="34" charset="-122"/>
+                <a:cs typeface="Calibri" pitchFamily="34" charset="-120"/>
+              </a:rPr>
+              <a:t>(0, 4) and (1, 3) both sum to 6. In [1, 2, 3, 6] no two pairs match, and [1, 2, 3] has too few indices.</a:t>
+            </a:r>
+            <a:endParaRPr lang="en-US" sz="1250" dirty="0"/>
+          </a:p>
+        </p:txBody>
+      </p:sp>
+      <p:sp>
+        <p:nvSpPr>
+          <p:cNvPr id="11" name="Text 9"/>
+          <p:cNvSpPr txBox="1"/>
+          <p:nvPr/>
+        </p:nvSpPr>
+        <p:spPr>
+          <a:xfrm>
+            <a:off x="1005840" y="4681728"/>
+            <a:ext cx="4818888" cy="502920"/>
+          </a:xfrm>
+          <a:prstGeom prst="rect">
+            <a:avLst/>
+          </a:prstGeom>
+          <a:noFill/>
+          <a:ln/>
+        </p:spPr>
+        <p:txBody>
+          <a:bodyPr wrap="square" lIns="0" tIns="0" rIns="0" bIns="0" rtlCol="0" anchor="t"/>
+          <a:lstStyle/>
+          <a:p>
+            <a:pPr indent="0" marL="0">
+              <a:buNone/>
+            </a:pPr>
+            <a:r>
+              <a:rPr lang="en-US" sz="1200" i="1" dirty="0">
+                <a:solidFill>
+                  <a:srgbClr val="5A6072"/>
+                </a:solidFill>
+                <a:latin typeface="Calibri" pitchFamily="34" charset="0"/>
+                <a:ea typeface="Calibri" pitchFamily="34" charset="-122"/>
+                <a:cs typeface="Calibri" pitchFamily="34" charset="-120"/>
+              </a:rPr>
+              <a:t>On Edugator: Equal Sums of Distinct Index Pairs. At most 20 numbers, each between -10³ and 10³.</a:t>
+            </a:r>
+            <a:endParaRPr lang="en-US" sz="1200" dirty="0"/>
+          </a:p>
+        </p:txBody>
+      </p:sp>
+    </p:spTree>
+  </p:cSld>
+  <p:clrMapOvr>
+    <a:masterClrMapping/>
+  </p:clrMapOvr>
+  <p:transition spd="med">
+    <p:fade/>
+  </p:transition>
+</p:sld>
+</file>
+
+<file path=ppt/slides/slide21.xml><?xml version="1.0" encoding="utf-8"?>
+<p:sld xmlns:a="http://schemas.openxmlformats.org/drawingml/2006/main" xmlns:r="http://schemas.openxmlformats.org/officeDocument/2006/relationships" xmlns:p="http://schemas.openxmlformats.org/presentationml/2006/main">
+  <p:cSld name="Slide 21">
+    <p:spTree>
+      <p:nvGrpSpPr>
+        <p:cNvPr id="1" name=""/>
+        <p:cNvGrpSpPr/>
+        <p:nvPr/>
+      </p:nvGrpSpPr>
+      <p:grpSpPr>
+        <a:xfrm>
+          <a:off x="0" y="0"/>
+          <a:ext cx="0" cy="0"/>
+          <a:chOff x="0" y="0"/>
+          <a:chExt cx="0" cy="0"/>
+        </a:xfrm>
+      </p:grpSpPr>
+      <p:sp>
+        <p:nvSpPr>
+          <p:cNvPr id="2" name="eyebrow"/>
+          <p:cNvSpPr txBox="1"/>
+          <p:nvPr/>
+        </p:nvSpPr>
+        <p:spPr>
+          <a:xfrm>
+            <a:off x="731520" y="411480"/>
+            <a:ext cx="8229600" cy="274320"/>
+          </a:xfrm>
+          <a:prstGeom prst="rect">
+            <a:avLst/>
+          </a:prstGeom>
+          <a:noFill/>
+          <a:ln/>
+        </p:spPr>
+        <p:txBody>
+          <a:bodyPr wrap="square" lIns="0" tIns="0" rIns="0" bIns="0" rtlCol="0" anchor="ctr"/>
+          <a:lstStyle/>
+          <a:p>
+            <a:pPr indent="0" marL="0">
+              <a:buNone/>
+            </a:pPr>
+            <a:r>
+              <a:rPr lang="en-US" sz="1200" b="1" dirty="0">
+                <a:solidFill>
+                  <a:srgbClr val="FF6B35"/>
+                </a:solidFill>
+                <a:latin typeface="Calibri" pitchFamily="34" charset="0"/>
+                <a:ea typeface="Calibri" pitchFamily="34" charset="-122"/>
+                <a:cs typeface="Calibri" pitchFamily="34" charset="-120"/>
+              </a:rPr>
+              <a:t>PRACTICE QUESTION 4</a:t>
+            </a:r>
+            <a:endParaRPr lang="en-US" sz="1200" dirty="0"/>
+          </a:p>
+        </p:txBody>
+      </p:sp>
+      <p:sp>
+        <p:nvSpPr>
+          <p:cNvPr id="3" name="Text 0"/>
+          <p:cNvSpPr/>
+          <p:nvPr>
+            <p:ph idx="100" type="title" hasCustomPrompt="1"/>
+          </p:nvPr>
+        </p:nvSpPr>
+        <p:spPr>
+          <a:xfrm>
+            <a:off x="731520" y="713232"/>
+            <a:ext cx="10789920" cy="685800"/>
+          </a:xfrm>
+          <a:prstGeom prst="rect">
+            <a:avLst/>
+          </a:prstGeom>
+          <a:noFill/>
+          <a:ln/>
+        </p:spPr>
+        <p:txBody>
+          <a:bodyPr wrap="square" lIns="0" tIns="0" rIns="0" bIns="0" rtlCol="0" anchor="ctr"/>
+          <a:lstStyle/>
+          <a:p>
+            <a:pPr algn="l" indent="0" marL="0">
+              <a:buNone/>
+            </a:pPr>
+            <a:r>
+              <a:rPr lang="en-US" sz="3000" b="1" dirty="0">
+                <a:solidFill>
+                  <a:srgbClr val="1F2333"/>
+                </a:solidFill>
+                <a:latin typeface="Arial" pitchFamily="34" charset="0"/>
+                <a:ea typeface="Arial" pitchFamily="34" charset="-122"/>
+                <a:cs typeface="Arial" pitchFamily="34" charset="-120"/>
+              </a:rPr>
+              <a:t>Worked example: Equal Pair Sums – Edugator 4.7</a:t>
+            </a:r>
+            <a:endParaRPr lang="en-US" sz="3000" dirty="0"/>
+          </a:p>
+        </p:txBody>
+      </p:sp>
+      <p:sp>
+        <p:nvSpPr>
+          <p:cNvPr id="4" name="card"/>
+          <p:cNvSpPr/>
+          <p:nvPr/>
+        </p:nvSpPr>
+        <p:spPr>
+          <a:xfrm>
+            <a:off x="731520" y="1572768"/>
+            <a:ext cx="5367528" cy="4206240"/>
+          </a:xfrm>
+          <a:prstGeom prst="roundRect">
+            <a:avLst>
+              <a:gd name="adj" fmla="val 1304"/>
+            </a:avLst>
+          </a:prstGeom>
+          <a:solidFill>
+            <a:srgbClr val="FFFFFF"/>
+          </a:solidFill>
+          <a:ln w="9525">
+            <a:solidFill>
+              <a:srgbClr val="DDE1EC"/>
+            </a:solidFill>
+            <a:prstDash val="solid"/>
+          </a:ln>
+        </p:spPr>
+      </p:sp>
+      <p:sp>
+        <p:nvSpPr>
+          <p:cNvPr id="5" name="Text 3"/>
+          <p:cNvSpPr txBox="1"/>
+          <p:nvPr/>
+        </p:nvSpPr>
+        <p:spPr>
+          <a:xfrm>
+            <a:off x="1005840" y="1783080"/>
+            <a:ext cx="4818888" cy="301752"/>
+          </a:xfrm>
+          <a:prstGeom prst="rect">
+            <a:avLst/>
+          </a:prstGeom>
+          <a:noFill/>
+          <a:ln/>
+        </p:spPr>
+        <p:txBody>
+          <a:bodyPr wrap="square" lIns="0" tIns="0" rIns="0" bIns="0" rtlCol="0" anchor="ctr"/>
+          <a:lstStyle/>
+          <a:p>
+            <a:pPr indent="0" marL="0">
+              <a:buNone/>
+            </a:pPr>
+            <a:r>
+              <a:rPr lang="en-US" sz="1700" b="1" dirty="0">
+                <a:solidFill>
+                  <a:srgbClr val="1F2333"/>
+                </a:solidFill>
+                <a:latin typeface="Arial" pitchFamily="34" charset="0"/>
+                <a:ea typeface="Arial" pitchFamily="34" charset="-122"/>
+                <a:cs typeface="Arial" pitchFamily="34" charset="-120"/>
+              </a:rPr>
+              <a:t>The problem</a:t>
+            </a:r>
+            <a:endParaRPr lang="en-US" sz="1700" dirty="0"/>
+          </a:p>
+        </p:txBody>
+      </p:sp>
+      <p:sp>
+        <p:nvSpPr>
+          <p:cNvPr id="6" name="Text 4"/>
+          <p:cNvSpPr txBox="1"/>
+          <p:nvPr/>
+        </p:nvSpPr>
+        <p:spPr>
+          <a:xfrm>
+            <a:off x="1005840" y="2121408"/>
+            <a:ext cx="4818888" cy="749808"/>
+          </a:xfrm>
+          <a:prstGeom prst="rect">
+            <a:avLst/>
+          </a:prstGeom>
+          <a:noFill/>
+          <a:ln/>
+        </p:spPr>
+        <p:txBody>
+          <a:bodyPr wrap="square" lIns="0" tIns="0" rIns="0" bIns="0" rtlCol="0" anchor="t"/>
+          <a:lstStyle/>
+          <a:p>
+            <a:pPr indent="0" marL="0">
+              <a:buNone/>
+            </a:pPr>
+            <a:r>
+              <a:rPr lang="en-US" sz="1350" dirty="0">
+                <a:solidFill>
+                  <a:srgbClr val="5A6072"/>
+                </a:solidFill>
+                <a:latin typeface="Calibri" pitchFamily="34" charset="0"/>
+                <a:ea typeface="Calibri" pitchFamily="34" charset="-122"/>
+                <a:cs typeface="Calibri" pitchFamily="34" charset="-120"/>
+              </a:rPr>
+              <a:t>Given nums, return True if two different index pairs (i, j) and (k, l) have the same sum, where i, j, k, and l are all different.</a:t>
+            </a:r>
+            <a:endParaRPr lang="en-US" sz="1350" dirty="0"/>
+          </a:p>
+        </p:txBody>
+      </p:sp>
+      <p:sp>
+        <p:nvSpPr>
+          <p:cNvPr id="7" name="Text 5"/>
+          <p:cNvSpPr txBox="1"/>
+          <p:nvPr/>
+        </p:nvSpPr>
+        <p:spPr>
+          <a:xfrm>
+            <a:off x="1005840" y="2907792"/>
+            <a:ext cx="4818888" cy="274320"/>
+          </a:xfrm>
+          <a:prstGeom prst="rect">
+            <a:avLst/>
+          </a:prstGeom>
+          <a:noFill/>
+          <a:ln/>
+        </p:spPr>
+        <p:txBody>
+          <a:bodyPr wrap="square" lIns="0" tIns="0" rIns="0" bIns="0" rtlCol="0" anchor="ctr"/>
+          <a:lstStyle/>
+          <a:p>
+            <a:pPr indent="0" marL="0">
+              <a:buNone/>
+            </a:pPr>
+            <a:r>
+              <a:rPr lang="en-US" sz="1250" dirty="0">
+                <a:solidFill>
+                  <a:srgbClr val="1F2333"/>
+                </a:solidFill>
+                <a:latin typeface="Courier New" pitchFamily="34" charset="0"/>
+                <a:ea typeface="Courier New" pitchFamily="34" charset="-122"/>
+                <a:cs typeface="Courier New" pitchFamily="34" charset="-120"/>
+              </a:rPr>
+              <a:t>[1, 2, 3, 4, 5]  returns  True</a:t>
+            </a:r>
+            <a:endParaRPr lang="en-US" sz="1250" dirty="0"/>
+          </a:p>
+        </p:txBody>
+      </p:sp>
+      <p:sp>
+        <p:nvSpPr>
+          <p:cNvPr id="8" name="Text 6"/>
+          <p:cNvSpPr txBox="1"/>
+          <p:nvPr/>
+        </p:nvSpPr>
+        <p:spPr>
+          <a:xfrm>
+            <a:off x="1005840" y="3200400"/>
+            <a:ext cx="4818888" cy="274320"/>
+          </a:xfrm>
+          <a:prstGeom prst="rect">
+            <a:avLst/>
+          </a:prstGeom>
+          <a:noFill/>
+          <a:ln/>
+        </p:spPr>
+        <p:txBody>
+          <a:bodyPr wrap="square" lIns="0" tIns="0" rIns="0" bIns="0" rtlCol="0" anchor="ctr"/>
+          <a:lstStyle/>
+          <a:p>
+            <a:pPr indent="0" marL="0">
+              <a:buNone/>
+            </a:pPr>
+            <a:r>
+              <a:rPr lang="en-US" sz="1250" dirty="0">
+                <a:solidFill>
+                  <a:srgbClr val="1F2333"/>
+                </a:solidFill>
+                <a:latin typeface="Courier New" pitchFamily="34" charset="0"/>
+                <a:ea typeface="Courier New" pitchFamily="34" charset="-122"/>
+                <a:cs typeface="Courier New" pitchFamily="34" charset="-120"/>
+              </a:rPr>
+              <a:t>[1, 2, 3, 6]  returns  False</a:t>
+            </a:r>
+            <a:endParaRPr lang="en-US" sz="1250" dirty="0"/>
+          </a:p>
+        </p:txBody>
+      </p:sp>
+      <p:sp>
+        <p:nvSpPr>
+          <p:cNvPr id="9" name="Shape 7"/>
+          <p:cNvSpPr/>
+          <p:nvPr/>
+        </p:nvSpPr>
+        <p:spPr>
+          <a:xfrm>
+            <a:off x="1005840" y="3611880"/>
+            <a:ext cx="4818888" cy="914400"/>
+          </a:xfrm>
+          <a:prstGeom prst="roundRect">
+            <a:avLst>
+              <a:gd name="adj" fmla="val 5000"/>
+            </a:avLst>
+          </a:prstGeom>
+          <a:solidFill>
+            <a:srgbClr val="FFF1EB"/>
+          </a:solidFill>
+          <a:ln w="9525">
+            <a:solidFill>
+              <a:srgbClr val="FFD5C4"/>
+            </a:solidFill>
+            <a:prstDash val="solid"/>
+          </a:ln>
+        </p:spPr>
+      </p:sp>
+      <p:sp>
+        <p:nvSpPr>
+          <p:cNvPr id="10" name="Text 8"/>
+          <p:cNvSpPr txBox="1"/>
+          <p:nvPr/>
+        </p:nvSpPr>
+        <p:spPr>
+          <a:xfrm>
+            <a:off x="1188720" y="3611880"/>
+            <a:ext cx="4453128" cy="914400"/>
+          </a:xfrm>
+          <a:prstGeom prst="rect">
+            <a:avLst/>
+          </a:prstGeom>
+          <a:noFill/>
+          <a:ln/>
+        </p:spPr>
+        <p:txBody>
+          <a:bodyPr wrap="square" lIns="0" tIns="0" rIns="0" bIns="0" rtlCol="0" anchor="ctr"/>
+          <a:lstStyle/>
+          <a:p>
+            <a:pPr indent="0" marL="0">
+              <a:buNone/>
+            </a:pPr>
+            <a:r>
+              <a:rPr lang="en-US" sz="1250" b="1" dirty="0">
+                <a:solidFill>
+                  <a:srgbClr val="B3441F"/>
+                </a:solidFill>
+                <a:latin typeface="Calibri" pitchFamily="34" charset="0"/>
+                <a:ea typeface="Calibri" pitchFamily="34" charset="-122"/>
+                <a:cs typeface="Calibri" pitchFamily="34" charset="-120"/>
+              </a:rPr>
+              <a:t>Explanation: </a:t>
+            </a:r>
+            <a:pPr indent="0" marL="0">
+              <a:buNone/>
+            </a:pPr>
+            <a:r>
+              <a:rPr lang="en-US" sz="1250" dirty="0">
+                <a:solidFill>
+                  <a:srgbClr val="B3441F"/>
+                </a:solidFill>
+                <a:latin typeface="Calibri" pitchFamily="34" charset="0"/>
+                <a:ea typeface="Calibri" pitchFamily="34" charset="-122"/>
+                <a:cs typeface="Calibri" pitchFamily="34" charset="-120"/>
+              </a:rPr>
+              <a:t>(0, 4) and (1, 3) both sum to 6. In [1, 2, 3, 6] no two pairs match, and [1, 2, 3] has too few indices.</a:t>
+            </a:r>
+            <a:endParaRPr lang="en-US" sz="1250" dirty="0"/>
+          </a:p>
+        </p:txBody>
+      </p:sp>
+      <p:sp>
+        <p:nvSpPr>
+          <p:cNvPr id="11" name="Text 9"/>
+          <p:cNvSpPr txBox="1"/>
+          <p:nvPr/>
+        </p:nvSpPr>
+        <p:spPr>
+          <a:xfrm>
+            <a:off x="1005840" y="4681728"/>
+            <a:ext cx="4818888" cy="502920"/>
+          </a:xfrm>
+          <a:prstGeom prst="rect">
+            <a:avLst/>
+          </a:prstGeom>
+          <a:noFill/>
+          <a:ln/>
+        </p:spPr>
+        <p:txBody>
+          <a:bodyPr wrap="square" lIns="0" tIns="0" rIns="0" bIns="0" rtlCol="0" anchor="t"/>
+          <a:lstStyle/>
+          <a:p>
+            <a:pPr indent="0" marL="0">
+              <a:buNone/>
+            </a:pPr>
+            <a:r>
+              <a:rPr lang="en-US" sz="1200" i="1" dirty="0">
+                <a:solidFill>
+                  <a:srgbClr val="5A6072"/>
+                </a:solidFill>
+                <a:latin typeface="Calibri" pitchFamily="34" charset="0"/>
+                <a:ea typeface="Calibri" pitchFamily="34" charset="-122"/>
+                <a:cs typeface="Calibri" pitchFamily="34" charset="-120"/>
+              </a:rPr>
+              <a:t>On Edugator: Equal Sums of Distinct Index Pairs. At most 20 numbers, each between -10³ and 10³.</a:t>
+            </a:r>
+            <a:endParaRPr lang="en-US" sz="1200" dirty="0"/>
+          </a:p>
+        </p:txBody>
+      </p:sp>
+      <p:sp>
+        <p:nvSpPr>
+          <p:cNvPr id="12" name="anim01_click_timer"/>
+          <p:cNvSpPr/>
+          <p:nvPr/>
+        </p:nvSpPr>
+        <p:spPr>
+          <a:xfrm>
+            <a:off x="6373368" y="1572768"/>
+            <a:ext cx="5084064" cy="1554480"/>
+          </a:xfrm>
+          <a:prstGeom prst="roundRect">
+            <a:avLst>
+              <a:gd name="adj" fmla="val 3529"/>
+            </a:avLst>
+          </a:prstGeom>
+          <a:solidFill>
+            <a:srgbClr val="1B1E33"/>
+          </a:solidFill>
+          <a:ln w="9525">
+            <a:solidFill>
+              <a:srgbClr val="1B1E33"/>
+            </a:solidFill>
+            <a:prstDash val="solid"/>
+          </a:ln>
+        </p:spPr>
+      </p:sp>
+      <p:sp>
+        <p:nvSpPr>
+          <p:cNvPr id="13" name="anim01_click_timer"/>
+          <p:cNvSpPr txBox="1"/>
+          <p:nvPr/>
+        </p:nvSpPr>
+        <p:spPr>
+          <a:xfrm>
+            <a:off x="6629400" y="1572768"/>
+            <a:ext cx="4572000" cy="1554480"/>
+          </a:xfrm>
+          <a:prstGeom prst="rect">
+            <a:avLst/>
+          </a:prstGeom>
+          <a:noFill/>
+          <a:ln/>
+        </p:spPr>
+        <p:txBody>
+          <a:bodyPr wrap="square" lIns="0" tIns="0" rIns="0" bIns="0" rtlCol="0" anchor="ctr"/>
+          <a:lstStyle/>
+          <a:p>
+            <a:pPr indent="0" marL="0">
+              <a:buNone/>
+            </a:pPr>
+            <a:r>
+              <a:rPr lang="en-US" sz="1700" dirty="0">
+                <a:solidFill>
+                  <a:srgbClr val="FFFFFF"/>
+                </a:solidFill>
+                <a:latin typeface="Calibri" pitchFamily="34" charset="0"/>
+                <a:ea typeface="Calibri" pitchFamily="34" charset="-122"/>
+                <a:cs typeface="Calibri" pitchFamily="34" charset="-120"/>
+              </a:rPr>
+              <a:t>You have 5 minutes to complete this.</a:t>
+            </a:r>
+            <a:endParaRPr lang="en-US" sz="1700" dirty="0"/>
+          </a:p>
+          <a:p>
+            <a:pPr indent="0" marL="0">
+              <a:buNone/>
+            </a:pPr>
+            <a:r>
+              <a:rPr lang="en-US" sz="1000" dirty="0">
+                <a:solidFill>
+                  <a:srgbClr val="FFFFFF"/>
+                </a:solidFill>
+                <a:latin typeface="Calibri" pitchFamily="34" charset="0"/>
+                <a:ea typeface="Calibri" pitchFamily="34" charset="-122"/>
+                <a:cs typeface="Calibri" pitchFamily="34" charset="-120"/>
+              </a:rPr>
+              <a:t> </a:t>
+            </a:r>
+            <a:endParaRPr lang="en-US" sz="1700" dirty="0"/>
+          </a:p>
+          <a:p>
+            <a:pPr indent="0" marL="0">
+              <a:buNone/>
+            </a:pPr>
+            <a:r>
+              <a:rPr lang="en-US" sz="1700" dirty="0">
+                <a:solidFill>
+                  <a:srgbClr val="FFFFFF"/>
+                </a:solidFill>
+                <a:latin typeface="Calibri" pitchFamily="34" charset="0"/>
+                <a:ea typeface="Calibri" pitchFamily="34" charset="-122"/>
+                <a:cs typeface="Calibri" pitchFamily="34" charset="-120"/>
+              </a:rPr>
+              <a:t>Please feel free to work in pairs or small groups (3 to 4).</a:t>
+            </a:r>
+            <a:endParaRPr lang="en-US" sz="1700" dirty="0"/>
+          </a:p>
+        </p:txBody>
+      </p:sp>
+      <p:sp>
+        <p:nvSpPr>
+          <p:cNvPr id="14" name="anim02_click_hint"/>
+          <p:cNvSpPr/>
+          <p:nvPr/>
+        </p:nvSpPr>
+        <p:spPr>
+          <a:xfrm>
+            <a:off x="6373368" y="3291840"/>
+            <a:ext cx="5084064" cy="960120"/>
+          </a:xfrm>
+          <a:prstGeom prst="roundRect">
+            <a:avLst>
+              <a:gd name="adj" fmla="val 5714"/>
+            </a:avLst>
+          </a:prstGeom>
+          <a:solidFill>
+            <a:srgbClr val="FFFFFF"/>
+          </a:solidFill>
+          <a:ln w="9525">
+            <a:solidFill>
+              <a:srgbClr val="DDE1EC"/>
+            </a:solidFill>
+            <a:prstDash val="solid"/>
+          </a:ln>
+        </p:spPr>
+      </p:sp>
+      <p:sp>
+        <p:nvSpPr>
+          <p:cNvPr id="15" name="anim02_click_hint"/>
+          <p:cNvSpPr txBox="1"/>
+          <p:nvPr/>
+        </p:nvSpPr>
+        <p:spPr>
+          <a:xfrm>
+            <a:off x="6629400" y="3291840"/>
+            <a:ext cx="4572000" cy="960120"/>
+          </a:xfrm>
+          <a:prstGeom prst="rect">
+            <a:avLst/>
+          </a:prstGeom>
+          <a:noFill/>
+          <a:ln/>
+        </p:spPr>
+        <p:txBody>
+          <a:bodyPr wrap="square" lIns="0" tIns="0" rIns="0" bIns="0" rtlCol="0" anchor="ctr"/>
+          <a:lstStyle/>
+          <a:p>
+            <a:pPr indent="0" marL="0">
+              <a:buNone/>
+            </a:pPr>
+            <a:r>
+              <a:rPr lang="en-US" sz="1250" b="1" dirty="0">
+                <a:solidFill>
+                  <a:srgbClr val="1F2333"/>
+                </a:solidFill>
+                <a:latin typeface="Calibri" pitchFamily="34" charset="0"/>
+                <a:ea typeface="Calibri" pitchFamily="34" charset="-122"/>
+                <a:cs typeface="Calibri" pitchFamily="34" charset="-120"/>
+              </a:rPr>
+              <a:t>Hint:  </a:t>
+            </a:r>
+            <a:pPr indent="0" marL="0">
+              <a:buNone/>
+            </a:pPr>
+            <a:r>
+              <a:rPr lang="en-US" sz="1250" dirty="0">
+                <a:solidFill>
+                  <a:srgbClr val="5A6072"/>
+                </a:solidFill>
+                <a:latin typeface="Calibri" pitchFamily="34" charset="0"/>
+                <a:ea typeface="Calibri" pitchFamily="34" charset="-122"/>
+                <a:cs typeface="Calibri" pitchFamily="34" charset="-120"/>
+              </a:rPr>
+              <a:t>this is Two Sum one level up. Instead of remembering numbers you have seen, remember the pair sums you have seen.</a:t>
+            </a:r>
+            <a:endParaRPr lang="en-US" sz="1250" dirty="0"/>
+          </a:p>
+        </p:txBody>
+      </p:sp>
+    </p:spTree>
+  </p:cSld>
+  <p:clrMapOvr>
+    <a:masterClrMapping/>
+  </p:clrMapOvr>
+  <p:transition spd="med">
+    <p:fade/>
+  </p:transition>
+  <p:timing>
+    <p:tnLst>
+      <p:par>
+        <p:cTn id="1" dur="indefinite" restart="never" nodeType="tmRoot">
+          <p:childTnLst>
+            <p:seq concurrent="1" nextAc="seek">
+              <p:cTn id="2" dur="indefinite" nodeType="mainSeq">
+                <p:childTnLst>
+                  <p:par>
+                    <p:cTn id="3" fill="hold">
+                      <p:stCondLst>
+                        <p:cond delay="indefinite"/>
+                      </p:stCondLst>
+                      <p:childTnLst>
+                        <p:par>
+                          <p:cTn id="4" fill="hold">
+                            <p:stCondLst>
+                              <p:cond delay="0"/>
+                            </p:stCondLst>
+                            <p:childTnLst>
+                              <p:par>
+                                <p:cTn id="5" presetID="10" presetClass="entr" presetSubtype="0" fill="hold" grpId="0" nodeType="clickEffect">
+                                  <p:stCondLst>
+                                    <p:cond delay="0"/>
+                                  </p:stCondLst>
+                                  <p:childTnLst>
+                                    <p:set>
+                                      <p:cBhvr>
+                                        <p:cTn id="6" dur="1" fill="hold">
+                                          <p:stCondLst>
+                                            <p:cond delay="0"/>
+                                          </p:stCondLst>
+                                        </p:cTn>
+                                        <p:tgtEl>
+                                          <p:spTgt spid="12"/>
+                                        </p:tgtEl>
+                                        <p:attrNameLst>
+                                          <p:attrName>style.visibility</p:attrName>
+                                        </p:attrNameLst>
+                                      </p:cBhvr>
+                                      <p:to>
+                                        <p:strVal val="visible"/>
+                                      </p:to>
+                                    </p:set>
+                                    <p:animEffect transition="in" filter="fade">
+                                      <p:cBhvr>
+                                        <p:cTn id="7" dur="500"/>
+                                        <p:tgtEl>
+                                          <p:spTgt spid="12"/>
+                                        </p:tgtEl>
+                                      </p:cBhvr>
+                                    </p:animEffect>
+                                  </p:childTnLst>
+                                </p:cTn>
+                              </p:par>
+                              <p:par>
+                                <p:cTn id="8" presetID="10" presetClass="entr" presetSubtype="0" fill="hold" grpId="0" nodeType="withEffect">
+                                  <p:stCondLst>
+                                    <p:cond delay="0"/>
+                                  </p:stCondLst>
+                                  <p:childTnLst>
+                                    <p:set>
+                                      <p:cBhvr>
+                                        <p:cTn id="9" dur="1" fill="hold">
+                                          <p:stCondLst>
+                                            <p:cond delay="0"/>
+                                          </p:stCondLst>
+                                        </p:cTn>
+                                        <p:tgtEl>
+                                          <p:spTgt spid="13"/>
+                                        </p:tgtEl>
+                                        <p:attrNameLst>
+                                          <p:attrName>style.visibility</p:attrName>
+                                        </p:attrNameLst>
+                                      </p:cBhvr>
+                                      <p:to>
+                                        <p:strVal val="visible"/>
+                                      </p:to>
+                                    </p:set>
+                                    <p:animEffect transition="in" filter="fade">
+                                      <p:cBhvr>
+                                        <p:cTn id="10" dur="500"/>
+                                        <p:tgtEl>
+                                          <p:spTgt spid="13"/>
+                                        </p:tgtEl>
+                                      </p:cBhvr>
+                                    </p:animEffect>
+                                  </p:childTnLst>
+                                </p:cTn>
+                              </p:par>
+                            </p:childTnLst>
+                          </p:cTn>
+                        </p:par>
+                      </p:childTnLst>
+                    </p:cTn>
+                  </p:par>
+                  <p:par>
+                    <p:cTn id="11" fill="hold">
+                      <p:stCondLst>
+                        <p:cond delay="indefinite"/>
+                      </p:stCondLst>
+                      <p:childTnLst>
+                        <p:par>
+                          <p:cTn id="12" fill="hold">
+                            <p:stCondLst>
+                              <p:cond delay="0"/>
+                            </p:stCondLst>
+                            <p:childTnLst>
+                              <p:par>
+                                <p:cTn id="13" presetID="10" presetClass="entr" presetSubtype="0" fill="hold" grpId="0" nodeType="clickEffect">
+                                  <p:stCondLst>
+                                    <p:cond delay="0"/>
+                                  </p:stCondLst>
+                                  <p:childTnLst>
+                                    <p:set>
+                                      <p:cBhvr>
+                                        <p:cTn id="14" dur="1" fill="hold">
+                                          <p:stCondLst>
+                                            <p:cond delay="0"/>
+                                          </p:stCondLst>
+                                        </p:cTn>
+                                        <p:tgtEl>
+                                          <p:spTgt spid="14"/>
+                                        </p:tgtEl>
+                                        <p:attrNameLst>
+                                          <p:attrName>style.visibility</p:attrName>
+                                        </p:attrNameLst>
+                                      </p:cBhvr>
+                                      <p:to>
+                                        <p:strVal val="visible"/>
+                                      </p:to>
+                                    </p:set>
+                                    <p:animEffect transition="in" filter="fade">
+                                      <p:cBhvr>
+                                        <p:cTn id="15" dur="500"/>
+                                        <p:tgtEl>
+                                          <p:spTgt spid="14"/>
+                                        </p:tgtEl>
+                                      </p:cBhvr>
+                                    </p:animEffect>
+                                  </p:childTnLst>
+                                </p:cTn>
+                              </p:par>
+                              <p:par>
+                                <p:cTn id="16" presetID="10" presetClass="entr" presetSubtype="0" fill="hold" grpId="0" nodeType="withEffect">
+                                  <p:stCondLst>
+                                    <p:cond delay="0"/>
+                                  </p:stCondLst>
+                                  <p:childTnLst>
+                                    <p:set>
+                                      <p:cBhvr>
+                                        <p:cTn id="17" dur="1" fill="hold">
+                                          <p:stCondLst>
+                                            <p:cond delay="0"/>
+                                          </p:stCondLst>
+                                        </p:cTn>
+                                        <p:tgtEl>
+                                          <p:spTgt spid="15"/>
+                                        </p:tgtEl>
+                                        <p:attrNameLst>
+                                          <p:attrName>style.visibility</p:attrName>
+                                        </p:attrNameLst>
+                                      </p:cBhvr>
+                                      <p:to>
+                                        <p:strVal val="visible"/>
+                                      </p:to>
+                                    </p:set>
+                                    <p:animEffect transition="in" filter="fade">
+                                      <p:cBhvr>
+                                        <p:cTn id="18" dur="500"/>
+                                        <p:tgtEl>
+                                          <p:spTgt spid="15"/>
+                                        </p:tgtEl>
+                                      </p:cBhvr>
+                                    </p:animEffect>
+                                  </p:childTnLst>
+                                </p:cTn>
+                              </p:par>
+                            </p:childTnLst>
+                          </p:cTn>
+                        </p:par>
+                      </p:childTnLst>
+                    </p:cTn>
+                  </p:par>
+                </p:childTnLst>
+              </p:cTn>
+              <p:prevCondLst>
+                <p:cond evt="onPrev" delay="0">
+                  <p:tgtEl>
+                    <p:sldTgt/>
+                  </p:tgtEl>
+                </p:cond>
+              </p:prevCondLst>
+              <p:nextCondLst>
+                <p:cond evt="onNext" delay="0">
+                  <p:tgtEl>
+                    <p:sldTgt/>
+                  </p:tgtEl>
+                </p:cond>
+              </p:nextCondLst>
+            </p:seq>
+          </p:childTnLst>
+        </p:cTn>
+      </p:par>
+    </p:tnLst>
+    <p:bldLst>
+      <p:bldP spid="12" grpId="0" animBg="1"/>
+      <p:bldP spid="13" grpId="0" animBg="1"/>
+      <p:bldP spid="14" grpId="0" animBg="1"/>
+      <p:bldP spid="15" grpId="0" animBg="1"/>
+    </p:bldLst>
+  </p:timing>
+</p:sld>
+</file>
+
+<file path=ppt/slides/slide22.xml><?xml version="1.0" encoding="utf-8"?>
+<p:sld xmlns:a="http://schemas.openxmlformats.org/drawingml/2006/main" xmlns:r="http://schemas.openxmlformats.org/officeDocument/2006/relationships" xmlns:p="http://schemas.openxmlformats.org/presentationml/2006/main">
+  <p:cSld name="Slide 22">
+    <p:spTree>
+      <p:nvGrpSpPr>
+        <p:cNvPr id="1" name=""/>
+        <p:cNvGrpSpPr/>
+        <p:nvPr/>
+      </p:nvGrpSpPr>
+      <p:grpSpPr>
+        <a:xfrm>
+          <a:off x="0" y="0"/>
+          <a:ext cx="0" cy="0"/>
+          <a:chOff x="0" y="0"/>
+          <a:chExt cx="0" cy="0"/>
+        </a:xfrm>
+      </p:grpSpPr>
+      <p:sp>
+        <p:nvSpPr>
+          <p:cNvPr id="2" name="eyebrow"/>
+          <p:cNvSpPr txBox="1"/>
+          <p:nvPr/>
+        </p:nvSpPr>
+        <p:spPr>
+          <a:xfrm>
+            <a:off x="731520" y="411480"/>
+            <a:ext cx="8229600" cy="274320"/>
+          </a:xfrm>
+          <a:prstGeom prst="rect">
+            <a:avLst/>
+          </a:prstGeom>
+          <a:noFill/>
+          <a:ln/>
+        </p:spPr>
+        <p:txBody>
+          <a:bodyPr wrap="square" lIns="0" tIns="0" rIns="0" bIns="0" rtlCol="0" anchor="ctr"/>
+          <a:lstStyle/>
+          <a:p>
+            <a:pPr indent="0" marL="0">
+              <a:buNone/>
+            </a:pPr>
+            <a:r>
+              <a:rPr lang="en-US" sz="1200" b="1" dirty="0">
+                <a:solidFill>
+                  <a:srgbClr val="FF6B35"/>
+                </a:solidFill>
+                <a:latin typeface="Calibri" pitchFamily="34" charset="0"/>
+                <a:ea typeface="Calibri" pitchFamily="34" charset="-122"/>
+                <a:cs typeface="Calibri" pitchFamily="34" charset="-120"/>
+              </a:rPr>
+              <a:t>PRACTICE QUESTION 4</a:t>
+            </a:r>
+            <a:endParaRPr lang="en-US" sz="1200" dirty="0"/>
+          </a:p>
+        </p:txBody>
+      </p:sp>
+      <p:sp>
+        <p:nvSpPr>
+          <p:cNvPr id="3" name="Text 0"/>
+          <p:cNvSpPr/>
+          <p:nvPr>
+            <p:ph idx="100" type="title" hasCustomPrompt="1"/>
+          </p:nvPr>
+        </p:nvSpPr>
+        <p:spPr>
+          <a:xfrm>
+            <a:off x="731520" y="713232"/>
+            <a:ext cx="10789920" cy="685800"/>
+          </a:xfrm>
+          <a:prstGeom prst="rect">
+            <a:avLst/>
+          </a:prstGeom>
+          <a:noFill/>
+          <a:ln/>
+        </p:spPr>
+        <p:txBody>
+          <a:bodyPr wrap="square" lIns="0" tIns="0" rIns="0" bIns="0" rtlCol="0" anchor="ctr"/>
+          <a:lstStyle/>
+          <a:p>
+            <a:pPr algn="l" indent="0" marL="0">
+              <a:buNone/>
+            </a:pPr>
+            <a:r>
+              <a:rPr lang="en-US" sz="3000" b="1" dirty="0">
+                <a:solidFill>
+                  <a:srgbClr val="1F2333"/>
+                </a:solidFill>
+                <a:latin typeface="Arial" pitchFamily="34" charset="0"/>
+                <a:ea typeface="Arial" pitchFamily="34" charset="-122"/>
+                <a:cs typeface="Arial" pitchFamily="34" charset="-120"/>
+              </a:rPr>
+              <a:t>Worked example: Equal Pair Sums – Edugator 4.7</a:t>
+            </a:r>
+            <a:endParaRPr lang="en-US" sz="3000" dirty="0"/>
+          </a:p>
+        </p:txBody>
+      </p:sp>
+      <p:sp>
+        <p:nvSpPr>
+          <p:cNvPr id="4" name="card"/>
+          <p:cNvSpPr/>
+          <p:nvPr/>
+        </p:nvSpPr>
+        <p:spPr>
+          <a:xfrm>
+            <a:off x="731520" y="1572768"/>
+            <a:ext cx="5367528" cy="3794760"/>
+          </a:xfrm>
+          <a:prstGeom prst="roundRect">
+            <a:avLst>
+              <a:gd name="adj" fmla="val 1446"/>
+            </a:avLst>
+          </a:prstGeom>
+          <a:solidFill>
+            <a:srgbClr val="FFFFFF"/>
+          </a:solidFill>
+          <a:ln w="9525">
+            <a:solidFill>
+              <a:srgbClr val="DDE1EC"/>
+            </a:solidFill>
+            <a:prstDash val="solid"/>
+          </a:ln>
+        </p:spPr>
+      </p:sp>
+      <p:sp>
+        <p:nvSpPr>
+          <p:cNvPr id="5" name="Text 3"/>
+          <p:cNvSpPr txBox="1"/>
+          <p:nvPr/>
+        </p:nvSpPr>
+        <p:spPr>
+          <a:xfrm>
+            <a:off x="1005840" y="1783080"/>
+            <a:ext cx="4818888" cy="301752"/>
+          </a:xfrm>
+          <a:prstGeom prst="rect">
+            <a:avLst/>
+          </a:prstGeom>
+          <a:noFill/>
+          <a:ln/>
+        </p:spPr>
+        <p:txBody>
+          <a:bodyPr wrap="square" lIns="0" tIns="0" rIns="0" bIns="0" rtlCol="0" anchor="ctr"/>
+          <a:lstStyle/>
+          <a:p>
+            <a:pPr indent="0" marL="0">
+              <a:buNone/>
+            </a:pPr>
+            <a:r>
+              <a:rPr lang="en-US" sz="1700" b="1" dirty="0">
+                <a:solidFill>
+                  <a:srgbClr val="1F2333"/>
+                </a:solidFill>
+                <a:latin typeface="Arial" pitchFamily="34" charset="0"/>
+                <a:ea typeface="Arial" pitchFamily="34" charset="-122"/>
+                <a:cs typeface="Arial" pitchFamily="34" charset="-120"/>
+              </a:rPr>
+              <a:t>The problem</a:t>
+            </a:r>
+            <a:endParaRPr lang="en-US" sz="1700" dirty="0"/>
+          </a:p>
+        </p:txBody>
+      </p:sp>
+      <p:sp>
+        <p:nvSpPr>
+          <p:cNvPr id="6" name="Text 4"/>
+          <p:cNvSpPr txBox="1"/>
+          <p:nvPr/>
+        </p:nvSpPr>
+        <p:spPr>
+          <a:xfrm>
+            <a:off x="1005840" y="2121408"/>
+            <a:ext cx="4818888" cy="749808"/>
+          </a:xfrm>
+          <a:prstGeom prst="rect">
+            <a:avLst/>
+          </a:prstGeom>
+          <a:noFill/>
+          <a:ln/>
+        </p:spPr>
+        <p:txBody>
+          <a:bodyPr wrap="square" lIns="0" tIns="0" rIns="0" bIns="0" rtlCol="0" anchor="t"/>
+          <a:lstStyle/>
+          <a:p>
+            <a:pPr indent="0" marL="0">
+              <a:buNone/>
+            </a:pPr>
+            <a:r>
+              <a:rPr lang="en-US" sz="1350" dirty="0">
+                <a:solidFill>
+                  <a:srgbClr val="5A6072"/>
+                </a:solidFill>
+                <a:latin typeface="Calibri" pitchFamily="34" charset="0"/>
+                <a:ea typeface="Calibri" pitchFamily="34" charset="-122"/>
+                <a:cs typeface="Calibri" pitchFamily="34" charset="-120"/>
+              </a:rPr>
+              <a:t>Given nums, return True if two different index pairs (i, j) and (k, l) have the same sum, where i, j, k, and l are all different.</a:t>
+            </a:r>
+            <a:endParaRPr lang="en-US" sz="1350" dirty="0"/>
+          </a:p>
+        </p:txBody>
+      </p:sp>
+      <p:sp>
+        <p:nvSpPr>
+          <p:cNvPr id="7" name="Text 5"/>
+          <p:cNvSpPr txBox="1"/>
+          <p:nvPr/>
+        </p:nvSpPr>
+        <p:spPr>
+          <a:xfrm>
+            <a:off x="1005840" y="2907792"/>
+            <a:ext cx="4818888" cy="274320"/>
+          </a:xfrm>
+          <a:prstGeom prst="rect">
+            <a:avLst/>
+          </a:prstGeom>
+          <a:noFill/>
+          <a:ln/>
+        </p:spPr>
+        <p:txBody>
+          <a:bodyPr wrap="square" lIns="0" tIns="0" rIns="0" bIns="0" rtlCol="0" anchor="ctr"/>
+          <a:lstStyle/>
+          <a:p>
+            <a:pPr indent="0" marL="0">
+              <a:buNone/>
+            </a:pPr>
+            <a:r>
+              <a:rPr lang="en-US" sz="1250" dirty="0">
+                <a:solidFill>
+                  <a:srgbClr val="1F2333"/>
+                </a:solidFill>
+                <a:latin typeface="Courier New" pitchFamily="34" charset="0"/>
+                <a:ea typeface="Courier New" pitchFamily="34" charset="-122"/>
+                <a:cs typeface="Courier New" pitchFamily="34" charset="-120"/>
+              </a:rPr>
+              <a:t>[1, 2, 3, 4, 5]  returns  True</a:t>
+            </a:r>
+            <a:endParaRPr lang="en-US" sz="1250" dirty="0"/>
+          </a:p>
+        </p:txBody>
+      </p:sp>
+      <p:sp>
+        <p:nvSpPr>
+          <p:cNvPr id="8" name="Text 6"/>
+          <p:cNvSpPr txBox="1"/>
+          <p:nvPr/>
+        </p:nvSpPr>
+        <p:spPr>
+          <a:xfrm>
+            <a:off x="1005840" y="3200400"/>
+            <a:ext cx="4818888" cy="274320"/>
+          </a:xfrm>
+          <a:prstGeom prst="rect">
+            <a:avLst/>
+          </a:prstGeom>
+          <a:noFill/>
+          <a:ln/>
+        </p:spPr>
+        <p:txBody>
+          <a:bodyPr wrap="square" lIns="0" tIns="0" rIns="0" bIns="0" rtlCol="0" anchor="ctr"/>
+          <a:lstStyle/>
+          <a:p>
+            <a:pPr indent="0" marL="0">
+              <a:buNone/>
+            </a:pPr>
+            <a:r>
+              <a:rPr lang="en-US" sz="1250" dirty="0">
+                <a:solidFill>
+                  <a:srgbClr val="1F2333"/>
+                </a:solidFill>
+                <a:latin typeface="Courier New" pitchFamily="34" charset="0"/>
+                <a:ea typeface="Courier New" pitchFamily="34" charset="-122"/>
+                <a:cs typeface="Courier New" pitchFamily="34" charset="-120"/>
+              </a:rPr>
+              <a:t>[1, 2, 3, 6]  returns  False</a:t>
+            </a:r>
+            <a:endParaRPr lang="en-US" sz="1250" dirty="0"/>
+          </a:p>
+        </p:txBody>
+      </p:sp>
+      <p:sp>
+        <p:nvSpPr>
+          <p:cNvPr id="9" name="Shape 7"/>
+          <p:cNvSpPr/>
+          <p:nvPr/>
+        </p:nvSpPr>
+        <p:spPr>
+          <a:xfrm>
+            <a:off x="1005840" y="3611880"/>
+            <a:ext cx="4818888" cy="914400"/>
+          </a:xfrm>
+          <a:prstGeom prst="roundRect">
+            <a:avLst>
+              <a:gd name="adj" fmla="val 5000"/>
+            </a:avLst>
+          </a:prstGeom>
+          <a:solidFill>
+            <a:srgbClr val="FFF1EB"/>
+          </a:solidFill>
+          <a:ln w="9525">
+            <a:solidFill>
+              <a:srgbClr val="FFD5C4"/>
+            </a:solidFill>
+            <a:prstDash val="solid"/>
+          </a:ln>
+        </p:spPr>
+      </p:sp>
+      <p:sp>
+        <p:nvSpPr>
+          <p:cNvPr id="10" name="Text 8"/>
+          <p:cNvSpPr txBox="1"/>
+          <p:nvPr/>
+        </p:nvSpPr>
+        <p:spPr>
+          <a:xfrm>
+            <a:off x="1188720" y="3611880"/>
+            <a:ext cx="4453128" cy="914400"/>
+          </a:xfrm>
+          <a:prstGeom prst="rect">
+            <a:avLst/>
+          </a:prstGeom>
+          <a:noFill/>
+          <a:ln/>
+        </p:spPr>
+        <p:txBody>
+          <a:bodyPr wrap="square" lIns="0" tIns="0" rIns="0" bIns="0" rtlCol="0" anchor="ctr"/>
+          <a:lstStyle/>
+          <a:p>
+            <a:pPr indent="0" marL="0">
+              <a:buNone/>
+            </a:pPr>
+            <a:r>
+              <a:rPr lang="en-US" sz="1250" b="1" dirty="0">
+                <a:solidFill>
+                  <a:srgbClr val="B3441F"/>
+                </a:solidFill>
+                <a:latin typeface="Calibri" pitchFamily="34" charset="0"/>
+                <a:ea typeface="Calibri" pitchFamily="34" charset="-122"/>
+                <a:cs typeface="Calibri" pitchFamily="34" charset="-120"/>
+              </a:rPr>
+              <a:t>Explanation: </a:t>
+            </a:r>
+            <a:pPr indent="0" marL="0">
+              <a:buNone/>
+            </a:pPr>
+            <a:r>
+              <a:rPr lang="en-US" sz="1250" dirty="0">
+                <a:solidFill>
+                  <a:srgbClr val="B3441F"/>
+                </a:solidFill>
+                <a:latin typeface="Calibri" pitchFamily="34" charset="0"/>
+                <a:ea typeface="Calibri" pitchFamily="34" charset="-122"/>
+                <a:cs typeface="Calibri" pitchFamily="34" charset="-120"/>
+              </a:rPr>
+              <a:t>(0, 4) and (1, 3) both sum to 6. In [1, 2, 3, 6] no two pairs match, and [1, 2, 3] has too few indices.</a:t>
+            </a:r>
+            <a:endParaRPr lang="en-US" sz="1250" dirty="0"/>
+          </a:p>
+        </p:txBody>
+      </p:sp>
+      <p:sp>
+        <p:nvSpPr>
+          <p:cNvPr id="11" name="Text 9"/>
+          <p:cNvSpPr txBox="1"/>
+          <p:nvPr/>
+        </p:nvSpPr>
+        <p:spPr>
+          <a:xfrm>
+            <a:off x="1005840" y="4681728"/>
+            <a:ext cx="4818888" cy="502920"/>
+          </a:xfrm>
+          <a:prstGeom prst="rect">
+            <a:avLst/>
+          </a:prstGeom>
+          <a:noFill/>
+          <a:ln/>
+        </p:spPr>
+        <p:txBody>
+          <a:bodyPr wrap="square" lIns="0" tIns="0" rIns="0" bIns="0" rtlCol="0" anchor="t"/>
+          <a:lstStyle/>
+          <a:p>
+            <a:pPr indent="0" marL="0">
+              <a:buNone/>
+            </a:pPr>
+            <a:r>
+              <a:rPr lang="en-US" sz="1200" i="1" dirty="0">
+                <a:solidFill>
+                  <a:srgbClr val="5A6072"/>
+                </a:solidFill>
+                <a:latin typeface="Calibri" pitchFamily="34" charset="0"/>
+                <a:ea typeface="Calibri" pitchFamily="34" charset="-122"/>
+                <a:cs typeface="Calibri" pitchFamily="34" charset="-120"/>
+              </a:rPr>
+              <a:t>On Edugator: Equal Sums of Distinct Index Pairs. At most 20 numbers, each between -10³ and 10³.</a:t>
+            </a:r>
+            <a:endParaRPr lang="en-US" sz="1200" dirty="0"/>
+          </a:p>
+        </p:txBody>
+      </p:sp>
+      <p:sp>
+        <p:nvSpPr>
+          <p:cNvPr id="12" name="anim01_click_code"/>
+          <p:cNvSpPr/>
+          <p:nvPr/>
+        </p:nvSpPr>
+        <p:spPr>
+          <a:xfrm>
+            <a:off x="6217920" y="1572768"/>
+            <a:ext cx="5239512" cy="3272790"/>
+          </a:xfrm>
+          <a:prstGeom prst="roundRect">
+            <a:avLst>
+              <a:gd name="adj" fmla="val 1676"/>
+            </a:avLst>
+          </a:prstGeom>
+          <a:solidFill>
+            <a:srgbClr val="1B1E33"/>
+          </a:solidFill>
+          <a:ln w="9525">
+            <a:solidFill>
+              <a:srgbClr val="1B1E33"/>
+            </a:solidFill>
+            <a:prstDash val="solid"/>
+          </a:ln>
+        </p:spPr>
+      </p:sp>
+      <p:sp>
+        <p:nvSpPr>
+          <p:cNvPr id="13" name="anim01_click_code"/>
+          <p:cNvSpPr txBox="1"/>
+          <p:nvPr/>
+        </p:nvSpPr>
+        <p:spPr>
+          <a:xfrm>
+            <a:off x="6419088" y="1664208"/>
+            <a:ext cx="4837176" cy="219456"/>
+          </a:xfrm>
+          <a:prstGeom prst="rect">
+            <a:avLst/>
+          </a:prstGeom>
+          <a:noFill/>
+          <a:ln/>
+        </p:spPr>
+        <p:txBody>
+          <a:bodyPr wrap="square" lIns="0" tIns="0" rIns="0" bIns="0" rtlCol="0" anchor="t"/>
+          <a:lstStyle/>
+          <a:p>
+            <a:pPr indent="0" marL="0">
+              <a:buNone/>
+            </a:pPr>
+            <a:r>
+              <a:rPr lang="en-US" sz="1000" b="1" dirty="0">
+                <a:solidFill>
+                  <a:srgbClr val="FF6B35"/>
+                </a:solidFill>
+                <a:latin typeface="Calibri" pitchFamily="34" charset="0"/>
+                <a:ea typeface="Calibri" pitchFamily="34" charset="-122"/>
+                <a:cs typeface="Calibri" pitchFamily="34" charset="-120"/>
+              </a:rPr>
+              <a:t>PYTHON</a:t>
+            </a:r>
+            <a:endParaRPr lang="en-US" sz="1000" dirty="0"/>
+          </a:p>
+        </p:txBody>
+      </p:sp>
+      <p:sp>
+        <p:nvSpPr>
+          <p:cNvPr id="14" name="anim01_click_code"/>
+          <p:cNvSpPr txBox="1"/>
+          <p:nvPr/>
+        </p:nvSpPr>
+        <p:spPr>
+          <a:xfrm>
+            <a:off x="6419088" y="1920240"/>
+            <a:ext cx="4837176" cy="2797302"/>
+          </a:xfrm>
+          <a:prstGeom prst="rect">
+            <a:avLst/>
+          </a:prstGeom>
+          <a:noFill/>
+          <a:ln/>
+        </p:spPr>
+        <p:txBody>
+          <a:bodyPr wrap="square" lIns="0" tIns="0" rIns="0" bIns="0" rtlCol="0" anchor="t"/>
+          <a:lstStyle/>
+          <a:p>
+            <a:pPr indent="0" marL="0">
+              <a:lnSpc>
+                <a:spcPct val="130000"/>
+              </a:lnSpc>
+              <a:buNone/>
+            </a:pPr>
+            <a:r>
+              <a:rPr lang="en-US" sz="1250" dirty="0">
+                <a:solidFill>
+                  <a:srgbClr val="E8EAF6"/>
+                </a:solidFill>
+                <a:latin typeface="Courier New" pitchFamily="34" charset="0"/>
+                <a:ea typeface="Courier New" pitchFamily="34" charset="-122"/>
+                <a:cs typeface="Courier New" pitchFamily="34" charset="-120"/>
+              </a:rPr>
+              <a:t>def equal_pair_sums(nums):</a:t>
+            </a:r>
+            <a:endParaRPr lang="en-US" sz="1250" dirty="0"/>
+          </a:p>
+          <a:p>
+            <a:pPr indent="0" marL="0">
+              <a:lnSpc>
+                <a:spcPct val="130000"/>
+              </a:lnSpc>
+              <a:buNone/>
+            </a:pPr>
+            <a:r>
+              <a:rPr lang="en-US" sz="1250" dirty="0">
+                <a:solidFill>
+                  <a:srgbClr val="E8EAF6"/>
+                </a:solidFill>
+                <a:latin typeface="Courier New" pitchFamily="34" charset="0"/>
+                <a:ea typeface="Courier New" pitchFamily="34" charset="-122"/>
+                <a:cs typeface="Courier New" pitchFamily="34" charset="-120"/>
+              </a:rPr>
+              <a:t>    sums = {}    # pair sum -&gt; index pairs</a:t>
+            </a:r>
+            <a:endParaRPr lang="en-US" sz="1250" dirty="0"/>
+          </a:p>
+          <a:p>
+            <a:pPr indent="0" marL="0">
+              <a:lnSpc>
+                <a:spcPct val="130000"/>
+              </a:lnSpc>
+              <a:buNone/>
+            </a:pPr>
+            <a:r>
+              <a:rPr lang="en-US" sz="1250" dirty="0">
+                <a:solidFill>
+                  <a:srgbClr val="E8EAF6"/>
+                </a:solidFill>
+                <a:latin typeface="Courier New" pitchFamily="34" charset="0"/>
+                <a:ea typeface="Courier New" pitchFamily="34" charset="-122"/>
+                <a:cs typeface="Courier New" pitchFamily="34" charset="-120"/>
+              </a:rPr>
+              <a:t>    for i in range(len(nums)):</a:t>
+            </a:r>
+            <a:endParaRPr lang="en-US" sz="1250" dirty="0"/>
+          </a:p>
+          <a:p>
+            <a:pPr indent="0" marL="0">
+              <a:lnSpc>
+                <a:spcPct val="130000"/>
+              </a:lnSpc>
+              <a:buNone/>
+            </a:pPr>
+            <a:r>
+              <a:rPr lang="en-US" sz="1250" dirty="0">
+                <a:solidFill>
+                  <a:srgbClr val="E8EAF6"/>
+                </a:solidFill>
+                <a:latin typeface="Courier New" pitchFamily="34" charset="0"/>
+                <a:ea typeface="Courier New" pitchFamily="34" charset="-122"/>
+                <a:cs typeface="Courier New" pitchFamily="34" charset="-120"/>
+              </a:rPr>
+              <a:t>        for j in range(i + 1, len(nums)):</a:t>
+            </a:r>
+            <a:endParaRPr lang="en-US" sz="1250" dirty="0"/>
+          </a:p>
+          <a:p>
+            <a:pPr indent="0" marL="0">
+              <a:lnSpc>
+                <a:spcPct val="130000"/>
+              </a:lnSpc>
+              <a:buNone/>
+            </a:pPr>
+            <a:r>
+              <a:rPr lang="en-US" sz="1250" dirty="0">
+                <a:solidFill>
+                  <a:srgbClr val="E8EAF6"/>
+                </a:solidFill>
+                <a:latin typeface="Courier New" pitchFamily="34" charset="0"/>
+                <a:ea typeface="Courier New" pitchFamily="34" charset="-122"/>
+                <a:cs typeface="Courier New" pitchFamily="34" charset="-120"/>
+              </a:rPr>
+              <a:t>            total = nums[i] + nums[j]</a:t>
+            </a:r>
+            <a:endParaRPr lang="en-US" sz="1250" dirty="0"/>
+          </a:p>
+          <a:p>
+            <a:pPr indent="0" marL="0">
+              <a:lnSpc>
+                <a:spcPct val="130000"/>
+              </a:lnSpc>
+              <a:buNone/>
+            </a:pPr>
+            <a:r>
+              <a:rPr lang="en-US" sz="1250" dirty="0">
+                <a:solidFill>
+                  <a:srgbClr val="E8EAF6"/>
+                </a:solidFill>
+                <a:latin typeface="Courier New" pitchFamily="34" charset="0"/>
+                <a:ea typeface="Courier New" pitchFamily="34" charset="-122"/>
+                <a:cs typeface="Courier New" pitchFamily="34" charset="-120"/>
+              </a:rPr>
+              <a:t>            pairs = sums.setdefault(total, [])</a:t>
+            </a:r>
+            <a:endParaRPr lang="en-US" sz="1250" dirty="0"/>
+          </a:p>
+          <a:p>
+            <a:pPr indent="0" marL="0">
+              <a:lnSpc>
+                <a:spcPct val="130000"/>
+              </a:lnSpc>
+              <a:buNone/>
+            </a:pPr>
+            <a:r>
+              <a:rPr lang="en-US" sz="1250" dirty="0">
+                <a:solidFill>
+                  <a:srgbClr val="E8EAF6"/>
+                </a:solidFill>
+                <a:latin typeface="Courier New" pitchFamily="34" charset="0"/>
+                <a:ea typeface="Courier New" pitchFamily="34" charset="-122"/>
+                <a:cs typeface="Courier New" pitchFamily="34" charset="-120"/>
+              </a:rPr>
+              <a:t>            for k, l in pairs:</a:t>
+            </a:r>
+            <a:endParaRPr lang="en-US" sz="1250" dirty="0"/>
+          </a:p>
+          <a:p>
+            <a:pPr indent="0" marL="0">
+              <a:lnSpc>
+                <a:spcPct val="130000"/>
+              </a:lnSpc>
+              <a:buNone/>
+            </a:pPr>
+            <a:r>
+              <a:rPr lang="en-US" sz="1250" dirty="0">
+                <a:solidFill>
+                  <a:srgbClr val="E8EAF6"/>
+                </a:solidFill>
+                <a:latin typeface="Courier New" pitchFamily="34" charset="0"/>
+                <a:ea typeface="Courier New" pitchFamily="34" charset="-122"/>
+                <a:cs typeface="Courier New" pitchFamily="34" charset="-120"/>
+              </a:rPr>
+              <a:t>                if len({i, j, k, l}) == 4:</a:t>
+            </a:r>
+            <a:endParaRPr lang="en-US" sz="1250" dirty="0"/>
+          </a:p>
+          <a:p>
+            <a:pPr indent="0" marL="0">
+              <a:lnSpc>
+                <a:spcPct val="130000"/>
+              </a:lnSpc>
+              <a:buNone/>
+            </a:pPr>
+            <a:r>
+              <a:rPr lang="en-US" sz="1250" dirty="0">
+                <a:solidFill>
+                  <a:srgbClr val="E8EAF6"/>
+                </a:solidFill>
+                <a:latin typeface="Courier New" pitchFamily="34" charset="0"/>
+                <a:ea typeface="Courier New" pitchFamily="34" charset="-122"/>
+                <a:cs typeface="Courier New" pitchFamily="34" charset="-120"/>
+              </a:rPr>
+              <a:t>                    return True</a:t>
+            </a:r>
+            <a:endParaRPr lang="en-US" sz="1250" dirty="0"/>
+          </a:p>
+          <a:p>
+            <a:pPr indent="0" marL="0">
+              <a:lnSpc>
+                <a:spcPct val="130000"/>
+              </a:lnSpc>
+              <a:buNone/>
+            </a:pPr>
+            <a:r>
+              <a:rPr lang="en-US" sz="1250" dirty="0">
+                <a:solidFill>
+                  <a:srgbClr val="E8EAF6"/>
+                </a:solidFill>
+                <a:latin typeface="Courier New" pitchFamily="34" charset="0"/>
+                <a:ea typeface="Courier New" pitchFamily="34" charset="-122"/>
+                <a:cs typeface="Courier New" pitchFamily="34" charset="-120"/>
+              </a:rPr>
+              <a:t>            pairs.append((i, j))</a:t>
+            </a:r>
+            <a:endParaRPr lang="en-US" sz="1250" dirty="0"/>
+          </a:p>
+          <a:p>
+            <a:pPr indent="0" marL="0">
+              <a:lnSpc>
+                <a:spcPct val="130000"/>
+              </a:lnSpc>
+              <a:buNone/>
+            </a:pPr>
+            <a:r>
+              <a:rPr lang="en-US" sz="1250" dirty="0">
+                <a:solidFill>
+                  <a:srgbClr val="E8EAF6"/>
+                </a:solidFill>
+                <a:latin typeface="Courier New" pitchFamily="34" charset="0"/>
+                <a:ea typeface="Courier New" pitchFamily="34" charset="-122"/>
+                <a:cs typeface="Courier New" pitchFamily="34" charset="-120"/>
+              </a:rPr>
+              <a:t>    return False</a:t>
+            </a:r>
+            <a:endParaRPr lang="en-US" sz="1250" dirty="0"/>
+          </a:p>
+        </p:txBody>
+      </p:sp>
+      <p:sp>
+        <p:nvSpPr>
+          <p:cNvPr id="15" name="anim02_click_cx"/>
+          <p:cNvSpPr/>
+          <p:nvPr/>
+        </p:nvSpPr>
+        <p:spPr>
+          <a:xfrm>
+            <a:off x="6217920" y="4964430"/>
+            <a:ext cx="5239512" cy="685800"/>
+          </a:xfrm>
+          <a:prstGeom prst="roundRect">
+            <a:avLst>
+              <a:gd name="adj" fmla="val 8000"/>
+            </a:avLst>
+          </a:prstGeom>
+          <a:solidFill>
+            <a:srgbClr val="FFFFFF"/>
+          </a:solidFill>
+          <a:ln w="9525">
+            <a:solidFill>
+              <a:srgbClr val="DDE1EC"/>
+            </a:solidFill>
+            <a:prstDash val="solid"/>
+          </a:ln>
+        </p:spPr>
+      </p:sp>
+      <p:sp>
+        <p:nvSpPr>
+          <p:cNvPr id="16" name="anim02_click_cx"/>
+          <p:cNvSpPr txBox="1"/>
+          <p:nvPr/>
+        </p:nvSpPr>
+        <p:spPr>
+          <a:xfrm>
+            <a:off x="6492240" y="4964430"/>
+            <a:ext cx="4690872" cy="685800"/>
+          </a:xfrm>
+          <a:prstGeom prst="rect">
+            <a:avLst/>
+          </a:prstGeom>
+          <a:noFill/>
+          <a:ln/>
+        </p:spPr>
+        <p:txBody>
+          <a:bodyPr wrap="square" lIns="0" tIns="0" rIns="0" bIns="0" rtlCol="0" anchor="ctr"/>
+          <a:lstStyle/>
+          <a:p>
+            <a:pPr indent="0" marL="0">
+              <a:lnSpc>
+                <a:spcPct val="120000"/>
+              </a:lnSpc>
+              <a:buNone/>
+            </a:pPr>
+            <a:r>
+              <a:rPr lang="en-US" sz="1350" b="1" dirty="0">
+                <a:solidFill>
+                  <a:srgbClr val="2A9D8F"/>
+                </a:solidFill>
+                <a:latin typeface="Courier New" pitchFamily="34" charset="0"/>
+                <a:ea typeface="Courier New" pitchFamily="34" charset="-122"/>
+                <a:cs typeface="Courier New" pitchFamily="34" charset="-120"/>
+              </a:rPr>
+              <a:t>Time O(n³)</a:t>
+            </a:r>
+            <a:pPr indent="0" marL="0">
+              <a:lnSpc>
+                <a:spcPct val="120000"/>
+              </a:lnSpc>
+              <a:buNone/>
+            </a:pPr>
+            <a:r>
+              <a:rPr lang="en-US" sz="1150" dirty="0">
+                <a:solidFill>
+                  <a:srgbClr val="5A6072"/>
+                </a:solidFill>
+                <a:latin typeface="Calibri" pitchFamily="34" charset="0"/>
+                <a:ea typeface="Calibri" pitchFamily="34" charset="-122"/>
+                <a:cs typeface="Calibri" pitchFamily="34" charset="-120"/>
+              </a:rPr>
+              <a:t>   n² pairs, each checks the few stored with its sum</a:t>
+            </a:r>
+            <a:endParaRPr lang="en-US" sz="1150" dirty="0"/>
+          </a:p>
+          <a:p>
+            <a:pPr indent="0" marL="0">
+              <a:lnSpc>
+                <a:spcPct val="120000"/>
+              </a:lnSpc>
+              <a:buNone/>
+            </a:pPr>
+            <a:r>
+              <a:rPr lang="en-US" sz="1350" b="1" dirty="0">
+                <a:solidFill>
+                  <a:srgbClr val="2A9D8F"/>
+                </a:solidFill>
+                <a:latin typeface="Courier New" pitchFamily="34" charset="0"/>
+                <a:ea typeface="Courier New" pitchFamily="34" charset="-122"/>
+                <a:cs typeface="Courier New" pitchFamily="34" charset="-120"/>
+              </a:rPr>
+              <a:t>Space O(n²)</a:t>
+            </a:r>
+            <a:pPr indent="0" marL="0">
+              <a:lnSpc>
+                <a:spcPct val="120000"/>
+              </a:lnSpc>
+              <a:buNone/>
+            </a:pPr>
+            <a:r>
+              <a:rPr lang="en-US" sz="1150" dirty="0">
+                <a:solidFill>
+                  <a:srgbClr val="5A6072"/>
+                </a:solidFill>
+                <a:latin typeface="Calibri" pitchFamily="34" charset="0"/>
+                <a:ea typeface="Calibri" pitchFamily="34" charset="-122"/>
+                <a:cs typeface="Calibri" pitchFamily="34" charset="-120"/>
+              </a:rPr>
+              <a:t>   one entry per pair</a:t>
+            </a:r>
+            <a:endParaRPr lang="en-US" sz="1150" dirty="0"/>
+          </a:p>
+        </p:txBody>
+      </p:sp>
+      <p:sp>
+        <p:nvSpPr>
+          <p:cNvPr id="17" name="anim03_click_bottom"/>
+          <p:cNvSpPr/>
+          <p:nvPr/>
+        </p:nvSpPr>
+        <p:spPr>
+          <a:xfrm>
+            <a:off x="731520" y="5486400"/>
+            <a:ext cx="5367528" cy="621792"/>
+          </a:xfrm>
+          <a:prstGeom prst="roundRect">
+            <a:avLst>
+              <a:gd name="adj" fmla="val 8824"/>
+            </a:avLst>
+          </a:prstGeom>
+          <a:solidFill>
+            <a:srgbClr val="FFFFFF"/>
+          </a:solidFill>
+          <a:ln w="9525">
+            <a:solidFill>
+              <a:srgbClr val="DDE1EC"/>
+            </a:solidFill>
+            <a:prstDash val="solid"/>
+          </a:ln>
+        </p:spPr>
+      </p:sp>
+      <p:sp>
+        <p:nvSpPr>
+          <p:cNvPr id="18" name="anim03_click_bottom"/>
+          <p:cNvSpPr txBox="1"/>
+          <p:nvPr/>
+        </p:nvSpPr>
+        <p:spPr>
+          <a:xfrm>
+            <a:off x="1005840" y="5486400"/>
+            <a:ext cx="4818888" cy="621792"/>
+          </a:xfrm>
+          <a:prstGeom prst="rect">
+            <a:avLst/>
+          </a:prstGeom>
+          <a:noFill/>
+          <a:ln/>
+        </p:spPr>
+        <p:txBody>
+          <a:bodyPr wrap="square" lIns="0" tIns="0" rIns="0" bIns="0" rtlCol="0" anchor="ctr"/>
+          <a:lstStyle/>
+          <a:p>
+            <a:pPr indent="0" marL="0">
+              <a:buNone/>
+            </a:pPr>
+            <a:r>
+              <a:rPr lang="en-US" sz="1200" b="1" dirty="0">
+                <a:solidFill>
+                  <a:srgbClr val="1F2333"/>
+                </a:solidFill>
+                <a:latin typeface="Calibri" pitchFamily="34" charset="0"/>
+                <a:ea typeface="Calibri" pitchFamily="34" charset="-122"/>
+                <a:cs typeface="Calibri" pitchFamily="34" charset="-120"/>
+              </a:rPr>
+              <a:t>Common bug:  </a:t>
+            </a:r>
+            <a:pPr indent="0" marL="0">
+              <a:buNone/>
+            </a:pPr>
+            <a:r>
+              <a:rPr lang="en-US" sz="1200" dirty="0">
+                <a:solidFill>
+                  <a:srgbClr val="5A6072"/>
+                </a:solidFill>
+                <a:latin typeface="Calibri" pitchFamily="34" charset="0"/>
+                <a:ea typeface="Calibri" pitchFamily="34" charset="-122"/>
+                <a:cs typeface="Calibri" pitchFamily="34" charset="-120"/>
+              </a:rPr>
+              <a:t>dropping the all-different rule. Then [1, 1, 2] returns True, because (0, 2) and (1, 2) share index 2.</a:t>
+            </a:r>
+            <a:endParaRPr lang="en-US" sz="1200" dirty="0"/>
+          </a:p>
+        </p:txBody>
+      </p:sp>
+    </p:spTree>
+  </p:cSld>
+  <p:clrMapOvr>
+    <a:masterClrMapping/>
+  </p:clrMapOvr>
+  <p:transition spd="med">
+    <p:fade/>
+  </p:transition>
+  <p:timing>
+    <p:tnLst>
+      <p:par>
+        <p:cTn id="1" dur="indefinite" restart="never" nodeType="tmRoot">
+          <p:childTnLst>
+            <p:seq concurrent="1" nextAc="seek">
+              <p:cTn id="2" dur="indefinite" nodeType="mainSeq">
+                <p:childTnLst>
+                  <p:par>
+                    <p:cTn id="3" fill="hold">
+                      <p:stCondLst>
+                        <p:cond delay="indefinite"/>
+                      </p:stCondLst>
+                      <p:childTnLst>
+                        <p:par>
+                          <p:cTn id="4" fill="hold">
+                            <p:stCondLst>
+                              <p:cond delay="0"/>
+                            </p:stCondLst>
+                            <p:childTnLst>
+                              <p:par>
+                                <p:cTn id="5" presetID="10" presetClass="entr" presetSubtype="0" fill="hold" grpId="0" nodeType="clickEffect">
+                                  <p:stCondLst>
+                                    <p:cond delay="0"/>
+                                  </p:stCondLst>
+                                  <p:childTnLst>
+                                    <p:set>
+                                      <p:cBhvr>
+                                        <p:cTn id="6" dur="1" fill="hold">
+                                          <p:stCondLst>
+                                            <p:cond delay="0"/>
+                                          </p:stCondLst>
+                                        </p:cTn>
+                                        <p:tgtEl>
+                                          <p:spTgt spid="12"/>
+                                        </p:tgtEl>
+                                        <p:attrNameLst>
+                                          <p:attrName>style.visibility</p:attrName>
+                                        </p:attrNameLst>
+                                      </p:cBhvr>
+                                      <p:to>
+                                        <p:strVal val="visible"/>
+                                      </p:to>
+                                    </p:set>
+                                    <p:animEffect transition="in" filter="fade">
+                                      <p:cBhvr>
+                                        <p:cTn id="7" dur="500"/>
+                                        <p:tgtEl>
+                                          <p:spTgt spid="12"/>
+                                        </p:tgtEl>
+                                      </p:cBhvr>
+                                    </p:animEffect>
+                                  </p:childTnLst>
+                                </p:cTn>
+                              </p:par>
+                              <p:par>
+                                <p:cTn id="8" presetID="10" presetClass="entr" presetSubtype="0" fill="hold" grpId="0" nodeType="withEffect">
+                                  <p:stCondLst>
+                                    <p:cond delay="0"/>
+                                  </p:stCondLst>
+                                  <p:childTnLst>
+                                    <p:set>
+                                      <p:cBhvr>
+                                        <p:cTn id="9" dur="1" fill="hold">
+                                          <p:stCondLst>
+                                            <p:cond delay="0"/>
+                                          </p:stCondLst>
+                                        </p:cTn>
+                                        <p:tgtEl>
+                                          <p:spTgt spid="13"/>
+                                        </p:tgtEl>
+                                        <p:attrNameLst>
+                                          <p:attrName>style.visibility</p:attrName>
+                                        </p:attrNameLst>
+                                      </p:cBhvr>
+                                      <p:to>
+                                        <p:strVal val="visible"/>
+                                      </p:to>
+                                    </p:set>
+                                    <p:animEffect transition="in" filter="fade">
+                                      <p:cBhvr>
+                                        <p:cTn id="10" dur="500"/>
+                                        <p:tgtEl>
+                                          <p:spTgt spid="13"/>
+                                        </p:tgtEl>
+                                      </p:cBhvr>
+                                    </p:animEffect>
+                                  </p:childTnLst>
+                                </p:cTn>
+                              </p:par>
+                              <p:par>
+                                <p:cTn id="11" presetID="10" presetClass="entr" presetSubtype="0" fill="hold" grpId="0" nodeType="withEffect">
+                                  <p:stCondLst>
+                                    <p:cond delay="0"/>
+                                  </p:stCondLst>
+                                  <p:childTnLst>
+                                    <p:set>
+                                      <p:cBhvr>
+                                        <p:cTn id="12" dur="1" fill="hold">
+                                          <p:stCondLst>
+                                            <p:cond delay="0"/>
+                                          </p:stCondLst>
+                                        </p:cTn>
+                                        <p:tgtEl>
+                                          <p:spTgt spid="14"/>
+                                        </p:tgtEl>
+                                        <p:attrNameLst>
+                                          <p:attrName>style.visibility</p:attrName>
+                                        </p:attrNameLst>
+                                      </p:cBhvr>
+                                      <p:to>
+                                        <p:strVal val="visible"/>
+                                      </p:to>
+                                    </p:set>
+                                    <p:animEffect transition="in" filter="fade">
+                                      <p:cBhvr>
+                                        <p:cTn id="13" dur="500"/>
+                                        <p:tgtEl>
+                                          <p:spTgt spid="14"/>
+                                        </p:tgtEl>
+                                      </p:cBhvr>
+                                    </p:animEffect>
+                                  </p:childTnLst>
+                                </p:cTn>
+                              </p:par>
+                            </p:childTnLst>
+                          </p:cTn>
+                        </p:par>
+                      </p:childTnLst>
+                    </p:cTn>
+                  </p:par>
+                  <p:par>
+                    <p:cTn id="14" fill="hold">
+                      <p:stCondLst>
+                        <p:cond delay="indefinite"/>
+                      </p:stCondLst>
+                      <p:childTnLst>
+                        <p:par>
+                          <p:cTn id="15" fill="hold">
+                            <p:stCondLst>
+                              <p:cond delay="0"/>
+                            </p:stCondLst>
+                            <p:childTnLst>
+                              <p:par>
+                                <p:cTn id="16" presetID="10" presetClass="entr" presetSubtype="0" fill="hold" grpId="0" nodeType="clickEffect">
+                                  <p:stCondLst>
+                                    <p:cond delay="0"/>
+                                  </p:stCondLst>
+                                  <p:childTnLst>
+                                    <p:set>
+                                      <p:cBhvr>
+                                        <p:cTn id="17" dur="1" fill="hold">
+                                          <p:stCondLst>
+                                            <p:cond delay="0"/>
+                                          </p:stCondLst>
+                                        </p:cTn>
+                                        <p:tgtEl>
+                                          <p:spTgt spid="15"/>
+                                        </p:tgtEl>
+                                        <p:attrNameLst>
+                                          <p:attrName>style.visibility</p:attrName>
+                                        </p:attrNameLst>
+                                      </p:cBhvr>
+                                      <p:to>
+                                        <p:strVal val="visible"/>
+                                      </p:to>
+                                    </p:set>
+                                    <p:animEffect transition="in" filter="fade">
+                                      <p:cBhvr>
+                                        <p:cTn id="18" dur="500"/>
+                                        <p:tgtEl>
+                                          <p:spTgt spid="15"/>
+                                        </p:tgtEl>
+                                      </p:cBhvr>
+                                    </p:animEffect>
+                                  </p:childTnLst>
+                                </p:cTn>
+                              </p:par>
+                              <p:par>
+                                <p:cTn id="19" presetID="10" presetClass="entr" presetSubtype="0" fill="hold" grpId="0" nodeType="withEffect">
+                                  <p:stCondLst>
+                                    <p:cond delay="0"/>
+                                  </p:stCondLst>
+                                  <p:childTnLst>
+                                    <p:set>
+                                      <p:cBhvr>
+                                        <p:cTn id="20" dur="1" fill="hold">
+                                          <p:stCondLst>
+                                            <p:cond delay="0"/>
+                                          </p:stCondLst>
+                                        </p:cTn>
+                                        <p:tgtEl>
+                                          <p:spTgt spid="16"/>
+                                        </p:tgtEl>
+                                        <p:attrNameLst>
+                                          <p:attrName>style.visibility</p:attrName>
+                                        </p:attrNameLst>
+                                      </p:cBhvr>
+                                      <p:to>
+                                        <p:strVal val="visible"/>
+                                      </p:to>
+                                    </p:set>
+                                    <p:animEffect transition="in" filter="fade">
+                                      <p:cBhvr>
+                                        <p:cTn id="21" dur="500"/>
+                                        <p:tgtEl>
+                                          <p:spTgt spid="16"/>
+                                        </p:tgtEl>
+                                      </p:cBhvr>
+                                    </p:animEffect>
+                                  </p:childTnLst>
+                                </p:cTn>
+                              </p:par>
+                            </p:childTnLst>
+                          </p:cTn>
+                        </p:par>
+                      </p:childTnLst>
+                    </p:cTn>
+                  </p:par>
+                  <p:par>
+                    <p:cTn id="22" fill="hold">
+                      <p:stCondLst>
+                        <p:cond delay="indefinite"/>
+                      </p:stCondLst>
+                      <p:childTnLst>
+                        <p:par>
+                          <p:cTn id="23" fill="hold">
+                            <p:stCondLst>
+                              <p:cond delay="0"/>
+                            </p:stCondLst>
+                            <p:childTnLst>
+                              <p:par>
+                                <p:cTn id="24" presetID="10" presetClass="entr" presetSubtype="0" fill="hold" grpId="0" nodeType="clickEffect">
+                                  <p:stCondLst>
+                                    <p:cond delay="0"/>
+                                  </p:stCondLst>
+                                  <p:childTnLst>
+                                    <p:set>
+                                      <p:cBhvr>
+                                        <p:cTn id="25" dur="1" fill="hold">
+                                          <p:stCondLst>
+                                            <p:cond delay="0"/>
+                                          </p:stCondLst>
+                                        </p:cTn>
+                                        <p:tgtEl>
+                                          <p:spTgt spid="17"/>
+                                        </p:tgtEl>
+                                        <p:attrNameLst>
+                                          <p:attrName>style.visibility</p:attrName>
+                                        </p:attrNameLst>
+                                      </p:cBhvr>
+                                      <p:to>
+                                        <p:strVal val="visible"/>
+                                      </p:to>
+                                    </p:set>
+                                    <p:animEffect transition="in" filter="fade">
+                                      <p:cBhvr>
+                                        <p:cTn id="26" dur="500"/>
+                                        <p:tgtEl>
+                                          <p:spTgt spid="17"/>
+                                        </p:tgtEl>
+                                      </p:cBhvr>
+                                    </p:animEffect>
+                                  </p:childTnLst>
+                                </p:cTn>
+                              </p:par>
+                              <p:par>
+                                <p:cTn id="27" presetID="10" presetClass="entr" presetSubtype="0" fill="hold" grpId="0" nodeType="withEffect">
+                                  <p:stCondLst>
+                                    <p:cond delay="0"/>
+                                  </p:stCondLst>
+                                  <p:childTnLst>
+                                    <p:set>
+                                      <p:cBhvr>
+                                        <p:cTn id="28" dur="1" fill="hold">
+                                          <p:stCondLst>
+                                            <p:cond delay="0"/>
+                                          </p:stCondLst>
+                                        </p:cTn>
+                                        <p:tgtEl>
+                                          <p:spTgt spid="18"/>
+                                        </p:tgtEl>
+                                        <p:attrNameLst>
+                                          <p:attrName>style.visibility</p:attrName>
+                                        </p:attrNameLst>
+                                      </p:cBhvr>
+                                      <p:to>
+                                        <p:strVal val="visible"/>
+                                      </p:to>
+                                    </p:set>
+                                    <p:animEffect transition="in" filter="fade">
+                                      <p:cBhvr>
+                                        <p:cTn id="29" dur="500"/>
+                                        <p:tgtEl>
+                                          <p:spTgt spid="18"/>
+                                        </p:tgtEl>
+                                      </p:cBhvr>
+                                    </p:animEffect>
+                                  </p:childTnLst>
+                                </p:cTn>
+                              </p:par>
+                            </p:childTnLst>
+                          </p:cTn>
+                        </p:par>
+                      </p:childTnLst>
+                    </p:cTn>
+                  </p:par>
+                </p:childTnLst>
+              </p:cTn>
+              <p:prevCondLst>
+                <p:cond evt="onPrev" delay="0">
+                  <p:tgtEl>
+                    <p:sldTgt/>
+                  </p:tgtEl>
+                </p:cond>
+              </p:prevCondLst>
+              <p:nextCondLst>
+                <p:cond evt="onNext" delay="0">
+                  <p:tgtEl>
+                    <p:sldTgt/>
+                  </p:tgtEl>
+                </p:cond>
+              </p:nextCondLst>
+            </p:seq>
+          </p:childTnLst>
+        </p:cTn>
+      </p:par>
+    </p:tnLst>
+    <p:bldLst>
+      <p:bldP spid="12" grpId="0" animBg="1"/>
+      <p:bldP spid="13" grpId="0" animBg="1"/>
+      <p:bldP spid="14" grpId="0" animBg="1"/>
+      <p:bldP spid="15" grpId="0" animBg="1"/>
+      <p:bldP spid="16" grpId="0" animBg="1"/>
+      <p:bldP spid="17" grpId="0" animBg="1"/>
+      <p:bldP spid="18" grpId="0" animBg="1"/>
+    </p:bldLst>
+  </p:timing>
+</p:sld>
+</file>
+
+<file path=ppt/slides/slide23.xml><?xml version="1.0" encoding="utf-8"?>
+<p:sld xmlns:a="http://schemas.openxmlformats.org/drawingml/2006/main" xmlns:r="http://schemas.openxmlformats.org/officeDocument/2006/relationships" xmlns:p="http://schemas.openxmlformats.org/presentationml/2006/main">
+  <p:cSld name="Slide 23">
+    <p:spTree>
+      <p:nvGrpSpPr>
+        <p:cNvPr id="1" name=""/>
+        <p:cNvGrpSpPr/>
+        <p:nvPr/>
+      </p:nvGrpSpPr>
+      <p:grpSpPr>
+        <a:xfrm>
+          <a:off x="0" y="0"/>
+          <a:ext cx="0" cy="0"/>
+          <a:chOff x="0" y="0"/>
+          <a:chExt cx="0" cy="0"/>
+        </a:xfrm>
+      </p:grpSpPr>
+      <p:sp>
+        <p:nvSpPr>
+          <p:cNvPr id="2" name="eyebrow"/>
+          <p:cNvSpPr txBox="1"/>
+          <p:nvPr/>
+        </p:nvSpPr>
+        <p:spPr>
+          <a:xfrm>
+            <a:off x="731520" y="411480"/>
+            <a:ext cx="8229600" cy="274320"/>
+          </a:xfrm>
+          <a:prstGeom prst="rect">
+            <a:avLst/>
+          </a:prstGeom>
+          <a:noFill/>
+          <a:ln/>
+        </p:spPr>
+        <p:txBody>
+          <a:bodyPr wrap="square" lIns="0" tIns="0" rIns="0" bIns="0" rtlCol="0" anchor="ctr"/>
+          <a:lstStyle/>
+          <a:p>
+            <a:pPr indent="0" marL="0">
+              <a:buNone/>
+            </a:pPr>
+            <a:r>
+              <a:rPr lang="en-US" sz="1200" b="1" dirty="0">
+                <a:solidFill>
+                  <a:srgbClr val="FF6B35"/>
+                </a:solidFill>
+                <a:latin typeface="Calibri" pitchFamily="34" charset="0"/>
+                <a:ea typeface="Calibri" pitchFamily="34" charset="-122"/>
+                <a:cs typeface="Calibri" pitchFamily="34" charset="-120"/>
+              </a:rPr>
               <a:t>TAKEAWAYS</a:t>
             </a:r>
             <a:endParaRPr lang="en-US" sz="1200" dirty="0"/>
@@ -14394,7 +16758,7 @@
                 <a:ea typeface="Calibri" pitchFamily="34" charset="-122"/>
                 <a:cs typeface="Calibri" pitchFamily="34" charset="-120"/>
               </a:rPr>
-              <a:t>Spending O(n) memory to drop a nested loop is a tradeoff. Say it out loud.</a:t>
+              <a:t>Count, map, find a partner, or remember what you have seen. Each one turns a nested loop into a lookup.</a:t>
             </a:r>
             <a:endParaRPr lang="en-US" sz="1550" dirty="0"/>
           </a:p>
@@ -14818,9 +17182,9 @@
 </p:sld>
 </file>
 
-<file path=ppt/slides/slide21.xml><?xml version="1.0" encoding="utf-8"?>
+<file path=ppt/slides/slide24.xml><?xml version="1.0" encoding="utf-8"?>
 <p:sld xmlns:a="http://schemas.openxmlformats.org/drawingml/2006/main" xmlns:r="http://schemas.openxmlformats.org/officeDocument/2006/relationships" xmlns:p="http://schemas.openxmlformats.org/presentationml/2006/main">
-  <p:cSld name="Slide 21">
+  <p:cSld name="Slide 24">
     <p:spTree>
       <p:nvGrpSpPr>
         <p:cNvPr id="1" name=""/>
@@ -14924,11 +17288,11 @@
         <p:spPr>
           <a:xfrm>
             <a:off x="731520" y="1691640"/>
-            <a:ext cx="5257800" cy="2788920"/>
+            <a:ext cx="5257800" cy="2331720"/>
           </a:xfrm>
           <a:prstGeom prst="roundRect">
             <a:avLst>
-              <a:gd name="adj" fmla="val 1967"/>
+              <a:gd name="adj" fmla="val 2353"/>
             </a:avLst>
           </a:prstGeom>
           <a:solidFill>
@@ -14975,7 +17339,7 @@
                 <a:ea typeface="Arial" pitchFamily="34" charset="-122"/>
                 <a:cs typeface="Arial" pitchFamily="34" charset="-120"/>
               </a:rPr>
-              <a:t>Practice these three</a:t>
+              <a:t>Practice these two</a:t>
             </a:r>
             <a:endParaRPr lang="en-US" sz="1500" dirty="0"/>
           </a:p>
@@ -15028,7 +17392,7 @@
         </p:nvSpPr>
         <p:spPr>
           <a:xfrm>
-            <a:off x="1005840" y="2651760"/>
+            <a:off x="1005840" y="2697480"/>
             <a:ext cx="548640" cy="256032"/>
           </a:xfrm>
           <a:prstGeom prst="rect">
@@ -15053,7 +17417,7 @@
                 <a:ea typeface="Courier New" pitchFamily="34" charset="-122"/>
                 <a:cs typeface="Courier New" pitchFamily="34" charset="-120"/>
               </a:rPr>
-              <a:t>4.2</a:t>
+              <a:t>4.3</a:t>
             </a:r>
             <a:endParaRPr lang="en-US" sz="1300" dirty="0"/>
           </a:p>
@@ -15067,8 +17431,8 @@
         </p:nvSpPr>
         <p:spPr>
           <a:xfrm>
-            <a:off x="1600200" y="2651760"/>
-            <a:ext cx="4206240" cy="256032"/>
+            <a:off x="1600200" y="2697480"/>
+            <a:ext cx="4114800" cy="256032"/>
           </a:xfrm>
           <a:prstGeom prst="rect">
             <a:avLst/>
@@ -15092,7 +17456,7 @@
                 <a:ea typeface="Arial" pitchFamily="34" charset="-122"/>
                 <a:cs typeface="Arial" pitchFamily="34" charset="-120"/>
               </a:rPr>
-              <a:t>Isomorphic Strings</a:t>
+              <a:t>Two Sum</a:t>
             </a:r>
             <a:endParaRPr lang="en-US" sz="1300" dirty="0"/>
           </a:p>
@@ -15106,8 +17470,8 @@
         </p:nvSpPr>
         <p:spPr>
           <a:xfrm>
-            <a:off x="1600200" y="2916936"/>
-            <a:ext cx="4206240" cy="237744"/>
+            <a:off x="1600200" y="2962656"/>
+            <a:ext cx="4114800" cy="237744"/>
           </a:xfrm>
           <a:prstGeom prst="rect">
             <a:avLst/>
@@ -15131,7 +17495,7 @@
                 <a:ea typeface="Calibri" pitchFamily="34" charset="-122"/>
                 <a:cs typeface="Calibri" pitchFamily="34" charset="-120"/>
               </a:rPr>
-              <a:t>two dicts, one for each direction</a:t>
+              <a:t>one pass with a dict from each value to its index</a:t>
             </a:r>
             <a:endParaRPr lang="en-US" sz="1150" dirty="0"/>
           </a:p>
@@ -15145,7 +17509,7 @@
         </p:nvSpPr>
         <p:spPr>
           <a:xfrm>
-            <a:off x="1005840" y="3246120"/>
+            <a:off x="1005840" y="3291840"/>
             <a:ext cx="548640" cy="256032"/>
           </a:xfrm>
           <a:prstGeom prst="rect">
@@ -15170,7 +17534,7 @@
                 <a:ea typeface="Courier New" pitchFamily="34" charset="-122"/>
                 <a:cs typeface="Courier New" pitchFamily="34" charset="-120"/>
               </a:rPr>
-              <a:t>4.4</a:t>
+              <a:t>4.5</a:t>
             </a:r>
             <a:endParaRPr lang="en-US" sz="1300" dirty="0"/>
           </a:p>
@@ -15184,8 +17548,8 @@
         </p:nvSpPr>
         <p:spPr>
           <a:xfrm>
-            <a:off x="1600200" y="3246120"/>
-            <a:ext cx="4206240" cy="256032"/>
+            <a:off x="1600200" y="3291840"/>
+            <a:ext cx="4114800" cy="256032"/>
           </a:xfrm>
           <a:prstGeom prst="rect">
             <a:avLst/>
@@ -15209,7 +17573,7 @@
                 <a:ea typeface="Arial" pitchFamily="34" charset="-122"/>
                 <a:cs typeface="Arial" pitchFamily="34" charset="-120"/>
               </a:rPr>
-              <a:t>3 Sum</a:t>
+              <a:t>Find Largest Value in DataFrame</a:t>
             </a:r>
             <a:endParaRPr lang="en-US" sz="1300" dirty="0"/>
           </a:p>
@@ -15223,8 +17587,8 @@
         </p:nvSpPr>
         <p:spPr>
           <a:xfrm>
-            <a:off x="1600200" y="3511296"/>
-            <a:ext cx="4206240" cy="237744"/>
+            <a:off x="1600200" y="3557016"/>
+            <a:ext cx="4114800" cy="237744"/>
           </a:xfrm>
           <a:prstGeom prst="rect">
             <a:avLst/>
@@ -15248,7 +17612,7 @@
                 <a:ea typeface="Calibri" pitchFamily="34" charset="-122"/>
                 <a:cs typeface="Calibri" pitchFamily="34" charset="-120"/>
               </a:rPr>
-              <a:t>sort, then run Two Sum for each number</a:t>
+              <a:t>a DataFrame column, looked up by its name</a:t>
             </a:r>
             <a:endParaRPr lang="en-US" sz="1150" dirty="0"/>
           </a:p>
@@ -15256,135 +17620,18 @@
       </p:sp>
       <p:sp>
         <p:nvSpPr>
-          <p:cNvPr id="13" name="anim01_click_practice"/>
-          <p:cNvSpPr txBox="1"/>
-          <p:nvPr/>
-        </p:nvSpPr>
-        <p:spPr>
-          <a:xfrm>
-            <a:off x="1005840" y="3840480"/>
-            <a:ext cx="548640" cy="256032"/>
-          </a:xfrm>
-          <a:prstGeom prst="rect">
-            <a:avLst/>
-          </a:prstGeom>
-          <a:noFill/>
-          <a:ln/>
-        </p:spPr>
-        <p:txBody>
-          <a:bodyPr wrap="square" lIns="0" tIns="0" rIns="0" bIns="0" rtlCol="0" anchor="ctr"/>
-          <a:lstStyle/>
-          <a:p>
-            <a:pPr indent="0" marL="0">
-              <a:buNone/>
-            </a:pPr>
-            <a:r>
-              <a:rPr lang="en-US" sz="1300" b="1" dirty="0">
-                <a:solidFill>
-                  <a:srgbClr val="FF6B35"/>
-                </a:solidFill>
-                <a:latin typeface="Courier New" pitchFamily="34" charset="0"/>
-                <a:ea typeface="Courier New" pitchFamily="34" charset="-122"/>
-                <a:cs typeface="Courier New" pitchFamily="34" charset="-120"/>
-              </a:rPr>
-              <a:t>4.7</a:t>
-            </a:r>
-            <a:endParaRPr lang="en-US" sz="1300" dirty="0"/>
-          </a:p>
-        </p:txBody>
-      </p:sp>
-      <p:sp>
-        <p:nvSpPr>
-          <p:cNvPr id="14" name="anim01_click_practice"/>
-          <p:cNvSpPr txBox="1"/>
-          <p:nvPr/>
-        </p:nvSpPr>
-        <p:spPr>
-          <a:xfrm>
-            <a:off x="1600200" y="3840480"/>
-            <a:ext cx="4206240" cy="256032"/>
-          </a:xfrm>
-          <a:prstGeom prst="rect">
-            <a:avLst/>
-          </a:prstGeom>
-          <a:noFill/>
-          <a:ln/>
-        </p:spPr>
-        <p:txBody>
-          <a:bodyPr wrap="square" lIns="0" tIns="0" rIns="0" bIns="0" rtlCol="0" anchor="ctr"/>
-          <a:lstStyle/>
-          <a:p>
-            <a:pPr indent="0" marL="0">
-              <a:buNone/>
-            </a:pPr>
-            <a:r>
-              <a:rPr lang="en-US" sz="1300" b="1" dirty="0">
-                <a:solidFill>
-                  <a:srgbClr val="FFFFFF"/>
-                </a:solidFill>
-                <a:latin typeface="Arial" pitchFamily="34" charset="0"/>
-                <a:ea typeface="Arial" pitchFamily="34" charset="-122"/>
-                <a:cs typeface="Arial" pitchFamily="34" charset="-120"/>
-              </a:rPr>
-              <a:t>Equal Sums of Distinct Index Pairs</a:t>
-            </a:r>
-            <a:endParaRPr lang="en-US" sz="1300" dirty="0"/>
-          </a:p>
-        </p:txBody>
-      </p:sp>
-      <p:sp>
-        <p:nvSpPr>
-          <p:cNvPr id="15" name="anim01_click_practice"/>
-          <p:cNvSpPr txBox="1"/>
-          <p:nvPr/>
-        </p:nvSpPr>
-        <p:spPr>
-          <a:xfrm>
-            <a:off x="1600200" y="4105656"/>
-            <a:ext cx="4206240" cy="237744"/>
-          </a:xfrm>
-          <a:prstGeom prst="rect">
-            <a:avLst/>
-          </a:prstGeom>
-          <a:noFill/>
-          <a:ln/>
-        </p:spPr>
-        <p:txBody>
-          <a:bodyPr wrap="square" lIns="0" tIns="0" rIns="0" bIns="0" rtlCol="0" anchor="t"/>
-          <a:lstStyle/>
-          <a:p>
-            <a:pPr indent="0" marL="0">
-              <a:buNone/>
-            </a:pPr>
-            <a:r>
-              <a:rPr lang="en-US" sz="1150" dirty="0">
-                <a:solidFill>
-                  <a:srgbClr val="C8CCDC"/>
-                </a:solidFill>
-                <a:latin typeface="Calibri" pitchFamily="34" charset="0"/>
-                <a:ea typeface="Calibri" pitchFamily="34" charset="-122"/>
-                <a:cs typeface="Calibri" pitchFamily="34" charset="-120"/>
-              </a:rPr>
-              <a:t>a dict from each pair sum to its index pairs</a:t>
-            </a:r>
-            <a:endParaRPr lang="en-US" sz="1150" dirty="0"/>
-          </a:p>
-        </p:txBody>
-      </p:sp>
-      <p:sp>
-        <p:nvSpPr>
-          <p:cNvPr id="16" name="anim02_click_how"/>
+          <p:cNvPr id="13" name="anim02_click_more"/>
           <p:cNvSpPr/>
           <p:nvPr/>
         </p:nvSpPr>
         <p:spPr>
           <a:xfrm>
             <a:off x="6199632" y="1691640"/>
-            <a:ext cx="5257800" cy="2788920"/>
+            <a:ext cx="5257800" cy="2331720"/>
           </a:xfrm>
           <a:prstGeom prst="roundRect">
             <a:avLst>
-              <a:gd name="adj" fmla="val 1967"/>
+              <a:gd name="adj" fmla="val 2353"/>
             </a:avLst>
           </a:prstGeom>
           <a:solidFill>
@@ -15400,7 +17647,7 @@
       </p:sp>
       <p:sp>
         <p:nvSpPr>
-          <p:cNvPr id="17" name="anim02_click_how"/>
+          <p:cNvPr id="14" name="anim02_click_more"/>
           <p:cNvSpPr txBox="1"/>
           <p:nvPr/>
         </p:nvSpPr>
@@ -15431,7 +17678,7 @@
                 <a:ea typeface="Arial" pitchFamily="34" charset="-122"/>
                 <a:cs typeface="Arial" pitchFamily="34" charset="-120"/>
               </a:rPr>
-              <a:t>How to practice</a:t>
+              <a:t>If you have time</a:t>
             </a:r>
             <a:endParaRPr lang="en-US" sz="1500" dirty="0"/>
           </a:p>
@@ -15439,14 +17686,14 @@
       </p:sp>
       <p:sp>
         <p:nvSpPr>
-          <p:cNvPr id="18" name="anim02_click_how"/>
+          <p:cNvPr id="15" name="anim02_click_more"/>
           <p:cNvSpPr txBox="1"/>
           <p:nvPr/>
         </p:nvSpPr>
         <p:spPr>
           <a:xfrm>
-            <a:off x="6473952" y="2377440"/>
-            <a:ext cx="4709160" cy="1828800"/>
+            <a:off x="6473952" y="2212848"/>
+            <a:ext cx="4709160" cy="256032"/>
           </a:xfrm>
           <a:prstGeom prst="rect">
             <a:avLst/>
@@ -15458,100 +17705,203 @@
           <a:bodyPr wrap="square" lIns="0" tIns="0" rIns="0" bIns="0" rtlCol="0" anchor="t"/>
           <a:lstStyle/>
           <a:p>
-            <a:pPr marL="342900" indent="-342900">
-              <a:spcAft>
-                <a:spcPts val="800"/>
-              </a:spcAft>
-              <a:buSzPct val="100000"/>
-              <a:buChar char="•"/>
-            </a:pPr>
-            <a:r>
-              <a:rPr lang="en-US" sz="1300" dirty="0">
-                <a:solidFill>
-                  <a:srgbClr val="E8EAF6"/>
+            <a:pPr indent="0" marL="0">
+              <a:buNone/>
+            </a:pPr>
+            <a:r>
+              <a:rPr lang="en-US" sz="1150" dirty="0">
+                <a:solidFill>
+                  <a:srgbClr val="C8CCDC"/>
                 </a:solidFill>
                 <a:latin typeface="Calibri" pitchFamily="34" charset="0"/>
                 <a:ea typeface="Calibri" pitchFamily="34" charset="-122"/>
                 <a:cs typeface="Calibri" pitchFamily="34" charset="-120"/>
               </a:rPr>
-              <a:t>Give yourself twenty five minutes per problem.</a:t>
+              <a:t>Revisit today's hardest one</a:t>
+            </a:r>
+            <a:endParaRPr lang="en-US" sz="1150" dirty="0"/>
+          </a:p>
+        </p:txBody>
+      </p:sp>
+      <p:sp>
+        <p:nvSpPr>
+          <p:cNvPr id="16" name="anim02_click_more"/>
+          <p:cNvSpPr txBox="1"/>
+          <p:nvPr/>
+        </p:nvSpPr>
+        <p:spPr>
+          <a:xfrm>
+            <a:off x="6473952" y="2697480"/>
+            <a:ext cx="548640" cy="256032"/>
+          </a:xfrm>
+          <a:prstGeom prst="rect">
+            <a:avLst/>
+          </a:prstGeom>
+          <a:noFill/>
+          <a:ln/>
+        </p:spPr>
+        <p:txBody>
+          <a:bodyPr wrap="square" lIns="0" tIns="0" rIns="0" bIns="0" rtlCol="0" anchor="ctr"/>
+          <a:lstStyle/>
+          <a:p>
+            <a:pPr indent="0" marL="0">
+              <a:buNone/>
+            </a:pPr>
+            <a:r>
+              <a:rPr lang="en-US" sz="1300" b="1" dirty="0">
+                <a:solidFill>
+                  <a:srgbClr val="FF6B35"/>
+                </a:solidFill>
+                <a:latin typeface="Courier New" pitchFamily="34" charset="0"/>
+                <a:ea typeface="Courier New" pitchFamily="34" charset="-122"/>
+                <a:cs typeface="Courier New" pitchFamily="34" charset="-120"/>
+              </a:rPr>
+              <a:t>4.4</a:t>
             </a:r>
             <a:endParaRPr lang="en-US" sz="1300" dirty="0"/>
           </a:p>
-          <a:p>
-            <a:pPr marL="342900" indent="-342900">
-              <a:spcAft>
-                <a:spcPts val="800"/>
-              </a:spcAft>
-              <a:buSzPct val="100000"/>
-              <a:buChar char="•"/>
-            </a:pPr>
-            <a:r>
-              <a:rPr lang="en-US" sz="1300" dirty="0">
-                <a:solidFill>
-                  <a:srgbClr val="E8EAF6"/>
+        </p:txBody>
+      </p:sp>
+      <p:sp>
+        <p:nvSpPr>
+          <p:cNvPr id="17" name="anim02_click_more"/>
+          <p:cNvSpPr txBox="1"/>
+          <p:nvPr/>
+        </p:nvSpPr>
+        <p:spPr>
+          <a:xfrm>
+            <a:off x="7068312" y="2697480"/>
+            <a:ext cx="4114800" cy="256032"/>
+          </a:xfrm>
+          <a:prstGeom prst="rect">
+            <a:avLst/>
+          </a:prstGeom>
+          <a:noFill/>
+          <a:ln/>
+        </p:spPr>
+        <p:txBody>
+          <a:bodyPr wrap="square" lIns="0" tIns="0" rIns="0" bIns="0" rtlCol="0" anchor="ctr"/>
+          <a:lstStyle/>
+          <a:p>
+            <a:pPr indent="0" marL="0">
+              <a:buNone/>
+            </a:pPr>
+            <a:r>
+              <a:rPr lang="en-US" sz="1300" b="1" dirty="0">
+                <a:solidFill>
+                  <a:srgbClr val="FFFFFF"/>
+                </a:solidFill>
+                <a:latin typeface="Arial" pitchFamily="34" charset="0"/>
+                <a:ea typeface="Arial" pitchFamily="34" charset="-122"/>
+                <a:cs typeface="Arial" pitchFamily="34" charset="-120"/>
+              </a:rPr>
+              <a:t>3 Sum, again</a:t>
+            </a:r>
+            <a:endParaRPr lang="en-US" sz="1300" dirty="0"/>
+          </a:p>
+        </p:txBody>
+      </p:sp>
+      <p:sp>
+        <p:nvSpPr>
+          <p:cNvPr id="18" name="anim02_click_more"/>
+          <p:cNvSpPr txBox="1"/>
+          <p:nvPr/>
+        </p:nvSpPr>
+        <p:spPr>
+          <a:xfrm>
+            <a:off x="7068312" y="2962656"/>
+            <a:ext cx="4114800" cy="237744"/>
+          </a:xfrm>
+          <a:prstGeom prst="rect">
+            <a:avLst/>
+          </a:prstGeom>
+          <a:noFill/>
+          <a:ln/>
+        </p:spPr>
+        <p:txBody>
+          <a:bodyPr wrap="square" lIns="0" tIns="0" rIns="0" bIns="0" rtlCol="0" anchor="t"/>
+          <a:lstStyle/>
+          <a:p>
+            <a:pPr indent="0" marL="0">
+              <a:buNone/>
+            </a:pPr>
+            <a:r>
+              <a:rPr lang="en-US" sz="1150" dirty="0">
+                <a:solidFill>
+                  <a:srgbClr val="C8CCDC"/>
                 </a:solidFill>
                 <a:latin typeface="Calibri" pitchFamily="34" charset="0"/>
                 <a:ea typeface="Calibri" pitchFamily="34" charset="-122"/>
                 <a:cs typeface="Calibri" pitchFamily="34" charset="-120"/>
               </a:rPr>
-              <a:t>Say your approach out loud before you type.</a:t>
-            </a:r>
-            <a:endParaRPr lang="en-US" sz="1300" dirty="0"/>
-          </a:p>
-          <a:p>
-            <a:pPr marL="342900" indent="-342900">
-              <a:spcAft>
-                <a:spcPts val="800"/>
-              </a:spcAft>
-              <a:buSzPct val="100000"/>
-              <a:buChar char="•"/>
-            </a:pPr>
-            <a:r>
-              <a:rPr lang="en-US" sz="1300" dirty="0">
-                <a:solidFill>
-                  <a:srgbClr val="E8EAF6"/>
+              <a:t>two pointers, as in Edugator's solution: no extra set</a:t>
+            </a:r>
+            <a:endParaRPr lang="en-US" sz="1150" dirty="0"/>
+          </a:p>
+        </p:txBody>
+      </p:sp>
+      <p:sp>
+        <p:nvSpPr>
+          <p:cNvPr id="19" name="anim02_click_more"/>
+          <p:cNvSpPr txBox="1"/>
+          <p:nvPr/>
+        </p:nvSpPr>
+        <p:spPr>
+          <a:xfrm>
+            <a:off x="6473952" y="3291840"/>
+            <a:ext cx="4709160" cy="640080"/>
+          </a:xfrm>
+          <a:prstGeom prst="rect">
+            <a:avLst/>
+          </a:prstGeom>
+          <a:noFill/>
+          <a:ln/>
+        </p:spPr>
+        <p:txBody>
+          <a:bodyPr wrap="square" lIns="0" tIns="0" rIns="0" bIns="0" rtlCol="0" anchor="t"/>
+          <a:lstStyle/>
+          <a:p>
+            <a:pPr indent="0" marL="0">
+              <a:buNone/>
+            </a:pPr>
+            <a:r>
+              <a:rPr lang="en-US" sz="1200" b="1" dirty="0">
+                <a:solidFill>
+                  <a:srgbClr val="FFFFFF"/>
                 </a:solidFill>
                 <a:latin typeface="Calibri" pitchFamily="34" charset="0"/>
                 <a:ea typeface="Calibri" pitchFamily="34" charset="-122"/>
                 <a:cs typeface="Calibri" pitchFamily="34" charset="-120"/>
               </a:rPr>
-              <a:t>State time and space when you finish.</a:t>
-            </a:r>
-            <a:endParaRPr lang="en-US" sz="1300" dirty="0"/>
-          </a:p>
-          <a:p>
-            <a:pPr marL="342900" indent="-342900">
-              <a:spcAft>
-                <a:spcPts val="800"/>
-              </a:spcAft>
-              <a:buSzPct val="100000"/>
-              <a:buChar char="•"/>
-            </a:pPr>
-            <a:r>
-              <a:rPr lang="en-US" sz="1300" dirty="0">
-                <a:solidFill>
-                  <a:srgbClr val="E8EAF6"/>
+              <a:t>How to practice:  </a:t>
+            </a:r>
+            <a:pPr indent="0" marL="0">
+              <a:buNone/>
+            </a:pPr>
+            <a:r>
+              <a:rPr lang="en-US" sz="1200" dirty="0">
+                <a:solidFill>
+                  <a:srgbClr val="C8CCDC"/>
                 </a:solidFill>
                 <a:latin typeface="Calibri" pitchFamily="34" charset="0"/>
                 <a:ea typeface="Calibri" pitchFamily="34" charset="-122"/>
                 <a:cs typeface="Calibri" pitchFamily="34" charset="-120"/>
               </a:rPr>
-              <a:t>Rewrite each one from a blank page a week later.</a:t>
-            </a:r>
-            <a:endParaRPr lang="en-US" sz="1300" dirty="0"/>
+              <a:t>twenty five minutes per problem. Say your approach out loud before typing, then state time and space.</a:t>
+            </a:r>
+            <a:endParaRPr lang="en-US" sz="1200" dirty="0"/>
           </a:p>
         </p:txBody>
       </p:sp>
       <p:sp>
         <p:nvSpPr>
-          <p:cNvPr id="19" name="anim03_click_next"/>
+          <p:cNvPr id="20" name="anim03_click_next"/>
           <p:cNvSpPr/>
           <p:nvPr/>
         </p:nvSpPr>
         <p:spPr>
           <a:xfrm>
-            <a:off x="731520" y="4681728"/>
+            <a:off x="731520" y="4251960"/>
             <a:ext cx="10725912" cy="1188720"/>
           </a:xfrm>
           <a:prstGeom prst="roundRect">
@@ -15572,13 +17922,13 @@
       </p:sp>
       <p:sp>
         <p:nvSpPr>
-          <p:cNvPr id="20" name="anim03_click_next"/>
+          <p:cNvPr id="21" name="anim03_click_next"/>
           <p:cNvSpPr txBox="1"/>
           <p:nvPr/>
         </p:nvSpPr>
         <p:spPr>
           <a:xfrm>
-            <a:off x="1005840" y="4818888"/>
+            <a:off x="1005840" y="4389120"/>
             <a:ext cx="5486400" cy="228600"/>
           </a:xfrm>
           <a:prstGeom prst="rect">
@@ -15611,13 +17961,13 @@
       </p:sp>
       <p:sp>
         <p:nvSpPr>
-          <p:cNvPr id="21" name="anim03_click_next"/>
+          <p:cNvPr id="22" name="anim03_click_next"/>
           <p:cNvSpPr txBox="1"/>
           <p:nvPr/>
         </p:nvSpPr>
         <p:spPr>
           <a:xfrm>
-            <a:off x="1005840" y="5047488"/>
+            <a:off x="1005840" y="4617720"/>
             <a:ext cx="5486400" cy="384048"/>
           </a:xfrm>
           <a:prstGeom prst="rect">
@@ -15650,13 +18000,13 @@
       </p:sp>
       <p:sp>
         <p:nvSpPr>
-          <p:cNvPr id="22" name="anim03_click_next"/>
+          <p:cNvPr id="23" name="anim03_click_next"/>
           <p:cNvSpPr txBox="1"/>
           <p:nvPr/>
         </p:nvSpPr>
         <p:spPr>
           <a:xfrm>
-            <a:off x="1005840" y="5449824"/>
+            <a:off x="1005840" y="5020056"/>
             <a:ext cx="10149840" cy="274320"/>
           </a:xfrm>
           <a:prstGeom prst="rect">
@@ -15681,7 +18031,7 @@
                 <a:ea typeface="Calibri" pitchFamily="34" charset="-122"/>
                 <a:cs typeface="Calibri" pitchFamily="34" charset="-120"/>
               </a:rPr>
-              <a:t>Same format, built on everything you did today. Come with the three problems above attempted.</a:t>
+              <a:t>Same format, built on everything you did today. Come with the problems above attempted.</a:t>
             </a:r>
             <a:endParaRPr lang="en-US" sz="1250" dirty="0"/>
           </a:p>
@@ -16030,15 +18380,33 @@
                                   </p:childTnLst>
                                 </p:cTn>
                               </p:par>
+                            </p:childTnLst>
+                          </p:cTn>
+                        </p:par>
+                      </p:childTnLst>
+                    </p:cTn>
+                  </p:par>
+                  <p:par>
+                    <p:cTn id="32" fill="hold">
+                      <p:stCondLst>
+                        <p:cond delay="indefinite"/>
+                      </p:stCondLst>
+                      <p:childTnLst>
+                        <p:par>
+                          <p:cTn id="33" fill="hold">
+                            <p:stCondLst>
+                              <p:cond delay="0"/>
+                            </p:stCondLst>
+                            <p:childTnLst>
                               <p:par>
-                                <p:cTn id="32" presetID="10" presetClass="entr" presetSubtype="0" fill="hold" grpId="0" nodeType="withEffect">
+                                <p:cTn id="34" presetID="10" presetClass="entr" presetSubtype="0" fill="hold" grpId="0" nodeType="clickEffect">
                                   <p:stCondLst>
                                     <p:cond delay="0"/>
                                   </p:stCondLst>
                                   <p:childTnLst>
                                     <p:set>
                                       <p:cBhvr>
-                                        <p:cTn id="33" dur="1" fill="hold">
+                                        <p:cTn id="35" dur="1" fill="hold">
                                           <p:stCondLst>
                                             <p:cond delay="0"/>
                                           </p:stCondLst>
@@ -16056,7 +18424,7 @@
                                     </p:set>
                                     <p:animEffect transition="in" filter="fade">
                                       <p:cBhvr>
-                                        <p:cTn id="34" dur="500"/>
+                                        <p:cTn id="36" dur="500"/>
                                         <p:tgtEl>
                                           <p:spTgt spid="13"/>
                                         </p:tgtEl>
@@ -16066,14 +18434,14 @@
                                 </p:cTn>
                               </p:par>
                               <p:par>
-                                <p:cTn id="35" presetID="10" presetClass="entr" presetSubtype="0" fill="hold" grpId="0" nodeType="withEffect">
+                                <p:cTn id="37" presetID="10" presetClass="entr" presetSubtype="0" fill="hold" grpId="0" nodeType="withEffect">
                                   <p:stCondLst>
                                     <p:cond delay="0"/>
                                   </p:stCondLst>
                                   <p:childTnLst>
                                     <p:set>
                                       <p:cBhvr>
-                                        <p:cTn id="36" dur="1" fill="hold">
+                                        <p:cTn id="38" dur="1" fill="hold">
                                           <p:stCondLst>
                                             <p:cond delay="0"/>
                                           </p:stCondLst>
@@ -16091,7 +18459,7 @@
                                     </p:set>
                                     <p:animEffect transition="in" filter="fade">
                                       <p:cBhvr>
-                                        <p:cTn id="37" dur="500"/>
+                                        <p:cTn id="39" dur="500"/>
                                         <p:tgtEl>
                                           <p:spTgt spid="14"/>
                                         </p:tgtEl>
@@ -16101,14 +18469,14 @@
                                 </p:cTn>
                               </p:par>
                               <p:par>
-                                <p:cTn id="38" presetID="10" presetClass="entr" presetSubtype="0" fill="hold" grpId="0" nodeType="withEffect">
+                                <p:cTn id="40" presetID="10" presetClass="entr" presetSubtype="0" fill="hold" grpId="0" nodeType="withEffect">
                                   <p:stCondLst>
                                     <p:cond delay="0"/>
                                   </p:stCondLst>
                                   <p:childTnLst>
                                     <p:set>
                                       <p:cBhvr>
-                                        <p:cTn id="39" dur="1" fill="hold">
+                                        <p:cTn id="41" dur="1" fill="hold">
                                           <p:stCondLst>
                                             <p:cond delay="0"/>
                                           </p:stCondLst>
@@ -16126,9 +18494,149 @@
                                     </p:set>
                                     <p:animEffect transition="in" filter="fade">
                                       <p:cBhvr>
-                                        <p:cTn id="40" dur="500"/>
+                                        <p:cTn id="42" dur="500"/>
                                         <p:tgtEl>
                                           <p:spTgt spid="15"/>
+                                        </p:tgtEl>
+                                      </p:cBhvr>
+                                    </p:animEffect>
+                                  </p:childTnLst>
+                                </p:cTn>
+                              </p:par>
+                              <p:par>
+                                <p:cTn id="43" presetID="10" presetClass="entr" presetSubtype="0" fill="hold" grpId="0" nodeType="withEffect">
+                                  <p:stCondLst>
+                                    <p:cond delay="0"/>
+                                  </p:stCondLst>
+                                  <p:childTnLst>
+                                    <p:set>
+                                      <p:cBhvr>
+                                        <p:cTn id="44" dur="1" fill="hold">
+                                          <p:stCondLst>
+                                            <p:cond delay="0"/>
+                                          </p:stCondLst>
+                                        </p:cTn>
+                                        <p:tgtEl>
+                                          <p:spTgt spid="16"/>
+                                        </p:tgtEl>
+                                        <p:attrNameLst>
+                                          <p:attrName>style.visibility</p:attrName>
+                                        </p:attrNameLst>
+                                      </p:cBhvr>
+                                      <p:to>
+                                        <p:strVal val="visible"/>
+                                      </p:to>
+                                    </p:set>
+                                    <p:animEffect transition="in" filter="fade">
+                                      <p:cBhvr>
+                                        <p:cTn id="45" dur="500"/>
+                                        <p:tgtEl>
+                                          <p:spTgt spid="16"/>
+                                        </p:tgtEl>
+                                      </p:cBhvr>
+                                    </p:animEffect>
+                                  </p:childTnLst>
+                                </p:cTn>
+                              </p:par>
+                              <p:par>
+                                <p:cTn id="46" presetID="10" presetClass="entr" presetSubtype="0" fill="hold" grpId="0" nodeType="withEffect">
+                                  <p:stCondLst>
+                                    <p:cond delay="0"/>
+                                  </p:stCondLst>
+                                  <p:childTnLst>
+                                    <p:set>
+                                      <p:cBhvr>
+                                        <p:cTn id="47" dur="1" fill="hold">
+                                          <p:stCondLst>
+                                            <p:cond delay="0"/>
+                                          </p:stCondLst>
+                                        </p:cTn>
+                                        <p:tgtEl>
+                                          <p:spTgt spid="17"/>
+                                        </p:tgtEl>
+                                        <p:attrNameLst>
+                                          <p:attrName>style.visibility</p:attrName>
+                                        </p:attrNameLst>
+                                      </p:cBhvr>
+                                      <p:to>
+                                        <p:strVal val="visible"/>
+                                      </p:to>
+                                    </p:set>
+                                    <p:animEffect transition="in" filter="fade">
+                                      <p:cBhvr>
+                                        <p:cTn id="48" dur="500"/>
+                                        <p:tgtEl>
+                                          <p:spTgt spid="17"/>
+                                        </p:tgtEl>
+                                      </p:cBhvr>
+                                    </p:animEffect>
+                                  </p:childTnLst>
+                                </p:cTn>
+                              </p:par>
+                              <p:par>
+                                <p:cTn id="49" presetID="10" presetClass="entr" presetSubtype="0" fill="hold" grpId="0" nodeType="withEffect">
+                                  <p:stCondLst>
+                                    <p:cond delay="0"/>
+                                  </p:stCondLst>
+                                  <p:childTnLst>
+                                    <p:set>
+                                      <p:cBhvr>
+                                        <p:cTn id="50" dur="1" fill="hold">
+                                          <p:stCondLst>
+                                            <p:cond delay="0"/>
+                                          </p:stCondLst>
+                                        </p:cTn>
+                                        <p:tgtEl>
+                                          <p:spTgt spid="18"/>
+                                        </p:tgtEl>
+                                        <p:attrNameLst>
+                                          <p:attrName>style.visibility</p:attrName>
+                                        </p:attrNameLst>
+                                      </p:cBhvr>
+                                      <p:to>
+                                        <p:strVal val="visible"/>
+                                      </p:to>
+                                    </p:set>
+                                    <p:animEffect transition="in" filter="fade">
+                                      <p:cBhvr>
+                                        <p:cTn id="51" dur="500"/>
+                                        <p:tgtEl>
+                                          <p:spTgt spid="18"/>
+                                        </p:tgtEl>
+                                      </p:cBhvr>
+                                    </p:animEffect>
+                                  </p:childTnLst>
+                                </p:cTn>
+                              </p:par>
+                              <p:par>
+                                <p:cTn id="52" presetID="10" presetClass="entr" presetSubtype="0" fill="hold" grpId="0" nodeType="withEffect">
+                                  <p:stCondLst>
+                                    <p:cond delay="0"/>
+                                  </p:stCondLst>
+                                  <p:childTnLst>
+                                    <p:set>
+                                      <p:cBhvr>
+                                        <p:cTn id="53" dur="1" fill="hold">
+                                          <p:stCondLst>
+                                            <p:cond delay="0"/>
+                                          </p:stCondLst>
+                                        </p:cTn>
+                                        <p:tgtEl>
+                                          <p:spTgt spid="19"/>
+                                        </p:tgtEl>
+                                        <p:attrNameLst>
+                                          <p:attrName>style.visibility</p:attrName>
+                                        </p:attrNameLst>
+                                      </p:cBhvr>
+                                      <p:to>
+                                        <p:strVal val="visible"/>
+                                      </p:to>
+                                    </p:set>
+                                    <p:animEffect transition="in" filter="fade">
+                                      <p:cBhvr>
+                                        <p:cTn id="54" dur="500"/>
+                                        <p:tgtEl>
+                                          <p:spTgt spid="19"/>
                                         </p:tgtEl>
                                       </p:cBhvr>
                                     </p:animEffect>
@@ -16142,177 +18650,19 @@
                     </p:cTn>
                   </p:par>
                   <p:par>
-                    <p:cTn id="41" fill="hold">
+                    <p:cTn id="55" fill="hold">
                       <p:stCondLst>
                         <p:cond delay="indefinite"/>
                       </p:stCondLst>
                       <p:childTnLst>
                         <p:par>
-                          <p:cTn id="42" fill="hold">
+                          <p:cTn id="56" fill="hold">
                             <p:stCondLst>
                               <p:cond delay="0"/>
                             </p:stCondLst>
                             <p:childTnLst>
                               <p:par>
-                                <p:cTn id="43" presetID="10" presetClass="entr" presetSubtype="0" fill="hold" grpId="0" nodeType="clickEffect">
-                                  <p:stCondLst>
-                                    <p:cond delay="0"/>
-                                  </p:stCondLst>
-                                  <p:childTnLst>
-                                    <p:set>
-                                      <p:cBhvr>
-                                        <p:cTn id="44" dur="1" fill="hold">
-                                          <p:stCondLst>
-                                            <p:cond delay="0"/>
-                                          </p:stCondLst>
-                                        </p:cTn>
-                                        <p:tgtEl>
-                                          <p:spTgt spid="16"/>
-                                        </p:tgtEl>
-                                        <p:attrNameLst>
-                                          <p:attrName>style.visibility</p:attrName>
-                                        </p:attrNameLst>
-                                      </p:cBhvr>
-                                      <p:to>
-                                        <p:strVal val="visible"/>
-                                      </p:to>
-                                    </p:set>
-                                    <p:animEffect transition="in" filter="fade">
-                                      <p:cBhvr>
-                                        <p:cTn id="45" dur="500"/>
-                                        <p:tgtEl>
-                                          <p:spTgt spid="16"/>
-                                        </p:tgtEl>
-                                      </p:cBhvr>
-                                    </p:animEffect>
-                                  </p:childTnLst>
-                                </p:cTn>
-                              </p:par>
-                              <p:par>
-                                <p:cTn id="46" presetID="10" presetClass="entr" presetSubtype="0" fill="hold" grpId="0" nodeType="withEffect">
-                                  <p:stCondLst>
-                                    <p:cond delay="0"/>
-                                  </p:stCondLst>
-                                  <p:childTnLst>
-                                    <p:set>
-                                      <p:cBhvr>
-                                        <p:cTn id="47" dur="1" fill="hold">
-                                          <p:stCondLst>
-                                            <p:cond delay="0"/>
-                                          </p:stCondLst>
-                                        </p:cTn>
-                                        <p:tgtEl>
-                                          <p:spTgt spid="17"/>
-                                        </p:tgtEl>
-                                        <p:attrNameLst>
-                                          <p:attrName>style.visibility</p:attrName>
-                                        </p:attrNameLst>
-                                      </p:cBhvr>
-                                      <p:to>
-                                        <p:strVal val="visible"/>
-                                      </p:to>
-                                    </p:set>
-                                    <p:animEffect transition="in" filter="fade">
-                                      <p:cBhvr>
-                                        <p:cTn id="48" dur="500"/>
-                                        <p:tgtEl>
-                                          <p:spTgt spid="17"/>
-                                        </p:tgtEl>
-                                      </p:cBhvr>
-                                    </p:animEffect>
-                                  </p:childTnLst>
-                                </p:cTn>
-                              </p:par>
-                              <p:par>
-                                <p:cTn id="49" presetID="10" presetClass="entr" presetSubtype="0" fill="hold" grpId="0" nodeType="withEffect">
-                                  <p:stCondLst>
-                                    <p:cond delay="0"/>
-                                  </p:stCondLst>
-                                  <p:childTnLst>
-                                    <p:set>
-                                      <p:cBhvr>
-                                        <p:cTn id="50" dur="1" fill="hold">
-                                          <p:stCondLst>
-                                            <p:cond delay="0"/>
-                                          </p:stCondLst>
-                                        </p:cTn>
-                                        <p:tgtEl>
-                                          <p:spTgt spid="18"/>
-                                        </p:tgtEl>
-                                        <p:attrNameLst>
-                                          <p:attrName>style.visibility</p:attrName>
-                                        </p:attrNameLst>
-                                      </p:cBhvr>
-                                      <p:to>
-                                        <p:strVal val="visible"/>
-                                      </p:to>
-                                    </p:set>
-                                    <p:animEffect transition="in" filter="fade">
-                                      <p:cBhvr>
-                                        <p:cTn id="51" dur="500"/>
-                                        <p:tgtEl>
-                                          <p:spTgt spid="18"/>
-                                        </p:tgtEl>
-                                      </p:cBhvr>
-                                    </p:animEffect>
-                                  </p:childTnLst>
-                                </p:cTn>
-                              </p:par>
-                            </p:childTnLst>
-                          </p:cTn>
-                        </p:par>
-                      </p:childTnLst>
-                    </p:cTn>
-                  </p:par>
-                  <p:par>
-                    <p:cTn id="52" fill="hold">
-                      <p:stCondLst>
-                        <p:cond delay="indefinite"/>
-                      </p:stCondLst>
-                      <p:childTnLst>
-                        <p:par>
-                          <p:cTn id="53" fill="hold">
-                            <p:stCondLst>
-                              <p:cond delay="0"/>
-                            </p:stCondLst>
-                            <p:childTnLst>
-                              <p:par>
-                                <p:cTn id="54" presetID="10" presetClass="entr" presetSubtype="0" fill="hold" grpId="0" nodeType="clickEffect">
-                                  <p:stCondLst>
-                                    <p:cond delay="0"/>
-                                  </p:stCondLst>
-                                  <p:childTnLst>
-                                    <p:set>
-                                      <p:cBhvr>
-                                        <p:cTn id="55" dur="1" fill="hold">
-                                          <p:stCondLst>
-                                            <p:cond delay="0"/>
-                                          </p:stCondLst>
-                                        </p:cTn>
-                                        <p:tgtEl>
-                                          <p:spTgt spid="19"/>
-                                        </p:tgtEl>
-                                        <p:attrNameLst>
-                                          <p:attrName>style.visibility</p:attrName>
-                                        </p:attrNameLst>
-                                      </p:cBhvr>
-                                      <p:to>
-                                        <p:strVal val="visible"/>
-                                      </p:to>
-                                    </p:set>
-                                    <p:animEffect transition="in" filter="fade">
-                                      <p:cBhvr>
-                                        <p:cTn id="56" dur="500"/>
-                                        <p:tgtEl>
-                                          <p:spTgt spid="19"/>
-                                        </p:tgtEl>
-                                      </p:cBhvr>
-                                    </p:animEffect>
-                                  </p:childTnLst>
-                                </p:cTn>
-                              </p:par>
-                              <p:par>
-                                <p:cTn id="57" presetID="10" presetClass="entr" presetSubtype="0" fill="hold" grpId="0" nodeType="withEffect">
+                                <p:cTn id="57" presetID="10" presetClass="entr" presetSubtype="0" fill="hold" grpId="0" nodeType="clickEffect">
                                   <p:stCondLst>
                                     <p:cond delay="0"/>
                                   </p:stCondLst>
@@ -16410,6 +18760,41 @@
                                         <p:cTn id="65" dur="500"/>
                                         <p:tgtEl>
                                           <p:spTgt spid="22"/>
+                                        </p:tgtEl>
+                                      </p:cBhvr>
+                                    </p:animEffect>
+                                  </p:childTnLst>
+                                </p:cTn>
+                              </p:par>
+                              <p:par>
+                                <p:cTn id="66" presetID="10" presetClass="entr" presetSubtype="0" fill="hold" grpId="0" nodeType="withEffect">
+                                  <p:stCondLst>
+                                    <p:cond delay="0"/>
+                                  </p:stCondLst>
+                                  <p:childTnLst>
+                                    <p:set>
+                                      <p:cBhvr>
+                                        <p:cTn id="67" dur="1" fill="hold">
+                                          <p:stCondLst>
+                                            <p:cond delay="0"/>
+                                          </p:stCondLst>
+                                        </p:cTn>
+                                        <p:tgtEl>
+                                          <p:spTgt spid="23"/>
+                                        </p:tgtEl>
+                                        <p:attrNameLst>
+                                          <p:attrName>style.visibility</p:attrName>
+                                        </p:attrNameLst>
+                                      </p:cBhvr>
+                                      <p:to>
+                                        <p:strVal val="visible"/>
+                                      </p:to>
+                                    </p:set>
+                                    <p:animEffect transition="in" filter="fade">
+                                      <p:cBhvr>
+                                        <p:cTn id="68" dur="500"/>
+                                        <p:tgtEl>
+                                          <p:spTgt spid="23"/>
                                         </p:tgtEl>
                                       </p:cBhvr>
                                     </p:animEffect>
@@ -16463,6 +18848,7 @@
       <p:bldP spid="20" grpId="0" animBg="1"/>
       <p:bldP spid="21" grpId="0" animBg="1"/>
       <p:bldP spid="22" grpId="0" animBg="1"/>
+      <p:bldP spid="23" grpId="0" animBg="1"/>
     </p:bldLst>
   </p:timing>
 </p:sld>
@@ -24705,7 +27091,7 @@
         <p:spPr>
           <a:xfrm>
             <a:off x="6949440" y="2514600"/>
-            <a:ext cx="4233672" cy="2971800"/>
+            <a:ext cx="4233672" cy="2743200"/>
           </a:xfrm>
           <a:prstGeom prst="rect">
             <a:avLst/>
